--- a/遗传学(Genetics)/讨论课/Topic-3_遗传学技术/CRISPR-Cas.pptx
+++ b/遗传学(Genetics)/讨论课/Topic-3_遗传学技术/CRISPR-Cas.pptx
@@ -5,7 +5,7 @@
     <p:sldMasterId id="2147483648" r:id="rId1"/>
   </p:sldMasterIdLst>
   <p:notesMasterIdLst>
-    <p:notesMasterId r:id="rId27"/>
+    <p:notesMasterId r:id="rId26"/>
   </p:notesMasterIdLst>
   <p:sldIdLst>
     <p:sldId id="425" r:id="rId2"/>
@@ -13,7 +13,7 @@
     <p:sldId id="457" r:id="rId4"/>
     <p:sldId id="480" r:id="rId5"/>
     <p:sldId id="462" r:id="rId6"/>
-    <p:sldId id="469" r:id="rId7"/>
+    <p:sldId id="481" r:id="rId7"/>
     <p:sldId id="463" r:id="rId8"/>
     <p:sldId id="470" r:id="rId9"/>
     <p:sldId id="479" r:id="rId10"/>
@@ -23,16 +23,15 @@
     <p:sldId id="460" r:id="rId14"/>
     <p:sldId id="468" r:id="rId15"/>
     <p:sldId id="464" r:id="rId16"/>
-    <p:sldId id="471" r:id="rId17"/>
-    <p:sldId id="466" r:id="rId18"/>
-    <p:sldId id="472" r:id="rId19"/>
-    <p:sldId id="473" r:id="rId20"/>
-    <p:sldId id="474" r:id="rId21"/>
-    <p:sldId id="475" r:id="rId22"/>
-    <p:sldId id="465" r:id="rId23"/>
-    <p:sldId id="467" r:id="rId24"/>
-    <p:sldId id="449" r:id="rId25"/>
-    <p:sldId id="277" r:id="rId26"/>
+    <p:sldId id="466" r:id="rId17"/>
+    <p:sldId id="472" r:id="rId18"/>
+    <p:sldId id="473" r:id="rId19"/>
+    <p:sldId id="474" r:id="rId20"/>
+    <p:sldId id="475" r:id="rId21"/>
+    <p:sldId id="465" r:id="rId22"/>
+    <p:sldId id="467" r:id="rId23"/>
+    <p:sldId id="449" r:id="rId24"/>
+    <p:sldId id="277" r:id="rId25"/>
   </p:sldIdLst>
   <p:sldSz cx="12192000" cy="6858000"/>
   <p:notesSz cx="6858000" cy="9144000"/>
@@ -6048,7 +6047,7 @@
         <p:spPr>
           <a:xfrm>
             <a:off x="325821" y="464150"/>
-            <a:ext cx="2008242" cy="584775"/>
+            <a:ext cx="6986015" cy="584775"/>
           </a:xfrm>
           <a:prstGeom prst="rect">
             <a:avLst/>
@@ -6063,7 +6062,7 @@
           <a:p>
             <a:r>
               <a:rPr kumimoji="1" lang="en-US" altLang="zh-CN" sz="3200" dirty="0"/>
-              <a:t>Bird’s View</a:t>
+              <a:t>Engineer CRISPR/Cas for Genome Editing</a:t>
             </a:r>
           </a:p>
         </p:txBody>
@@ -6148,7 +6147,7 @@
     </p:spTree>
     <p:extLst>
       <p:ext uri="{BB962C8B-B14F-4D97-AF65-F5344CB8AC3E}">
-        <p14:creationId xmlns:p14="http://schemas.microsoft.com/office/powerpoint/2010/main" val="1984076272"/>
+        <p14:creationId xmlns:p14="http://schemas.microsoft.com/office/powerpoint/2010/main" val="571569379"/>
       </p:ext>
     </p:extLst>
   </p:cSld>
@@ -6202,160 +6201,6 @@
         <p:spPr>
           <a:xfrm>
             <a:off x="325821" y="464150"/>
-            <a:ext cx="6986015" cy="584775"/>
-          </a:xfrm>
-          <a:prstGeom prst="rect">
-            <a:avLst/>
-          </a:prstGeom>
-          <a:noFill/>
-        </p:spPr>
-        <p:txBody>
-          <a:bodyPr wrap="none" rtlCol="0">
-            <a:spAutoFit/>
-          </a:bodyPr>
-          <a:lstStyle/>
-          <a:p>
-            <a:r>
-              <a:rPr kumimoji="1" lang="en-US" altLang="zh-CN" sz="3200" dirty="0"/>
-              <a:t>Engineer CRISPR/Cas for Genome Editing</a:t>
-            </a:r>
-          </a:p>
-        </p:txBody>
-      </p:sp>
-      <p:sp>
-        <p:nvSpPr>
-          <p:cNvPr id="3" name="Slide Number Placeholder 2">
-            <a:extLst>
-              <a:ext uri="{FF2B5EF4-FFF2-40B4-BE49-F238E27FC236}">
-                <a16:creationId xmlns:a16="http://schemas.microsoft.com/office/drawing/2014/main" id="{E0ACA4BA-E573-EF41-A9EE-F0FE45A1E82A}"/>
-              </a:ext>
-            </a:extLst>
-          </p:cNvPr>
-          <p:cNvSpPr>
-            <a:spLocks noGrp="1"/>
-          </p:cNvSpPr>
-          <p:nvPr>
-            <p:ph type="sldNum" sz="quarter" idx="12"/>
-          </p:nvPr>
-        </p:nvSpPr>
-        <p:spPr>
-          <a:xfrm>
-            <a:off x="9448800" y="6492875"/>
-            <a:ext cx="2743200" cy="365125"/>
-          </a:xfrm>
-        </p:spPr>
-        <p:txBody>
-          <a:bodyPr/>
-          <a:lstStyle/>
-          <a:p>
-            <a:fld id="{234E10DA-A4B5-3C41-BB56-C5CB7549EC2B}" type="slidenum">
-              <a:rPr lang="en-US" smtClean="0"/>
-              <a:t>17</a:t>
-            </a:fld>
-            <a:endParaRPr lang="en-US" dirty="0"/>
-          </a:p>
-        </p:txBody>
-      </p:sp>
-      <p:sp>
-        <p:nvSpPr>
-          <p:cNvPr id="11" name="TextBox 10">
-            <a:extLst>
-              <a:ext uri="{FF2B5EF4-FFF2-40B4-BE49-F238E27FC236}">
-                <a16:creationId xmlns:a16="http://schemas.microsoft.com/office/drawing/2014/main" id="{805CDEA0-63AA-8942-8FB1-8E48524D0D9B}"/>
-              </a:ext>
-            </a:extLst>
-          </p:cNvPr>
-          <p:cNvSpPr txBox="1"/>
-          <p:nvPr/>
-        </p:nvSpPr>
-        <p:spPr>
-          <a:xfrm>
-            <a:off x="325821" y="1048925"/>
-            <a:ext cx="5628411" cy="464871"/>
-          </a:xfrm>
-          <a:prstGeom prst="rect">
-            <a:avLst/>
-          </a:prstGeom>
-          <a:noFill/>
-        </p:spPr>
-        <p:txBody>
-          <a:bodyPr wrap="square" rtlCol="0">
-            <a:spAutoFit/>
-          </a:bodyPr>
-          <a:lstStyle/>
-          <a:p>
-            <a:pPr marL="285750" indent="-285750">
-              <a:lnSpc>
-                <a:spcPct val="150000"/>
-              </a:lnSpc>
-              <a:buFont typeface="Arial" panose="020B0604020202020204" pitchFamily="34" charset="0"/>
-              <a:buChar char="•"/>
-            </a:pPr>
-            <a:r>
-              <a:rPr kumimoji="1" lang="en-CN" altLang="zh-CN" i="1" dirty="0"/>
-              <a:t>TODO</a:t>
-            </a:r>
-            <a:endParaRPr kumimoji="1" lang="en-US" altLang="zh-CN" i="1" dirty="0"/>
-          </a:p>
-        </p:txBody>
-      </p:sp>
-    </p:spTree>
-    <p:extLst>
-      <p:ext uri="{BB962C8B-B14F-4D97-AF65-F5344CB8AC3E}">
-        <p14:creationId xmlns:p14="http://schemas.microsoft.com/office/powerpoint/2010/main" val="571569379"/>
-      </p:ext>
-    </p:extLst>
-  </p:cSld>
-  <p:clrMapOvr>
-    <a:masterClrMapping/>
-  </p:clrMapOvr>
-  <mc:AlternateContent xmlns:mc="http://schemas.openxmlformats.org/markup-compatibility/2006" xmlns:p159="http://schemas.microsoft.com/office/powerpoint/2015/09/main">
-    <mc:Choice Requires="p159">
-      <p:transition>
-        <p159:morph option="byObject"/>
-      </p:transition>
-    </mc:Choice>
-    <mc:Fallback xmlns="">
-      <p:transition>
-        <p:fade/>
-      </p:transition>
-    </mc:Fallback>
-  </mc:AlternateContent>
-</p:sld>
-</file>
-
-<file path=ppt/slides/slide18.xml><?xml version="1.0" encoding="utf-8"?>
-<p:sld xmlns:a="http://schemas.openxmlformats.org/drawingml/2006/main" xmlns:r="http://schemas.openxmlformats.org/officeDocument/2006/relationships" xmlns:p="http://schemas.openxmlformats.org/presentationml/2006/main">
-  <p:cSld>
-    <p:spTree>
-      <p:nvGrpSpPr>
-        <p:cNvPr id="1" name=""/>
-        <p:cNvGrpSpPr/>
-        <p:nvPr/>
-      </p:nvGrpSpPr>
-      <p:grpSpPr>
-        <a:xfrm>
-          <a:off x="0" y="0"/>
-          <a:ext cx="0" cy="0"/>
-          <a:chOff x="0" y="0"/>
-          <a:chExt cx="0" cy="0"/>
-        </a:xfrm>
-      </p:grpSpPr>
-      <p:sp>
-        <p:nvSpPr>
-          <p:cNvPr id="2" name="TextBox 1">
-            <a:extLst>
-              <a:ext uri="{FF2B5EF4-FFF2-40B4-BE49-F238E27FC236}">
-                <a16:creationId xmlns:a16="http://schemas.microsoft.com/office/drawing/2014/main" id="{02E00585-1364-6542-9D0E-647778AED91E}"/>
-              </a:ext>
-            </a:extLst>
-          </p:cNvPr>
-          <p:cNvSpPr txBox="1"/>
-          <p:nvPr/>
-        </p:nvSpPr>
-        <p:spPr>
-          <a:xfrm>
-            <a:off x="325821" y="464150"/>
             <a:ext cx="1858201" cy="584775"/>
           </a:xfrm>
           <a:prstGeom prst="rect">
@@ -6404,7 +6249,7 @@
           <a:p>
             <a:fld id="{234E10DA-A4B5-3C41-BB56-C5CB7549EC2B}" type="slidenum">
               <a:rPr lang="en-US" smtClean="0"/>
-              <a:t>18</a:t>
+              <a:t>17</a:t>
             </a:fld>
             <a:endParaRPr lang="en-US" dirty="0"/>
           </a:p>
@@ -6673,7 +6518,7 @@
 </p:sld>
 </file>
 
-<file path=ppt/slides/slide19.xml><?xml version="1.0" encoding="utf-8"?>
+<file path=ppt/slides/slide18.xml><?xml version="1.0" encoding="utf-8"?>
 <p:sld xmlns:a="http://schemas.openxmlformats.org/drawingml/2006/main" xmlns:r="http://schemas.openxmlformats.org/officeDocument/2006/relationships" xmlns:p="http://schemas.openxmlformats.org/presentationml/2006/main">
   <p:cSld>
     <p:spTree>
@@ -6753,7 +6598,7 @@
           <a:p>
             <a:fld id="{234E10DA-A4B5-3C41-BB56-C5CB7549EC2B}" type="slidenum">
               <a:rPr lang="en-US" smtClean="0"/>
-              <a:t>19</a:t>
+              <a:t>18</a:t>
             </a:fld>
             <a:endParaRPr lang="en-US" dirty="0"/>
           </a:p>
@@ -7022,7 +6867,7 @@
 </p:sld>
 </file>
 
-<file path=ppt/slides/slide2.xml><?xml version="1.0" encoding="utf-8"?>
+<file path=ppt/slides/slide19.xml><?xml version="1.0" encoding="utf-8"?>
 <p:sld xmlns:a="http://schemas.openxmlformats.org/drawingml/2006/main" xmlns:r="http://schemas.openxmlformats.org/officeDocument/2006/relationships" xmlns:p="http://schemas.openxmlformats.org/presentationml/2006/main">
   <p:cSld>
     <p:spTree>
@@ -7054,596 +6899,6 @@
         <p:spPr>
           <a:xfrm>
             <a:off x="325821" y="464150"/>
-            <a:ext cx="1420582" cy="584775"/>
-          </a:xfrm>
-          <a:prstGeom prst="rect">
-            <a:avLst/>
-          </a:prstGeom>
-          <a:noFill/>
-        </p:spPr>
-        <p:txBody>
-          <a:bodyPr wrap="none" rtlCol="0">
-            <a:spAutoFit/>
-          </a:bodyPr>
-          <a:lstStyle/>
-          <a:p>
-            <a:r>
-              <a:rPr kumimoji="1" lang="en-US" altLang="zh-CN" sz="3200" dirty="0"/>
-              <a:t>Outline</a:t>
-            </a:r>
-            <a:endParaRPr kumimoji="1" lang="zh-CN" altLang="en-US" sz="3200" dirty="0"/>
-          </a:p>
-        </p:txBody>
-      </p:sp>
-      <p:sp>
-        <p:nvSpPr>
-          <p:cNvPr id="3" name="Slide Number Placeholder 2">
-            <a:extLst>
-              <a:ext uri="{FF2B5EF4-FFF2-40B4-BE49-F238E27FC236}">
-                <a16:creationId xmlns:a16="http://schemas.microsoft.com/office/drawing/2014/main" id="{E0ACA4BA-E573-EF41-A9EE-F0FE45A1E82A}"/>
-              </a:ext>
-            </a:extLst>
-          </p:cNvPr>
-          <p:cNvSpPr>
-            <a:spLocks noGrp="1"/>
-          </p:cNvSpPr>
-          <p:nvPr>
-            <p:ph type="sldNum" sz="quarter" idx="12"/>
-          </p:nvPr>
-        </p:nvSpPr>
-        <p:spPr>
-          <a:xfrm>
-            <a:off x="9448800" y="6492875"/>
-            <a:ext cx="2743200" cy="365125"/>
-          </a:xfrm>
-        </p:spPr>
-        <p:txBody>
-          <a:bodyPr/>
-          <a:lstStyle/>
-          <a:p>
-            <a:fld id="{234E10DA-A4B5-3C41-BB56-C5CB7549EC2B}" type="slidenum">
-              <a:rPr lang="en-US" smtClean="0"/>
-              <a:t>2</a:t>
-            </a:fld>
-            <a:endParaRPr lang="en-US"/>
-          </a:p>
-        </p:txBody>
-      </p:sp>
-      <p:sp>
-        <p:nvSpPr>
-          <p:cNvPr id="5" name="TextBox 4">
-            <a:extLst>
-              <a:ext uri="{FF2B5EF4-FFF2-40B4-BE49-F238E27FC236}">
-                <a16:creationId xmlns:a16="http://schemas.microsoft.com/office/drawing/2014/main" id="{B586B7C4-301B-EC44-9432-0558C55E4E1B}"/>
-              </a:ext>
-            </a:extLst>
-          </p:cNvPr>
-          <p:cNvSpPr txBox="1"/>
-          <p:nvPr/>
-        </p:nvSpPr>
-        <p:spPr>
-          <a:xfrm>
-            <a:off x="415516" y="1048925"/>
-            <a:ext cx="4600984" cy="5630772"/>
-          </a:xfrm>
-          <a:prstGeom prst="rect">
-            <a:avLst/>
-          </a:prstGeom>
-          <a:noFill/>
-        </p:spPr>
-        <p:txBody>
-          <a:bodyPr wrap="square" rtlCol="0">
-            <a:spAutoFit/>
-          </a:bodyPr>
-          <a:lstStyle/>
-          <a:p>
-            <a:pPr marL="285750" indent="-285750">
-              <a:lnSpc>
-                <a:spcPct val="150000"/>
-              </a:lnSpc>
-              <a:buFont typeface="Arial" panose="020B0604020202020204" pitchFamily="34" charset="0"/>
-              <a:buChar char="•"/>
-              <a:defRPr/>
-            </a:pPr>
-            <a:r>
-              <a:rPr kumimoji="1" lang="en-US" altLang="zh-CN" sz="2000" dirty="0">
-                <a:solidFill>
-                  <a:prstClr val="black"/>
-                </a:solidFill>
-                <a:latin typeface="Calibri" panose="020F0502020204030204"/>
-                <a:ea typeface="等线" panose="02010600030101010101" pitchFamily="2" charset="-122"/>
-              </a:rPr>
-              <a:t>Introduction to Genome Editing</a:t>
-            </a:r>
-          </a:p>
-          <a:p>
-            <a:pPr marL="742950" lvl="1" indent="-285750">
-              <a:lnSpc>
-                <a:spcPct val="150000"/>
-              </a:lnSpc>
-              <a:buFont typeface="Wingdings" pitchFamily="2" charset="2"/>
-              <a:buChar char="ü"/>
-              <a:defRPr/>
-            </a:pPr>
-            <a:r>
-              <a:rPr kumimoji="1" lang="en-US" altLang="zh-CN" dirty="0">
-                <a:solidFill>
-                  <a:prstClr val="black"/>
-                </a:solidFill>
-                <a:latin typeface="Calibri" panose="020F0502020204030204"/>
-                <a:ea typeface="等线" panose="02010600030101010101" pitchFamily="2" charset="-122"/>
-              </a:rPr>
-              <a:t>Introduction</a:t>
-            </a:r>
-          </a:p>
-          <a:p>
-            <a:pPr marL="742950" lvl="1" indent="-285750">
-              <a:lnSpc>
-                <a:spcPct val="150000"/>
-              </a:lnSpc>
-              <a:buFont typeface="Wingdings" pitchFamily="2" charset="2"/>
-              <a:buChar char="ü"/>
-              <a:defRPr/>
-            </a:pPr>
-            <a:r>
-              <a:rPr kumimoji="1" lang="en-US" altLang="zh-CN" dirty="0">
-                <a:solidFill>
-                  <a:prstClr val="black"/>
-                </a:solidFill>
-                <a:latin typeface="Calibri" panose="020F0502020204030204"/>
-                <a:ea typeface="等线" panose="02010600030101010101" pitchFamily="2" charset="-122"/>
-              </a:rPr>
-              <a:t>ZFN, TALEN</a:t>
-            </a:r>
-          </a:p>
-          <a:p>
-            <a:pPr marL="285750" marR="0" lvl="0" indent="-285750" algn="l" defTabSz="914400" rtl="0" eaLnBrk="1" fontAlgn="auto" latinLnBrk="0" hangingPunct="1">
-              <a:lnSpc>
-                <a:spcPct val="150000"/>
-              </a:lnSpc>
-              <a:spcBef>
-                <a:spcPts val="0"/>
-              </a:spcBef>
-              <a:spcAft>
-                <a:spcPts val="0"/>
-              </a:spcAft>
-              <a:buClrTx/>
-              <a:buSzTx/>
-              <a:buFont typeface="Arial" panose="020B0604020202020204" pitchFamily="34" charset="0"/>
-              <a:buChar char="•"/>
-              <a:tabLst/>
-              <a:defRPr/>
-            </a:pPr>
-            <a:r>
-              <a:rPr kumimoji="1" lang="en-US" altLang="zh-CN" sz="2000" dirty="0">
-                <a:solidFill>
-                  <a:prstClr val="black"/>
-                </a:solidFill>
-                <a:latin typeface="Calibri" panose="020F0502020204030204"/>
-                <a:ea typeface="等线" panose="02010600030101010101" pitchFamily="2" charset="-122"/>
-              </a:rPr>
-              <a:t>Introduction to CRISPR/Cas</a:t>
-            </a:r>
-          </a:p>
-          <a:p>
-            <a:pPr marL="742950" lvl="1" indent="-285750">
-              <a:lnSpc>
-                <a:spcPct val="150000"/>
-              </a:lnSpc>
-              <a:buFont typeface="Wingdings" pitchFamily="2" charset="2"/>
-              <a:buChar char="ü"/>
-              <a:defRPr/>
-            </a:pPr>
-            <a:r>
-              <a:rPr kumimoji="1" lang="en-US" altLang="zh-CN" dirty="0">
-                <a:solidFill>
-                  <a:prstClr val="black"/>
-                </a:solidFill>
-                <a:latin typeface="Calibri" panose="020F0502020204030204"/>
-                <a:ea typeface="等线" panose="02010600030101010101" pitchFamily="2" charset="-122"/>
-              </a:rPr>
-              <a:t>Introduction</a:t>
-            </a:r>
-          </a:p>
-          <a:p>
-            <a:pPr marL="742950" lvl="1" indent="-285750">
-              <a:lnSpc>
-                <a:spcPct val="150000"/>
-              </a:lnSpc>
-              <a:buFont typeface="Wingdings" pitchFamily="2" charset="2"/>
-              <a:buChar char="ü"/>
-              <a:defRPr/>
-            </a:pPr>
-            <a:r>
-              <a:rPr kumimoji="1" lang="en-US" altLang="zh-CN" dirty="0">
-                <a:solidFill>
-                  <a:prstClr val="black"/>
-                </a:solidFill>
-                <a:latin typeface="Calibri" panose="020F0502020204030204"/>
-                <a:ea typeface="等线" panose="02010600030101010101" pitchFamily="2" charset="-122"/>
-              </a:rPr>
-              <a:t>Classification</a:t>
-            </a:r>
-          </a:p>
-          <a:p>
-            <a:pPr marL="742950" lvl="1" indent="-285750">
-              <a:lnSpc>
-                <a:spcPct val="150000"/>
-              </a:lnSpc>
-              <a:buFont typeface="Wingdings" pitchFamily="2" charset="2"/>
-              <a:buChar char="ü"/>
-              <a:defRPr/>
-            </a:pPr>
-            <a:r>
-              <a:rPr kumimoji="1" lang="en-US" altLang="zh-CN" dirty="0">
-                <a:solidFill>
-                  <a:prstClr val="black"/>
-                </a:solidFill>
-                <a:latin typeface="Calibri" panose="020F0502020204030204"/>
-                <a:ea typeface="等线" panose="02010600030101010101" pitchFamily="2" charset="-122"/>
-              </a:rPr>
-              <a:t>Mechanism</a:t>
-            </a:r>
-          </a:p>
-          <a:p>
-            <a:pPr marL="285750" marR="0" lvl="0" indent="-285750" algn="l" defTabSz="914400" rtl="0" eaLnBrk="1" fontAlgn="auto" latinLnBrk="0" hangingPunct="1">
-              <a:lnSpc>
-                <a:spcPct val="150000"/>
-              </a:lnSpc>
-              <a:spcBef>
-                <a:spcPts val="0"/>
-              </a:spcBef>
-              <a:spcAft>
-                <a:spcPts val="0"/>
-              </a:spcAft>
-              <a:buClrTx/>
-              <a:buSzTx/>
-              <a:buFont typeface="Arial" panose="020B0604020202020204" pitchFamily="34" charset="0"/>
-              <a:buChar char="•"/>
-              <a:tabLst/>
-              <a:defRPr/>
-            </a:pPr>
-            <a:r>
-              <a:rPr kumimoji="1" lang="en-US" altLang="zh-CN" sz="2000" dirty="0">
-                <a:solidFill>
-                  <a:prstClr val="black"/>
-                </a:solidFill>
-                <a:latin typeface="Calibri" panose="020F0502020204030204"/>
-                <a:ea typeface="等线" panose="02010600030101010101" pitchFamily="2" charset="-122"/>
-              </a:rPr>
-              <a:t>CRISPR/Cas-derived Genome Editing</a:t>
-            </a:r>
-          </a:p>
-          <a:p>
-            <a:pPr marL="742950" lvl="1" indent="-285750">
-              <a:lnSpc>
-                <a:spcPct val="150000"/>
-              </a:lnSpc>
-              <a:buFont typeface="Wingdings" pitchFamily="2" charset="2"/>
-              <a:buChar char="ü"/>
-              <a:defRPr/>
-            </a:pPr>
-            <a:r>
-              <a:rPr kumimoji="1" lang="en-US" altLang="zh-CN" dirty="0">
-                <a:solidFill>
-                  <a:prstClr val="black"/>
-                </a:solidFill>
-                <a:latin typeface="Calibri" panose="020F0502020204030204"/>
-                <a:ea typeface="等线" panose="02010600030101010101" pitchFamily="2" charset="-122"/>
-              </a:rPr>
-              <a:t>Nucleases</a:t>
-            </a:r>
-          </a:p>
-          <a:p>
-            <a:pPr marL="742950" lvl="1" indent="-285750">
-              <a:lnSpc>
-                <a:spcPct val="150000"/>
-              </a:lnSpc>
-              <a:buFont typeface="Wingdings" pitchFamily="2" charset="2"/>
-              <a:buChar char="ü"/>
-              <a:defRPr/>
-            </a:pPr>
-            <a:r>
-              <a:rPr kumimoji="1" lang="en-US" altLang="zh-CN" dirty="0">
-                <a:solidFill>
-                  <a:prstClr val="black"/>
-                </a:solidFill>
-                <a:latin typeface="Calibri" panose="020F0502020204030204"/>
-                <a:ea typeface="等线" panose="02010600030101010101" pitchFamily="2" charset="-122"/>
-              </a:rPr>
-              <a:t>Base editors</a:t>
-            </a:r>
-          </a:p>
-          <a:p>
-            <a:pPr marL="742950" lvl="1" indent="-285750">
-              <a:lnSpc>
-                <a:spcPct val="150000"/>
-              </a:lnSpc>
-              <a:buFont typeface="Wingdings" pitchFamily="2" charset="2"/>
-              <a:buChar char="ü"/>
-              <a:defRPr/>
-            </a:pPr>
-            <a:r>
-              <a:rPr kumimoji="1" lang="en-US" altLang="zh-CN" dirty="0">
-                <a:solidFill>
-                  <a:prstClr val="black"/>
-                </a:solidFill>
-                <a:latin typeface="Calibri" panose="020F0502020204030204"/>
-                <a:ea typeface="等线" panose="02010600030101010101" pitchFamily="2" charset="-122"/>
-              </a:rPr>
-              <a:t>Transposases/recombinases</a:t>
-            </a:r>
-          </a:p>
-          <a:p>
-            <a:pPr marL="742950" lvl="1" indent="-285750">
-              <a:lnSpc>
-                <a:spcPct val="150000"/>
-              </a:lnSpc>
-              <a:buFont typeface="Wingdings" pitchFamily="2" charset="2"/>
-              <a:buChar char="ü"/>
-              <a:defRPr/>
-            </a:pPr>
-            <a:r>
-              <a:rPr kumimoji="1" lang="en-US" altLang="zh-CN" dirty="0">
-                <a:solidFill>
-                  <a:prstClr val="black"/>
-                </a:solidFill>
-                <a:latin typeface="Calibri" panose="020F0502020204030204"/>
-                <a:ea typeface="等线" panose="02010600030101010101" pitchFamily="2" charset="-122"/>
-              </a:rPr>
-              <a:t>Prime editors</a:t>
-            </a:r>
-          </a:p>
-          <a:p>
-            <a:pPr marL="285750" marR="0" lvl="0" indent="-285750" algn="l" defTabSz="914400" rtl="0" eaLnBrk="1" fontAlgn="auto" latinLnBrk="0" hangingPunct="1">
-              <a:lnSpc>
-                <a:spcPct val="150000"/>
-              </a:lnSpc>
-              <a:spcBef>
-                <a:spcPts val="0"/>
-              </a:spcBef>
-              <a:spcAft>
-                <a:spcPts val="0"/>
-              </a:spcAft>
-              <a:buClrTx/>
-              <a:buSzTx/>
-              <a:buFont typeface="Arial" panose="020B0604020202020204" pitchFamily="34" charset="0"/>
-              <a:buChar char="•"/>
-              <a:tabLst/>
-              <a:defRPr/>
-            </a:pPr>
-            <a:r>
-              <a:rPr kumimoji="1" lang="en-US" altLang="zh-CN" sz="2000" dirty="0">
-                <a:solidFill>
-                  <a:prstClr val="black"/>
-                </a:solidFill>
-                <a:latin typeface="Calibri" panose="020F0502020204030204"/>
-                <a:ea typeface="等线" panose="02010600030101010101" pitchFamily="2" charset="-122"/>
-              </a:rPr>
-              <a:t>CRISPR/Cas to Date: Applications</a:t>
-            </a:r>
-            <a:endParaRPr kumimoji="1" lang="en-US" altLang="zh-CN" sz="2000" b="0" i="0" u="none" strike="noStrike" kern="1200" cap="none" spc="0" normalizeH="0" baseline="0" noProof="0" dirty="0">
-              <a:ln>
-                <a:noFill/>
-              </a:ln>
-              <a:solidFill>
-                <a:prstClr val="black"/>
-              </a:solidFill>
-              <a:effectLst/>
-              <a:uLnTx/>
-              <a:uFillTx/>
-              <a:latin typeface="Calibri" panose="020F0502020204030204"/>
-              <a:ea typeface="等线" panose="02010600030101010101" pitchFamily="2" charset="-122"/>
-              <a:cs typeface="+mn-cs"/>
-            </a:endParaRPr>
-          </a:p>
-        </p:txBody>
-      </p:sp>
-      <p:pic>
-        <p:nvPicPr>
-          <p:cNvPr id="9" name="Picture 8">
-            <a:extLst>
-              <a:ext uri="{FF2B5EF4-FFF2-40B4-BE49-F238E27FC236}">
-                <a16:creationId xmlns:a16="http://schemas.microsoft.com/office/drawing/2014/main" id="{80D2BA3B-5773-3E45-93E7-C4286E26D9D3}"/>
-              </a:ext>
-            </a:extLst>
-          </p:cNvPr>
-          <p:cNvPicPr>
-            <a:picLocks noChangeAspect="1"/>
-          </p:cNvPicPr>
-          <p:nvPr/>
-        </p:nvPicPr>
-        <p:blipFill>
-          <a:blip r:embed="rId2"/>
-          <a:stretch>
-            <a:fillRect/>
-          </a:stretch>
-        </p:blipFill>
-        <p:spPr>
-          <a:xfrm>
-            <a:off x="5524500" y="3636313"/>
-            <a:ext cx="2573141" cy="2353978"/>
-          </a:xfrm>
-          <a:prstGeom prst="rect">
-            <a:avLst/>
-          </a:prstGeom>
-        </p:spPr>
-      </p:pic>
-      <p:pic>
-        <p:nvPicPr>
-          <p:cNvPr id="10" name="Picture 9">
-            <a:extLst>
-              <a:ext uri="{FF2B5EF4-FFF2-40B4-BE49-F238E27FC236}">
-                <a16:creationId xmlns:a16="http://schemas.microsoft.com/office/drawing/2014/main" id="{8FBCE768-19A5-484E-A734-91358450A74D}"/>
-              </a:ext>
-            </a:extLst>
-          </p:cNvPr>
-          <p:cNvPicPr>
-            <a:picLocks noChangeAspect="1"/>
-          </p:cNvPicPr>
-          <p:nvPr/>
-        </p:nvPicPr>
-        <p:blipFill>
-          <a:blip r:embed="rId3"/>
-          <a:stretch>
-            <a:fillRect/>
-          </a:stretch>
-        </p:blipFill>
-        <p:spPr>
-          <a:xfrm>
-            <a:off x="8349586" y="3636313"/>
-            <a:ext cx="2573141" cy="2353978"/>
-          </a:xfrm>
-          <a:prstGeom prst="rect">
-            <a:avLst/>
-          </a:prstGeom>
-        </p:spPr>
-      </p:pic>
-      <p:pic>
-        <p:nvPicPr>
-          <p:cNvPr id="1026" name="Picture 2">
-            <a:extLst>
-              <a:ext uri="{FF2B5EF4-FFF2-40B4-BE49-F238E27FC236}">
-                <a16:creationId xmlns:a16="http://schemas.microsoft.com/office/drawing/2014/main" id="{B2CE2F46-28B1-1A47-A89A-3C6305D5AF7B}"/>
-              </a:ext>
-            </a:extLst>
-          </p:cNvPr>
-          <p:cNvPicPr>
-            <a:picLocks noChangeAspect="1" noChangeArrowheads="1"/>
-          </p:cNvPicPr>
-          <p:nvPr/>
-        </p:nvPicPr>
-        <p:blipFill>
-          <a:blip r:embed="rId4">
-            <a:extLst>
-              <a:ext uri="{28A0092B-C50C-407E-A947-70E740481C1C}">
-                <a14:useLocalDpi xmlns:a14="http://schemas.microsoft.com/office/drawing/2010/main" val="0"/>
-              </a:ext>
-            </a:extLst>
-          </a:blip>
-          <a:srcRect/>
-          <a:stretch>
-            <a:fillRect/>
-          </a:stretch>
-        </p:blipFill>
-        <p:spPr bwMode="auto">
-          <a:xfrm>
-            <a:off x="5487195" y="1617158"/>
-            <a:ext cx="5584024" cy="1088449"/>
-          </a:xfrm>
-          <a:prstGeom prst="rect">
-            <a:avLst/>
-          </a:prstGeom>
-          <a:noFill/>
-          <a:extLst>
-            <a:ext uri="{909E8E84-426E-40DD-AFC4-6F175D3DCCD1}">
-              <a14:hiddenFill xmlns:a14="http://schemas.microsoft.com/office/drawing/2010/main">
-                <a:solidFill>
-                  <a:srgbClr val="FFFFFF"/>
-                </a:solidFill>
-              </a14:hiddenFill>
-            </a:ext>
-          </a:extLst>
-        </p:spPr>
-      </p:pic>
-      <p:cxnSp>
-        <p:nvCxnSpPr>
-          <p:cNvPr id="12" name="Straight Arrow Connector 11">
-            <a:extLst>
-              <a:ext uri="{FF2B5EF4-FFF2-40B4-BE49-F238E27FC236}">
-                <a16:creationId xmlns:a16="http://schemas.microsoft.com/office/drawing/2014/main" id="{C14BB06D-7FFC-2A4B-BA40-7A99C52B99C1}"/>
-              </a:ext>
-            </a:extLst>
-          </p:cNvPr>
-          <p:cNvCxnSpPr>
-            <a:stCxn id="1026" idx="2"/>
-          </p:cNvCxnSpPr>
-          <p:nvPr/>
-        </p:nvCxnSpPr>
-        <p:spPr>
-          <a:xfrm>
-            <a:off x="8279207" y="2705607"/>
-            <a:ext cx="0" cy="685293"/>
-          </a:xfrm>
-          <a:prstGeom prst="straightConnector1">
-            <a:avLst/>
-          </a:prstGeom>
-          <a:ln>
-            <a:tailEnd type="triangle"/>
-          </a:ln>
-        </p:spPr>
-        <p:style>
-          <a:lnRef idx="3">
-            <a:schemeClr val="dk1"/>
-          </a:lnRef>
-          <a:fillRef idx="0">
-            <a:schemeClr val="dk1"/>
-          </a:fillRef>
-          <a:effectRef idx="2">
-            <a:schemeClr val="dk1"/>
-          </a:effectRef>
-          <a:fontRef idx="minor">
-            <a:schemeClr val="tx1"/>
-          </a:fontRef>
-        </p:style>
-      </p:cxnSp>
-    </p:spTree>
-    <p:extLst>
-      <p:ext uri="{BB962C8B-B14F-4D97-AF65-F5344CB8AC3E}">
-        <p14:creationId xmlns:p14="http://schemas.microsoft.com/office/powerpoint/2010/main" val="1445324980"/>
-      </p:ext>
-    </p:extLst>
-  </p:cSld>
-  <p:clrMapOvr>
-    <a:masterClrMapping/>
-  </p:clrMapOvr>
-  <mc:AlternateContent xmlns:mc="http://schemas.openxmlformats.org/markup-compatibility/2006" xmlns:p159="http://schemas.microsoft.com/office/powerpoint/2015/09/main">
-    <mc:Choice Requires="p159">
-      <p:transition>
-        <p159:morph option="byObject"/>
-      </p:transition>
-    </mc:Choice>
-    <mc:Fallback xmlns="">
-      <p:transition>
-        <p:fade/>
-      </p:transition>
-    </mc:Fallback>
-  </mc:AlternateContent>
-</p:sld>
-</file>
-
-<file path=ppt/slides/slide20.xml><?xml version="1.0" encoding="utf-8"?>
-<p:sld xmlns:a="http://schemas.openxmlformats.org/drawingml/2006/main" xmlns:r="http://schemas.openxmlformats.org/officeDocument/2006/relationships" xmlns:p="http://schemas.openxmlformats.org/presentationml/2006/main">
-  <p:cSld>
-    <p:spTree>
-      <p:nvGrpSpPr>
-        <p:cNvPr id="1" name=""/>
-        <p:cNvGrpSpPr/>
-        <p:nvPr/>
-      </p:nvGrpSpPr>
-      <p:grpSpPr>
-        <a:xfrm>
-          <a:off x="0" y="0"/>
-          <a:ext cx="0" cy="0"/>
-          <a:chOff x="0" y="0"/>
-          <a:chExt cx="0" cy="0"/>
-        </a:xfrm>
-      </p:grpSpPr>
-      <p:sp>
-        <p:nvSpPr>
-          <p:cNvPr id="2" name="TextBox 1">
-            <a:extLst>
-              <a:ext uri="{FF2B5EF4-FFF2-40B4-BE49-F238E27FC236}">
-                <a16:creationId xmlns:a16="http://schemas.microsoft.com/office/drawing/2014/main" id="{02E00585-1364-6542-9D0E-647778AED91E}"/>
-              </a:ext>
-            </a:extLst>
-          </p:cNvPr>
-          <p:cNvSpPr txBox="1"/>
-          <p:nvPr/>
-        </p:nvSpPr>
-        <p:spPr>
-          <a:xfrm>
-            <a:off x="325821" y="464150"/>
             <a:ext cx="4566058" cy="584775"/>
           </a:xfrm>
           <a:prstGeom prst="rect">
@@ -7692,7 +6947,7 @@
           <a:p>
             <a:fld id="{234E10DA-A4B5-3C41-BB56-C5CB7549EC2B}" type="slidenum">
               <a:rPr lang="en-US" smtClean="0"/>
-              <a:t>20</a:t>
+              <a:t>19</a:t>
             </a:fld>
             <a:endParaRPr lang="en-US" dirty="0"/>
           </a:p>
@@ -7961,7 +7216,7 @@
 </p:sld>
 </file>
 
-<file path=ppt/slides/slide21.xml><?xml version="1.0" encoding="utf-8"?>
+<file path=ppt/slides/slide2.xml><?xml version="1.0" encoding="utf-8"?>
 <p:sld xmlns:a="http://schemas.openxmlformats.org/drawingml/2006/main" xmlns:r="http://schemas.openxmlformats.org/officeDocument/2006/relationships" xmlns:p="http://schemas.openxmlformats.org/presentationml/2006/main">
   <p:cSld>
     <p:spTree>
@@ -7993,6 +7248,596 @@
         <p:spPr>
           <a:xfrm>
             <a:off x="325821" y="464150"/>
+            <a:ext cx="1420582" cy="584775"/>
+          </a:xfrm>
+          <a:prstGeom prst="rect">
+            <a:avLst/>
+          </a:prstGeom>
+          <a:noFill/>
+        </p:spPr>
+        <p:txBody>
+          <a:bodyPr wrap="none" rtlCol="0">
+            <a:spAutoFit/>
+          </a:bodyPr>
+          <a:lstStyle/>
+          <a:p>
+            <a:r>
+              <a:rPr kumimoji="1" lang="en-US" altLang="zh-CN" sz="3200" dirty="0"/>
+              <a:t>Outline</a:t>
+            </a:r>
+            <a:endParaRPr kumimoji="1" lang="zh-CN" altLang="en-US" sz="3200" dirty="0"/>
+          </a:p>
+        </p:txBody>
+      </p:sp>
+      <p:sp>
+        <p:nvSpPr>
+          <p:cNvPr id="3" name="Slide Number Placeholder 2">
+            <a:extLst>
+              <a:ext uri="{FF2B5EF4-FFF2-40B4-BE49-F238E27FC236}">
+                <a16:creationId xmlns:a16="http://schemas.microsoft.com/office/drawing/2014/main" id="{E0ACA4BA-E573-EF41-A9EE-F0FE45A1E82A}"/>
+              </a:ext>
+            </a:extLst>
+          </p:cNvPr>
+          <p:cNvSpPr>
+            <a:spLocks noGrp="1"/>
+          </p:cNvSpPr>
+          <p:nvPr>
+            <p:ph type="sldNum" sz="quarter" idx="12"/>
+          </p:nvPr>
+        </p:nvSpPr>
+        <p:spPr>
+          <a:xfrm>
+            <a:off x="9448800" y="6492875"/>
+            <a:ext cx="2743200" cy="365125"/>
+          </a:xfrm>
+        </p:spPr>
+        <p:txBody>
+          <a:bodyPr/>
+          <a:lstStyle/>
+          <a:p>
+            <a:fld id="{234E10DA-A4B5-3C41-BB56-C5CB7549EC2B}" type="slidenum">
+              <a:rPr lang="en-US" smtClean="0"/>
+              <a:t>2</a:t>
+            </a:fld>
+            <a:endParaRPr lang="en-US"/>
+          </a:p>
+        </p:txBody>
+      </p:sp>
+      <p:sp>
+        <p:nvSpPr>
+          <p:cNvPr id="5" name="TextBox 4">
+            <a:extLst>
+              <a:ext uri="{FF2B5EF4-FFF2-40B4-BE49-F238E27FC236}">
+                <a16:creationId xmlns:a16="http://schemas.microsoft.com/office/drawing/2014/main" id="{B586B7C4-301B-EC44-9432-0558C55E4E1B}"/>
+              </a:ext>
+            </a:extLst>
+          </p:cNvPr>
+          <p:cNvSpPr txBox="1"/>
+          <p:nvPr/>
+        </p:nvSpPr>
+        <p:spPr>
+          <a:xfrm>
+            <a:off x="415516" y="1048925"/>
+            <a:ext cx="4600984" cy="5630772"/>
+          </a:xfrm>
+          <a:prstGeom prst="rect">
+            <a:avLst/>
+          </a:prstGeom>
+          <a:noFill/>
+        </p:spPr>
+        <p:txBody>
+          <a:bodyPr wrap="square" rtlCol="0">
+            <a:spAutoFit/>
+          </a:bodyPr>
+          <a:lstStyle/>
+          <a:p>
+            <a:pPr marL="285750" indent="-285750">
+              <a:lnSpc>
+                <a:spcPct val="150000"/>
+              </a:lnSpc>
+              <a:buFont typeface="Arial" panose="020B0604020202020204" pitchFamily="34" charset="0"/>
+              <a:buChar char="•"/>
+              <a:defRPr/>
+            </a:pPr>
+            <a:r>
+              <a:rPr kumimoji="1" lang="en-US" altLang="zh-CN" sz="2000" dirty="0">
+                <a:solidFill>
+                  <a:prstClr val="black"/>
+                </a:solidFill>
+                <a:latin typeface="Calibri" panose="020F0502020204030204"/>
+                <a:ea typeface="等线" panose="02010600030101010101" pitchFamily="2" charset="-122"/>
+              </a:rPr>
+              <a:t>Introduction to Genome Editing</a:t>
+            </a:r>
+          </a:p>
+          <a:p>
+            <a:pPr marL="742950" lvl="1" indent="-285750">
+              <a:lnSpc>
+                <a:spcPct val="150000"/>
+              </a:lnSpc>
+              <a:buFont typeface="Wingdings" pitchFamily="2" charset="2"/>
+              <a:buChar char="ü"/>
+              <a:defRPr/>
+            </a:pPr>
+            <a:r>
+              <a:rPr kumimoji="1" lang="en-US" altLang="zh-CN" dirty="0">
+                <a:solidFill>
+                  <a:prstClr val="black"/>
+                </a:solidFill>
+                <a:latin typeface="Calibri" panose="020F0502020204030204"/>
+                <a:ea typeface="等线" panose="02010600030101010101" pitchFamily="2" charset="-122"/>
+              </a:rPr>
+              <a:t>Introduction</a:t>
+            </a:r>
+          </a:p>
+          <a:p>
+            <a:pPr marL="742950" lvl="1" indent="-285750">
+              <a:lnSpc>
+                <a:spcPct val="150000"/>
+              </a:lnSpc>
+              <a:buFont typeface="Wingdings" pitchFamily="2" charset="2"/>
+              <a:buChar char="ü"/>
+              <a:defRPr/>
+            </a:pPr>
+            <a:r>
+              <a:rPr kumimoji="1" lang="en-US" altLang="zh-CN" dirty="0">
+                <a:solidFill>
+                  <a:prstClr val="black"/>
+                </a:solidFill>
+                <a:latin typeface="Calibri" panose="020F0502020204030204"/>
+                <a:ea typeface="等线" panose="02010600030101010101" pitchFamily="2" charset="-122"/>
+              </a:rPr>
+              <a:t>ZFN, TALEN</a:t>
+            </a:r>
+          </a:p>
+          <a:p>
+            <a:pPr marL="285750" marR="0" lvl="0" indent="-285750" algn="l" defTabSz="914400" rtl="0" eaLnBrk="1" fontAlgn="auto" latinLnBrk="0" hangingPunct="1">
+              <a:lnSpc>
+                <a:spcPct val="150000"/>
+              </a:lnSpc>
+              <a:spcBef>
+                <a:spcPts val="0"/>
+              </a:spcBef>
+              <a:spcAft>
+                <a:spcPts val="0"/>
+              </a:spcAft>
+              <a:buClrTx/>
+              <a:buSzTx/>
+              <a:buFont typeface="Arial" panose="020B0604020202020204" pitchFamily="34" charset="0"/>
+              <a:buChar char="•"/>
+              <a:tabLst/>
+              <a:defRPr/>
+            </a:pPr>
+            <a:r>
+              <a:rPr kumimoji="1" lang="en-US" altLang="zh-CN" sz="2000" dirty="0">
+                <a:solidFill>
+                  <a:prstClr val="black"/>
+                </a:solidFill>
+                <a:latin typeface="Calibri" panose="020F0502020204030204"/>
+                <a:ea typeface="等线" panose="02010600030101010101" pitchFamily="2" charset="-122"/>
+              </a:rPr>
+              <a:t>Introduction to CRISPR/Cas</a:t>
+            </a:r>
+          </a:p>
+          <a:p>
+            <a:pPr marL="742950" lvl="1" indent="-285750">
+              <a:lnSpc>
+                <a:spcPct val="150000"/>
+              </a:lnSpc>
+              <a:buFont typeface="Wingdings" pitchFamily="2" charset="2"/>
+              <a:buChar char="ü"/>
+              <a:defRPr/>
+            </a:pPr>
+            <a:r>
+              <a:rPr kumimoji="1" lang="en-US" altLang="zh-CN" dirty="0">
+                <a:solidFill>
+                  <a:prstClr val="black"/>
+                </a:solidFill>
+                <a:latin typeface="Calibri" panose="020F0502020204030204"/>
+                <a:ea typeface="等线" panose="02010600030101010101" pitchFamily="2" charset="-122"/>
+              </a:rPr>
+              <a:t>Introduction</a:t>
+            </a:r>
+          </a:p>
+          <a:p>
+            <a:pPr marL="742950" lvl="1" indent="-285750">
+              <a:lnSpc>
+                <a:spcPct val="150000"/>
+              </a:lnSpc>
+              <a:buFont typeface="Wingdings" pitchFamily="2" charset="2"/>
+              <a:buChar char="ü"/>
+              <a:defRPr/>
+            </a:pPr>
+            <a:r>
+              <a:rPr kumimoji="1" lang="en-US" altLang="zh-CN" dirty="0">
+                <a:solidFill>
+                  <a:prstClr val="black"/>
+                </a:solidFill>
+                <a:latin typeface="Calibri" panose="020F0502020204030204"/>
+                <a:ea typeface="等线" panose="02010600030101010101" pitchFamily="2" charset="-122"/>
+              </a:rPr>
+              <a:t>Classification</a:t>
+            </a:r>
+          </a:p>
+          <a:p>
+            <a:pPr marL="742950" lvl="1" indent="-285750">
+              <a:lnSpc>
+                <a:spcPct val="150000"/>
+              </a:lnSpc>
+              <a:buFont typeface="Wingdings" pitchFamily="2" charset="2"/>
+              <a:buChar char="ü"/>
+              <a:defRPr/>
+            </a:pPr>
+            <a:r>
+              <a:rPr kumimoji="1" lang="en-US" altLang="zh-CN" dirty="0">
+                <a:solidFill>
+                  <a:prstClr val="black"/>
+                </a:solidFill>
+                <a:latin typeface="Calibri" panose="020F0502020204030204"/>
+                <a:ea typeface="等线" panose="02010600030101010101" pitchFamily="2" charset="-122"/>
+              </a:rPr>
+              <a:t>Mechanism</a:t>
+            </a:r>
+          </a:p>
+          <a:p>
+            <a:pPr marL="285750" marR="0" lvl="0" indent="-285750" algn="l" defTabSz="914400" rtl="0" eaLnBrk="1" fontAlgn="auto" latinLnBrk="0" hangingPunct="1">
+              <a:lnSpc>
+                <a:spcPct val="150000"/>
+              </a:lnSpc>
+              <a:spcBef>
+                <a:spcPts val="0"/>
+              </a:spcBef>
+              <a:spcAft>
+                <a:spcPts val="0"/>
+              </a:spcAft>
+              <a:buClrTx/>
+              <a:buSzTx/>
+              <a:buFont typeface="Arial" panose="020B0604020202020204" pitchFamily="34" charset="0"/>
+              <a:buChar char="•"/>
+              <a:tabLst/>
+              <a:defRPr/>
+            </a:pPr>
+            <a:r>
+              <a:rPr kumimoji="1" lang="en-US" altLang="zh-CN" sz="2000" dirty="0">
+                <a:solidFill>
+                  <a:prstClr val="black"/>
+                </a:solidFill>
+                <a:latin typeface="Calibri" panose="020F0502020204030204"/>
+                <a:ea typeface="等线" panose="02010600030101010101" pitchFamily="2" charset="-122"/>
+              </a:rPr>
+              <a:t>CRISPR/Cas-derived Genome Editing</a:t>
+            </a:r>
+          </a:p>
+          <a:p>
+            <a:pPr marL="742950" lvl="1" indent="-285750">
+              <a:lnSpc>
+                <a:spcPct val="150000"/>
+              </a:lnSpc>
+              <a:buFont typeface="Wingdings" pitchFamily="2" charset="2"/>
+              <a:buChar char="ü"/>
+              <a:defRPr/>
+            </a:pPr>
+            <a:r>
+              <a:rPr kumimoji="1" lang="en-US" altLang="zh-CN" dirty="0">
+                <a:solidFill>
+                  <a:prstClr val="black"/>
+                </a:solidFill>
+                <a:latin typeface="Calibri" panose="020F0502020204030204"/>
+                <a:ea typeface="等线" panose="02010600030101010101" pitchFamily="2" charset="-122"/>
+              </a:rPr>
+              <a:t>Nucleases</a:t>
+            </a:r>
+          </a:p>
+          <a:p>
+            <a:pPr marL="742950" lvl="1" indent="-285750">
+              <a:lnSpc>
+                <a:spcPct val="150000"/>
+              </a:lnSpc>
+              <a:buFont typeface="Wingdings" pitchFamily="2" charset="2"/>
+              <a:buChar char="ü"/>
+              <a:defRPr/>
+            </a:pPr>
+            <a:r>
+              <a:rPr kumimoji="1" lang="en-US" altLang="zh-CN" dirty="0">
+                <a:solidFill>
+                  <a:prstClr val="black"/>
+                </a:solidFill>
+                <a:latin typeface="Calibri" panose="020F0502020204030204"/>
+                <a:ea typeface="等线" panose="02010600030101010101" pitchFamily="2" charset="-122"/>
+              </a:rPr>
+              <a:t>Base editors</a:t>
+            </a:r>
+          </a:p>
+          <a:p>
+            <a:pPr marL="742950" lvl="1" indent="-285750">
+              <a:lnSpc>
+                <a:spcPct val="150000"/>
+              </a:lnSpc>
+              <a:buFont typeface="Wingdings" pitchFamily="2" charset="2"/>
+              <a:buChar char="ü"/>
+              <a:defRPr/>
+            </a:pPr>
+            <a:r>
+              <a:rPr kumimoji="1" lang="en-US" altLang="zh-CN" dirty="0">
+                <a:solidFill>
+                  <a:prstClr val="black"/>
+                </a:solidFill>
+                <a:latin typeface="Calibri" panose="020F0502020204030204"/>
+                <a:ea typeface="等线" panose="02010600030101010101" pitchFamily="2" charset="-122"/>
+              </a:rPr>
+              <a:t>Transposases/recombinases</a:t>
+            </a:r>
+          </a:p>
+          <a:p>
+            <a:pPr marL="742950" lvl="1" indent="-285750">
+              <a:lnSpc>
+                <a:spcPct val="150000"/>
+              </a:lnSpc>
+              <a:buFont typeface="Wingdings" pitchFamily="2" charset="2"/>
+              <a:buChar char="ü"/>
+              <a:defRPr/>
+            </a:pPr>
+            <a:r>
+              <a:rPr kumimoji="1" lang="en-US" altLang="zh-CN" dirty="0">
+                <a:solidFill>
+                  <a:prstClr val="black"/>
+                </a:solidFill>
+                <a:latin typeface="Calibri" panose="020F0502020204030204"/>
+                <a:ea typeface="等线" panose="02010600030101010101" pitchFamily="2" charset="-122"/>
+              </a:rPr>
+              <a:t>Prime editors</a:t>
+            </a:r>
+          </a:p>
+          <a:p>
+            <a:pPr marL="285750" marR="0" lvl="0" indent="-285750" algn="l" defTabSz="914400" rtl="0" eaLnBrk="1" fontAlgn="auto" latinLnBrk="0" hangingPunct="1">
+              <a:lnSpc>
+                <a:spcPct val="150000"/>
+              </a:lnSpc>
+              <a:spcBef>
+                <a:spcPts val="0"/>
+              </a:spcBef>
+              <a:spcAft>
+                <a:spcPts val="0"/>
+              </a:spcAft>
+              <a:buClrTx/>
+              <a:buSzTx/>
+              <a:buFont typeface="Arial" panose="020B0604020202020204" pitchFamily="34" charset="0"/>
+              <a:buChar char="•"/>
+              <a:tabLst/>
+              <a:defRPr/>
+            </a:pPr>
+            <a:r>
+              <a:rPr kumimoji="1" lang="en-US" altLang="zh-CN" sz="2000" dirty="0">
+                <a:solidFill>
+                  <a:prstClr val="black"/>
+                </a:solidFill>
+                <a:latin typeface="Calibri" panose="020F0502020204030204"/>
+                <a:ea typeface="等线" panose="02010600030101010101" pitchFamily="2" charset="-122"/>
+              </a:rPr>
+              <a:t>CRISPR/Cas to Date: Applications</a:t>
+            </a:r>
+            <a:endParaRPr kumimoji="1" lang="en-US" altLang="zh-CN" sz="2000" b="0" i="0" u="none" strike="noStrike" kern="1200" cap="none" spc="0" normalizeH="0" baseline="0" noProof="0" dirty="0">
+              <a:ln>
+                <a:noFill/>
+              </a:ln>
+              <a:solidFill>
+                <a:prstClr val="black"/>
+              </a:solidFill>
+              <a:effectLst/>
+              <a:uLnTx/>
+              <a:uFillTx/>
+              <a:latin typeface="Calibri" panose="020F0502020204030204"/>
+              <a:ea typeface="等线" panose="02010600030101010101" pitchFamily="2" charset="-122"/>
+              <a:cs typeface="+mn-cs"/>
+            </a:endParaRPr>
+          </a:p>
+        </p:txBody>
+      </p:sp>
+      <p:pic>
+        <p:nvPicPr>
+          <p:cNvPr id="9" name="Picture 8">
+            <a:extLst>
+              <a:ext uri="{FF2B5EF4-FFF2-40B4-BE49-F238E27FC236}">
+                <a16:creationId xmlns:a16="http://schemas.microsoft.com/office/drawing/2014/main" id="{80D2BA3B-5773-3E45-93E7-C4286E26D9D3}"/>
+              </a:ext>
+            </a:extLst>
+          </p:cNvPr>
+          <p:cNvPicPr>
+            <a:picLocks noChangeAspect="1"/>
+          </p:cNvPicPr>
+          <p:nvPr/>
+        </p:nvPicPr>
+        <p:blipFill>
+          <a:blip r:embed="rId2"/>
+          <a:stretch>
+            <a:fillRect/>
+          </a:stretch>
+        </p:blipFill>
+        <p:spPr>
+          <a:xfrm>
+            <a:off x="5524500" y="3636313"/>
+            <a:ext cx="2573141" cy="2353978"/>
+          </a:xfrm>
+          <a:prstGeom prst="rect">
+            <a:avLst/>
+          </a:prstGeom>
+        </p:spPr>
+      </p:pic>
+      <p:pic>
+        <p:nvPicPr>
+          <p:cNvPr id="10" name="Picture 9">
+            <a:extLst>
+              <a:ext uri="{FF2B5EF4-FFF2-40B4-BE49-F238E27FC236}">
+                <a16:creationId xmlns:a16="http://schemas.microsoft.com/office/drawing/2014/main" id="{8FBCE768-19A5-484E-A734-91358450A74D}"/>
+              </a:ext>
+            </a:extLst>
+          </p:cNvPr>
+          <p:cNvPicPr>
+            <a:picLocks noChangeAspect="1"/>
+          </p:cNvPicPr>
+          <p:nvPr/>
+        </p:nvPicPr>
+        <p:blipFill>
+          <a:blip r:embed="rId3"/>
+          <a:stretch>
+            <a:fillRect/>
+          </a:stretch>
+        </p:blipFill>
+        <p:spPr>
+          <a:xfrm>
+            <a:off x="8349586" y="3636313"/>
+            <a:ext cx="2573141" cy="2353978"/>
+          </a:xfrm>
+          <a:prstGeom prst="rect">
+            <a:avLst/>
+          </a:prstGeom>
+        </p:spPr>
+      </p:pic>
+      <p:pic>
+        <p:nvPicPr>
+          <p:cNvPr id="1026" name="Picture 2">
+            <a:extLst>
+              <a:ext uri="{FF2B5EF4-FFF2-40B4-BE49-F238E27FC236}">
+                <a16:creationId xmlns:a16="http://schemas.microsoft.com/office/drawing/2014/main" id="{B2CE2F46-28B1-1A47-A89A-3C6305D5AF7B}"/>
+              </a:ext>
+            </a:extLst>
+          </p:cNvPr>
+          <p:cNvPicPr>
+            <a:picLocks noChangeAspect="1" noChangeArrowheads="1"/>
+          </p:cNvPicPr>
+          <p:nvPr/>
+        </p:nvPicPr>
+        <p:blipFill>
+          <a:blip r:embed="rId4">
+            <a:extLst>
+              <a:ext uri="{28A0092B-C50C-407E-A947-70E740481C1C}">
+                <a14:useLocalDpi xmlns:a14="http://schemas.microsoft.com/office/drawing/2010/main" val="0"/>
+              </a:ext>
+            </a:extLst>
+          </a:blip>
+          <a:srcRect/>
+          <a:stretch>
+            <a:fillRect/>
+          </a:stretch>
+        </p:blipFill>
+        <p:spPr bwMode="auto">
+          <a:xfrm>
+            <a:off x="5487195" y="1617158"/>
+            <a:ext cx="5584024" cy="1088449"/>
+          </a:xfrm>
+          <a:prstGeom prst="rect">
+            <a:avLst/>
+          </a:prstGeom>
+          <a:noFill/>
+          <a:extLst>
+            <a:ext uri="{909E8E84-426E-40DD-AFC4-6F175D3DCCD1}">
+              <a14:hiddenFill xmlns:a14="http://schemas.microsoft.com/office/drawing/2010/main">
+                <a:solidFill>
+                  <a:srgbClr val="FFFFFF"/>
+                </a:solidFill>
+              </a14:hiddenFill>
+            </a:ext>
+          </a:extLst>
+        </p:spPr>
+      </p:pic>
+      <p:cxnSp>
+        <p:nvCxnSpPr>
+          <p:cNvPr id="12" name="Straight Arrow Connector 11">
+            <a:extLst>
+              <a:ext uri="{FF2B5EF4-FFF2-40B4-BE49-F238E27FC236}">
+                <a16:creationId xmlns:a16="http://schemas.microsoft.com/office/drawing/2014/main" id="{C14BB06D-7FFC-2A4B-BA40-7A99C52B99C1}"/>
+              </a:ext>
+            </a:extLst>
+          </p:cNvPr>
+          <p:cNvCxnSpPr>
+            <a:stCxn id="1026" idx="2"/>
+          </p:cNvCxnSpPr>
+          <p:nvPr/>
+        </p:nvCxnSpPr>
+        <p:spPr>
+          <a:xfrm>
+            <a:off x="8279207" y="2705607"/>
+            <a:ext cx="0" cy="685293"/>
+          </a:xfrm>
+          <a:prstGeom prst="straightConnector1">
+            <a:avLst/>
+          </a:prstGeom>
+          <a:ln>
+            <a:tailEnd type="triangle"/>
+          </a:ln>
+        </p:spPr>
+        <p:style>
+          <a:lnRef idx="3">
+            <a:schemeClr val="dk1"/>
+          </a:lnRef>
+          <a:fillRef idx="0">
+            <a:schemeClr val="dk1"/>
+          </a:fillRef>
+          <a:effectRef idx="2">
+            <a:schemeClr val="dk1"/>
+          </a:effectRef>
+          <a:fontRef idx="minor">
+            <a:schemeClr val="tx1"/>
+          </a:fontRef>
+        </p:style>
+      </p:cxnSp>
+    </p:spTree>
+    <p:extLst>
+      <p:ext uri="{BB962C8B-B14F-4D97-AF65-F5344CB8AC3E}">
+        <p14:creationId xmlns:p14="http://schemas.microsoft.com/office/powerpoint/2010/main" val="1445324980"/>
+      </p:ext>
+    </p:extLst>
+  </p:cSld>
+  <p:clrMapOvr>
+    <a:masterClrMapping/>
+  </p:clrMapOvr>
+  <mc:AlternateContent xmlns:mc="http://schemas.openxmlformats.org/markup-compatibility/2006" xmlns:p159="http://schemas.microsoft.com/office/powerpoint/2015/09/main">
+    <mc:Choice Requires="p159">
+      <p:transition>
+        <p159:morph option="byObject"/>
+      </p:transition>
+    </mc:Choice>
+    <mc:Fallback xmlns="">
+      <p:transition>
+        <p:fade/>
+      </p:transition>
+    </mc:Fallback>
+  </mc:AlternateContent>
+</p:sld>
+</file>
+
+<file path=ppt/slides/slide20.xml><?xml version="1.0" encoding="utf-8"?>
+<p:sld xmlns:a="http://schemas.openxmlformats.org/drawingml/2006/main" xmlns:r="http://schemas.openxmlformats.org/officeDocument/2006/relationships" xmlns:p="http://schemas.openxmlformats.org/presentationml/2006/main">
+  <p:cSld>
+    <p:spTree>
+      <p:nvGrpSpPr>
+        <p:cNvPr id="1" name=""/>
+        <p:cNvGrpSpPr/>
+        <p:nvPr/>
+      </p:nvGrpSpPr>
+      <p:grpSpPr>
+        <a:xfrm>
+          <a:off x="0" y="0"/>
+          <a:ext cx="0" cy="0"/>
+          <a:chOff x="0" y="0"/>
+          <a:chExt cx="0" cy="0"/>
+        </a:xfrm>
+      </p:grpSpPr>
+      <p:sp>
+        <p:nvSpPr>
+          <p:cNvPr id="2" name="TextBox 1">
+            <a:extLst>
+              <a:ext uri="{FF2B5EF4-FFF2-40B4-BE49-F238E27FC236}">
+                <a16:creationId xmlns:a16="http://schemas.microsoft.com/office/drawing/2014/main" id="{02E00585-1364-6542-9D0E-647778AED91E}"/>
+              </a:ext>
+            </a:extLst>
+          </p:cNvPr>
+          <p:cNvSpPr txBox="1"/>
+          <p:nvPr/>
+        </p:nvSpPr>
+        <p:spPr>
+          <a:xfrm>
+            <a:off x="325821" y="464150"/>
             <a:ext cx="2410212" cy="584775"/>
           </a:xfrm>
           <a:prstGeom prst="rect">
@@ -8041,7 +7886,7 @@
           <a:p>
             <a:fld id="{234E10DA-A4B5-3C41-BB56-C5CB7549EC2B}" type="slidenum">
               <a:rPr lang="en-US" smtClean="0"/>
-              <a:t>21</a:t>
+              <a:t>20</a:t>
             </a:fld>
             <a:endParaRPr lang="en-US" dirty="0"/>
           </a:p>
@@ -8310,7 +8155,7 @@
 </p:sld>
 </file>
 
-<file path=ppt/slides/slide22.xml><?xml version="1.0" encoding="utf-8"?>
+<file path=ppt/slides/slide21.xml><?xml version="1.0" encoding="utf-8"?>
 <p:sld xmlns:a="http://schemas.openxmlformats.org/drawingml/2006/main" xmlns:r="http://schemas.openxmlformats.org/officeDocument/2006/relationships" xmlns:p="http://schemas.openxmlformats.org/presentationml/2006/main">
   <p:cSld>
     <p:spTree>
@@ -8386,6 +8231,103 @@
     <p:extLst>
       <p:ext uri="{BB962C8B-B14F-4D97-AF65-F5344CB8AC3E}">
         <p14:creationId xmlns:p14="http://schemas.microsoft.com/office/powerpoint/2010/main" val="2865424546"/>
+      </p:ext>
+    </p:extLst>
+  </p:cSld>
+  <p:clrMapOvr>
+    <a:masterClrMapping/>
+  </p:clrMapOvr>
+  <mc:AlternateContent xmlns:mc="http://schemas.openxmlformats.org/markup-compatibility/2006" xmlns:p159="http://schemas.microsoft.com/office/powerpoint/2015/09/main">
+    <mc:Choice Requires="p159">
+      <p:transition>
+        <p159:morph option="byObject"/>
+      </p:transition>
+    </mc:Choice>
+    <mc:Fallback xmlns="">
+      <p:transition>
+        <p:fade/>
+      </p:transition>
+    </mc:Fallback>
+  </mc:AlternateContent>
+</p:sld>
+</file>
+
+<file path=ppt/slides/slide22.xml><?xml version="1.0" encoding="utf-8"?>
+<p:sld xmlns:a="http://schemas.openxmlformats.org/drawingml/2006/main" xmlns:r="http://schemas.openxmlformats.org/officeDocument/2006/relationships" xmlns:p="http://schemas.openxmlformats.org/presentationml/2006/main">
+  <p:cSld>
+    <p:spTree>
+      <p:nvGrpSpPr>
+        <p:cNvPr id="1" name=""/>
+        <p:cNvGrpSpPr/>
+        <p:nvPr/>
+      </p:nvGrpSpPr>
+      <p:grpSpPr>
+        <a:xfrm>
+          <a:off x="0" y="0"/>
+          <a:ext cx="0" cy="0"/>
+          <a:chOff x="0" y="0"/>
+          <a:chExt cx="0" cy="0"/>
+        </a:xfrm>
+      </p:grpSpPr>
+      <p:sp>
+        <p:nvSpPr>
+          <p:cNvPr id="6" name="Title 1">
+            <a:extLst>
+              <a:ext uri="{FF2B5EF4-FFF2-40B4-BE49-F238E27FC236}">
+                <a16:creationId xmlns:a16="http://schemas.microsoft.com/office/drawing/2014/main" id="{EA090842-1323-DF41-83EF-BD22BD676106}"/>
+              </a:ext>
+            </a:extLst>
+          </p:cNvPr>
+          <p:cNvSpPr txBox="1">
+            <a:spLocks/>
+          </p:cNvSpPr>
+          <p:nvPr/>
+        </p:nvSpPr>
+        <p:spPr>
+          <a:xfrm>
+            <a:off x="1524000" y="3183741"/>
+            <a:ext cx="9144000" cy="704273"/>
+          </a:xfrm>
+          <a:prstGeom prst="rect">
+            <a:avLst/>
+          </a:prstGeom>
+        </p:spPr>
+        <p:txBody>
+          <a:bodyPr>
+            <a:noAutofit/>
+          </a:bodyPr>
+          <a:lstStyle>
+            <a:lvl1pPr algn="l" defTabSz="914400" rtl="0" eaLnBrk="1" latinLnBrk="0" hangingPunct="1">
+              <a:lnSpc>
+                <a:spcPct val="90000"/>
+              </a:lnSpc>
+              <a:spcBef>
+                <a:spcPct val="0"/>
+              </a:spcBef>
+              <a:buNone/>
+              <a:defRPr sz="4400" kern="1200">
+                <a:solidFill>
+                  <a:schemeClr val="tx1"/>
+                </a:solidFill>
+                <a:latin typeface="+mj-lt"/>
+                <a:ea typeface="+mj-ea"/>
+                <a:cs typeface="+mj-cs"/>
+              </a:defRPr>
+            </a:lvl1pPr>
+          </a:lstStyle>
+          <a:p>
+            <a:pPr algn="ctr"/>
+            <a:r>
+              <a:rPr lang="en-US" sz="4000" b="1" i="1" dirty="0"/>
+              <a:t>Q&amp;A</a:t>
+            </a:r>
+          </a:p>
+        </p:txBody>
+      </p:sp>
+    </p:spTree>
+    <p:extLst>
+      <p:ext uri="{BB962C8B-B14F-4D97-AF65-F5344CB8AC3E}">
+        <p14:creationId xmlns:p14="http://schemas.microsoft.com/office/powerpoint/2010/main" val="1504864324"/>
       </p:ext>
     </p:extLst>
   </p:cSld>
@@ -8426,103 +8368,6 @@
       </p:grpSpPr>
       <p:sp>
         <p:nvSpPr>
-          <p:cNvPr id="6" name="Title 1">
-            <a:extLst>
-              <a:ext uri="{FF2B5EF4-FFF2-40B4-BE49-F238E27FC236}">
-                <a16:creationId xmlns:a16="http://schemas.microsoft.com/office/drawing/2014/main" id="{EA090842-1323-DF41-83EF-BD22BD676106}"/>
-              </a:ext>
-            </a:extLst>
-          </p:cNvPr>
-          <p:cNvSpPr txBox="1">
-            <a:spLocks/>
-          </p:cNvSpPr>
-          <p:nvPr/>
-        </p:nvSpPr>
-        <p:spPr>
-          <a:xfrm>
-            <a:off x="1524000" y="3183741"/>
-            <a:ext cx="9144000" cy="704273"/>
-          </a:xfrm>
-          <a:prstGeom prst="rect">
-            <a:avLst/>
-          </a:prstGeom>
-        </p:spPr>
-        <p:txBody>
-          <a:bodyPr>
-            <a:noAutofit/>
-          </a:bodyPr>
-          <a:lstStyle>
-            <a:lvl1pPr algn="l" defTabSz="914400" rtl="0" eaLnBrk="1" latinLnBrk="0" hangingPunct="1">
-              <a:lnSpc>
-                <a:spcPct val="90000"/>
-              </a:lnSpc>
-              <a:spcBef>
-                <a:spcPct val="0"/>
-              </a:spcBef>
-              <a:buNone/>
-              <a:defRPr sz="4400" kern="1200">
-                <a:solidFill>
-                  <a:schemeClr val="tx1"/>
-                </a:solidFill>
-                <a:latin typeface="+mj-lt"/>
-                <a:ea typeface="+mj-ea"/>
-                <a:cs typeface="+mj-cs"/>
-              </a:defRPr>
-            </a:lvl1pPr>
-          </a:lstStyle>
-          <a:p>
-            <a:pPr algn="ctr"/>
-            <a:r>
-              <a:rPr lang="en-US" sz="4000" b="1" i="1" dirty="0"/>
-              <a:t>Q&amp;A</a:t>
-            </a:r>
-          </a:p>
-        </p:txBody>
-      </p:sp>
-    </p:spTree>
-    <p:extLst>
-      <p:ext uri="{BB962C8B-B14F-4D97-AF65-F5344CB8AC3E}">
-        <p14:creationId xmlns:p14="http://schemas.microsoft.com/office/powerpoint/2010/main" val="1504864324"/>
-      </p:ext>
-    </p:extLst>
-  </p:cSld>
-  <p:clrMapOvr>
-    <a:masterClrMapping/>
-  </p:clrMapOvr>
-  <mc:AlternateContent xmlns:mc="http://schemas.openxmlformats.org/markup-compatibility/2006" xmlns:p159="http://schemas.microsoft.com/office/powerpoint/2015/09/main">
-    <mc:Choice Requires="p159">
-      <p:transition>
-        <p159:morph option="byObject"/>
-      </p:transition>
-    </mc:Choice>
-    <mc:Fallback xmlns="">
-      <p:transition>
-        <p:fade/>
-      </p:transition>
-    </mc:Fallback>
-  </mc:AlternateContent>
-</p:sld>
-</file>
-
-<file path=ppt/slides/slide24.xml><?xml version="1.0" encoding="utf-8"?>
-<p:sld xmlns:a="http://schemas.openxmlformats.org/drawingml/2006/main" xmlns:r="http://schemas.openxmlformats.org/officeDocument/2006/relationships" xmlns:p="http://schemas.openxmlformats.org/presentationml/2006/main">
-  <p:cSld>
-    <p:spTree>
-      <p:nvGrpSpPr>
-        <p:cNvPr id="1" name=""/>
-        <p:cNvGrpSpPr/>
-        <p:nvPr/>
-      </p:nvGrpSpPr>
-      <p:grpSpPr>
-        <a:xfrm>
-          <a:off x="0" y="0"/>
-          <a:ext cx="0" cy="0"/>
-          <a:chOff x="0" y="0"/>
-          <a:chExt cx="0" cy="0"/>
-        </a:xfrm>
-      </p:grpSpPr>
-      <p:sp>
-        <p:nvSpPr>
           <p:cNvPr id="2" name="TextBox 1">
             <a:extLst>
               <a:ext uri="{FF2B5EF4-FFF2-40B4-BE49-F238E27FC236}">
@@ -8644,7 +8489,7 @@
 </p:sld>
 </file>
 
-<file path=ppt/slides/slide25.xml><?xml version="1.0" encoding="utf-8"?>
+<file path=ppt/slides/slide24.xml><?xml version="1.0" encoding="utf-8"?>
 <p:sld xmlns:a="http://schemas.openxmlformats.org/drawingml/2006/main" xmlns:r="http://schemas.openxmlformats.org/officeDocument/2006/relationships" xmlns:p="http://schemas.openxmlformats.org/presentationml/2006/main">
   <p:cSld>
     <p:spTree>
@@ -9299,7 +9144,7 @@
         <p:spPr>
           <a:xfrm>
             <a:off x="6980859" y="4984396"/>
-            <a:ext cx="4935882" cy="954107"/>
+            <a:ext cx="4935882" cy="1384995"/>
           </a:xfrm>
           <a:prstGeom prst="rect">
             <a:avLst/>
@@ -9322,13 +9167,12 @@
             </a:r>
           </a:p>
           <a:p>
-            <a:r>
-              <a:rPr kumimoji="1" lang="en-US" altLang="zh-CN" sz="1400" b="1" dirty="0"/>
-              <a:t>A</a:t>
-            </a:r>
+            <a:pPr marL="342900" indent="-342900">
+              <a:buAutoNum type="alphaUcPeriod"/>
+            </a:pPr>
             <a:r>
               <a:rPr kumimoji="1" lang="en-US" altLang="zh-CN" sz="1400" dirty="0"/>
-              <a:t>. Indels and inversion introduced by NHEJ in the absence of a homologous donor</a:t>
+              <a:t>Indels and inversion introduced by NHEJ in the absence of a homologous donor</a:t>
             </a:r>
             <a:r>
               <a:rPr kumimoji="1" lang="zh-CN" altLang="en-US" sz="1400" dirty="0"/>
@@ -9338,13 +9182,14 @@
               <a:rPr kumimoji="1" lang="en-US" altLang="zh-CN" sz="1400" dirty="0"/>
               <a:t>template DNA. </a:t>
             </a:r>
-            <a:r>
-              <a:rPr kumimoji="1" lang="en-US" altLang="zh-CN" sz="1400" b="1" dirty="0"/>
-              <a:t>B</a:t>
-            </a:r>
+          </a:p>
+          <a:p>
+            <a:pPr marL="342900" indent="-342900">
+              <a:buAutoNum type="alphaUcPeriod"/>
+            </a:pPr>
             <a:r>
               <a:rPr kumimoji="1" lang="en-US" altLang="zh-CN" sz="1400" dirty="0"/>
-              <a:t>. Recombination introduced by HDR in</a:t>
+              <a:t>Recombination introduced by HDR in</a:t>
             </a:r>
             <a:r>
               <a:rPr kumimoji="1" lang="zh-CN" altLang="en-US" sz="1400" dirty="0"/>
@@ -9353,6 +9198,20 @@
             <a:r>
               <a:rPr kumimoji="1" lang="en-US" altLang="zh-CN" sz="1400" dirty="0"/>
               <a:t>the presence of the donor DNA.</a:t>
+            </a:r>
+          </a:p>
+          <a:p>
+            <a:r>
+              <a:rPr kumimoji="1" lang="en-US" altLang="zh-CN" sz="1400" dirty="0"/>
+              <a:t>Lightnings</a:t>
+            </a:r>
+            <a:r>
+              <a:rPr kumimoji="1" lang="zh-CN" altLang="en-US" sz="1400" dirty="0"/>
+              <a:t> </a:t>
+            </a:r>
+            <a:r>
+              <a:rPr kumimoji="1" lang="en-US" altLang="zh-CN" sz="1400" dirty="0"/>
+              <a:t>represent DSB sites.</a:t>
             </a:r>
           </a:p>
         </p:txBody>
@@ -9414,7 +9273,7 @@
         <p:spPr>
           <a:xfrm>
             <a:off x="325821" y="464150"/>
-            <a:ext cx="830677" cy="584775"/>
+            <a:ext cx="4778680" cy="584775"/>
           </a:xfrm>
           <a:prstGeom prst="rect">
             <a:avLst/>
@@ -9429,7 +9288,11 @@
           <a:p>
             <a:r>
               <a:rPr kumimoji="1" lang="en-US" altLang="zh-CN" sz="3200" dirty="0"/>
-              <a:t>ZFN</a:t>
+              <a:t>Zinc-Finger Nucleases (</a:t>
+            </a:r>
+            <a:r>
+              <a:rPr kumimoji="1" lang="en-CN" altLang="zh-CN" sz="3200" dirty="0"/>
+              <a:t>ZFN)</a:t>
             </a:r>
           </a:p>
         </p:txBody>
@@ -9602,10 +9465,353 @@
       </p:grpSp>
       <p:sp>
         <p:nvSpPr>
-          <p:cNvPr id="11" name="TextBox 10">
-            <a:extLst>
-              <a:ext uri="{FF2B5EF4-FFF2-40B4-BE49-F238E27FC236}">
-                <a16:creationId xmlns:a16="http://schemas.microsoft.com/office/drawing/2014/main" id="{805CDEA0-63AA-8942-8FB1-8E48524D0D9B}"/>
+          <p:cNvPr id="12" name="Freeform 11">
+            <a:extLst>
+              <a:ext uri="{FF2B5EF4-FFF2-40B4-BE49-F238E27FC236}">
+                <a16:creationId xmlns:a16="http://schemas.microsoft.com/office/drawing/2014/main" id="{A885EF36-6A6F-E04E-9AF2-49C11CC69B15}"/>
+              </a:ext>
+            </a:extLst>
+          </p:cNvPr>
+          <p:cNvSpPr/>
+          <p:nvPr/>
+        </p:nvSpPr>
+        <p:spPr>
+          <a:xfrm>
+            <a:off x="416717" y="1300736"/>
+            <a:ext cx="739781" cy="748145"/>
+          </a:xfrm>
+          <a:custGeom>
+            <a:avLst/>
+            <a:gdLst>
+              <a:gd name="connsiteX0" fmla="*/ 86639 w 739781"/>
+              <a:gd name="connsiteY0" fmla="*/ 273132 h 748145"/>
+              <a:gd name="connsiteX1" fmla="*/ 169766 w 739781"/>
+              <a:gd name="connsiteY1" fmla="*/ 225631 h 748145"/>
+              <a:gd name="connsiteX2" fmla="*/ 205392 w 739781"/>
+              <a:gd name="connsiteY2" fmla="*/ 190005 h 748145"/>
+              <a:gd name="connsiteX3" fmla="*/ 241018 w 739781"/>
+              <a:gd name="connsiteY3" fmla="*/ 166254 h 748145"/>
+              <a:gd name="connsiteX4" fmla="*/ 264768 w 739781"/>
+              <a:gd name="connsiteY4" fmla="*/ 130628 h 748145"/>
+              <a:gd name="connsiteX5" fmla="*/ 300394 w 739781"/>
+              <a:gd name="connsiteY5" fmla="*/ 106878 h 748145"/>
+              <a:gd name="connsiteX6" fmla="*/ 383522 w 739781"/>
+              <a:gd name="connsiteY6" fmla="*/ 11875 h 748145"/>
+              <a:gd name="connsiteX7" fmla="*/ 419148 w 739781"/>
+              <a:gd name="connsiteY7" fmla="*/ 0 h 748145"/>
+              <a:gd name="connsiteX8" fmla="*/ 549776 w 739781"/>
+              <a:gd name="connsiteY8" fmla="*/ 23750 h 748145"/>
+              <a:gd name="connsiteX9" fmla="*/ 621028 w 739781"/>
+              <a:gd name="connsiteY9" fmla="*/ 71252 h 748145"/>
+              <a:gd name="connsiteX10" fmla="*/ 692280 w 739781"/>
+              <a:gd name="connsiteY10" fmla="*/ 142504 h 748145"/>
+              <a:gd name="connsiteX11" fmla="*/ 739781 w 739781"/>
+              <a:gd name="connsiteY11" fmla="*/ 213756 h 748145"/>
+              <a:gd name="connsiteX12" fmla="*/ 727906 w 739781"/>
+              <a:gd name="connsiteY12" fmla="*/ 427512 h 748145"/>
+              <a:gd name="connsiteX13" fmla="*/ 609153 w 739781"/>
+              <a:gd name="connsiteY13" fmla="*/ 546265 h 748145"/>
+              <a:gd name="connsiteX14" fmla="*/ 573527 w 739781"/>
+              <a:gd name="connsiteY14" fmla="*/ 570015 h 748145"/>
+              <a:gd name="connsiteX15" fmla="*/ 537901 w 739781"/>
+              <a:gd name="connsiteY15" fmla="*/ 593766 h 748145"/>
+              <a:gd name="connsiteX16" fmla="*/ 466649 w 739781"/>
+              <a:gd name="connsiteY16" fmla="*/ 641267 h 748145"/>
+              <a:gd name="connsiteX17" fmla="*/ 395397 w 739781"/>
+              <a:gd name="connsiteY17" fmla="*/ 688769 h 748145"/>
+              <a:gd name="connsiteX18" fmla="*/ 359771 w 739781"/>
+              <a:gd name="connsiteY18" fmla="*/ 712519 h 748145"/>
+              <a:gd name="connsiteX19" fmla="*/ 288519 w 739781"/>
+              <a:gd name="connsiteY19" fmla="*/ 736270 h 748145"/>
+              <a:gd name="connsiteX20" fmla="*/ 252893 w 739781"/>
+              <a:gd name="connsiteY20" fmla="*/ 748145 h 748145"/>
+              <a:gd name="connsiteX21" fmla="*/ 217267 w 739781"/>
+              <a:gd name="connsiteY21" fmla="*/ 736270 h 748145"/>
+              <a:gd name="connsiteX22" fmla="*/ 146015 w 739781"/>
+              <a:gd name="connsiteY22" fmla="*/ 676893 h 748145"/>
+              <a:gd name="connsiteX23" fmla="*/ 98514 w 739781"/>
+              <a:gd name="connsiteY23" fmla="*/ 605641 h 748145"/>
+              <a:gd name="connsiteX24" fmla="*/ 27262 w 739781"/>
+              <a:gd name="connsiteY24" fmla="*/ 558140 h 748145"/>
+              <a:gd name="connsiteX25" fmla="*/ 3511 w 739781"/>
+              <a:gd name="connsiteY25" fmla="*/ 522514 h 748145"/>
+              <a:gd name="connsiteX26" fmla="*/ 39137 w 739781"/>
+              <a:gd name="connsiteY26" fmla="*/ 391886 h 748145"/>
+              <a:gd name="connsiteX27" fmla="*/ 62888 w 739781"/>
+              <a:gd name="connsiteY27" fmla="*/ 320634 h 748145"/>
+              <a:gd name="connsiteX28" fmla="*/ 86639 w 739781"/>
+              <a:gd name="connsiteY28" fmla="*/ 273132 h 748145"/>
+            </a:gdLst>
+            <a:ahLst/>
+            <a:cxnLst>
+              <a:cxn ang="0">
+                <a:pos x="connsiteX0" y="connsiteY0"/>
+              </a:cxn>
+              <a:cxn ang="0">
+                <a:pos x="connsiteX1" y="connsiteY1"/>
+              </a:cxn>
+              <a:cxn ang="0">
+                <a:pos x="connsiteX2" y="connsiteY2"/>
+              </a:cxn>
+              <a:cxn ang="0">
+                <a:pos x="connsiteX3" y="connsiteY3"/>
+              </a:cxn>
+              <a:cxn ang="0">
+                <a:pos x="connsiteX4" y="connsiteY4"/>
+              </a:cxn>
+              <a:cxn ang="0">
+                <a:pos x="connsiteX5" y="connsiteY5"/>
+              </a:cxn>
+              <a:cxn ang="0">
+                <a:pos x="connsiteX6" y="connsiteY6"/>
+              </a:cxn>
+              <a:cxn ang="0">
+                <a:pos x="connsiteX7" y="connsiteY7"/>
+              </a:cxn>
+              <a:cxn ang="0">
+                <a:pos x="connsiteX8" y="connsiteY8"/>
+              </a:cxn>
+              <a:cxn ang="0">
+                <a:pos x="connsiteX9" y="connsiteY9"/>
+              </a:cxn>
+              <a:cxn ang="0">
+                <a:pos x="connsiteX10" y="connsiteY10"/>
+              </a:cxn>
+              <a:cxn ang="0">
+                <a:pos x="connsiteX11" y="connsiteY11"/>
+              </a:cxn>
+              <a:cxn ang="0">
+                <a:pos x="connsiteX12" y="connsiteY12"/>
+              </a:cxn>
+              <a:cxn ang="0">
+                <a:pos x="connsiteX13" y="connsiteY13"/>
+              </a:cxn>
+              <a:cxn ang="0">
+                <a:pos x="connsiteX14" y="connsiteY14"/>
+              </a:cxn>
+              <a:cxn ang="0">
+                <a:pos x="connsiteX15" y="connsiteY15"/>
+              </a:cxn>
+              <a:cxn ang="0">
+                <a:pos x="connsiteX16" y="connsiteY16"/>
+              </a:cxn>
+              <a:cxn ang="0">
+                <a:pos x="connsiteX17" y="connsiteY17"/>
+              </a:cxn>
+              <a:cxn ang="0">
+                <a:pos x="connsiteX18" y="connsiteY18"/>
+              </a:cxn>
+              <a:cxn ang="0">
+                <a:pos x="connsiteX19" y="connsiteY19"/>
+              </a:cxn>
+              <a:cxn ang="0">
+                <a:pos x="connsiteX20" y="connsiteY20"/>
+              </a:cxn>
+              <a:cxn ang="0">
+                <a:pos x="connsiteX21" y="connsiteY21"/>
+              </a:cxn>
+              <a:cxn ang="0">
+                <a:pos x="connsiteX22" y="connsiteY22"/>
+              </a:cxn>
+              <a:cxn ang="0">
+                <a:pos x="connsiteX23" y="connsiteY23"/>
+              </a:cxn>
+              <a:cxn ang="0">
+                <a:pos x="connsiteX24" y="connsiteY24"/>
+              </a:cxn>
+              <a:cxn ang="0">
+                <a:pos x="connsiteX25" y="connsiteY25"/>
+              </a:cxn>
+              <a:cxn ang="0">
+                <a:pos x="connsiteX26" y="connsiteY26"/>
+              </a:cxn>
+              <a:cxn ang="0">
+                <a:pos x="connsiteX27" y="connsiteY27"/>
+              </a:cxn>
+              <a:cxn ang="0">
+                <a:pos x="connsiteX28" y="connsiteY28"/>
+              </a:cxn>
+            </a:cxnLst>
+            <a:rect l="l" t="t" r="r" b="b"/>
+            <a:pathLst>
+              <a:path w="739781" h="748145">
+                <a:moveTo>
+                  <a:pt x="86639" y="273132"/>
+                </a:moveTo>
+                <a:cubicBezTo>
+                  <a:pt x="114348" y="257298"/>
+                  <a:pt x="143621" y="243932"/>
+                  <a:pt x="169766" y="225631"/>
+                </a:cubicBezTo>
+                <a:cubicBezTo>
+                  <a:pt x="183524" y="216000"/>
+                  <a:pt x="192490" y="200756"/>
+                  <a:pt x="205392" y="190005"/>
+                </a:cubicBezTo>
+                <a:cubicBezTo>
+                  <a:pt x="216356" y="180868"/>
+                  <a:pt x="229143" y="174171"/>
+                  <a:pt x="241018" y="166254"/>
+                </a:cubicBezTo>
+                <a:cubicBezTo>
+                  <a:pt x="248935" y="154379"/>
+                  <a:pt x="254676" y="140720"/>
+                  <a:pt x="264768" y="130628"/>
+                </a:cubicBezTo>
+                <a:cubicBezTo>
+                  <a:pt x="274860" y="120536"/>
+                  <a:pt x="290996" y="117619"/>
+                  <a:pt x="300394" y="106878"/>
+                </a:cubicBezTo>
+                <a:cubicBezTo>
+                  <a:pt x="355811" y="43545"/>
+                  <a:pt x="324146" y="41563"/>
+                  <a:pt x="383522" y="11875"/>
+                </a:cubicBezTo>
+                <a:cubicBezTo>
+                  <a:pt x="394718" y="6277"/>
+                  <a:pt x="407273" y="3958"/>
+                  <a:pt x="419148" y="0"/>
+                </a:cubicBezTo>
+                <a:cubicBezTo>
+                  <a:pt x="423174" y="503"/>
+                  <a:pt x="524430" y="6853"/>
+                  <a:pt x="549776" y="23750"/>
+                </a:cubicBezTo>
+                <a:cubicBezTo>
+                  <a:pt x="638735" y="83055"/>
+                  <a:pt x="536315" y="43013"/>
+                  <a:pt x="621028" y="71252"/>
+                </a:cubicBezTo>
+                <a:cubicBezTo>
+                  <a:pt x="644779" y="95003"/>
+                  <a:pt x="673649" y="114557"/>
+                  <a:pt x="692280" y="142504"/>
+                </a:cubicBezTo>
+                <a:lnTo>
+                  <a:pt x="739781" y="213756"/>
+                </a:lnTo>
+                <a:cubicBezTo>
+                  <a:pt x="735823" y="285008"/>
+                  <a:pt x="742460" y="357650"/>
+                  <a:pt x="727906" y="427512"/>
+                </a:cubicBezTo>
+                <a:cubicBezTo>
+                  <a:pt x="715137" y="488802"/>
+                  <a:pt x="653588" y="516642"/>
+                  <a:pt x="609153" y="546265"/>
+                </a:cubicBezTo>
+                <a:lnTo>
+                  <a:pt x="573527" y="570015"/>
+                </a:lnTo>
+                <a:cubicBezTo>
+                  <a:pt x="561652" y="577932"/>
+                  <a:pt x="547993" y="583674"/>
+                  <a:pt x="537901" y="593766"/>
+                </a:cubicBezTo>
+                <a:cubicBezTo>
+                  <a:pt x="493424" y="638243"/>
+                  <a:pt x="518207" y="624081"/>
+                  <a:pt x="466649" y="641267"/>
+                </a:cubicBezTo>
+                <a:lnTo>
+                  <a:pt x="395397" y="688769"/>
+                </a:lnTo>
+                <a:cubicBezTo>
+                  <a:pt x="383522" y="696686"/>
+                  <a:pt x="373311" y="708006"/>
+                  <a:pt x="359771" y="712519"/>
+                </a:cubicBezTo>
+                <a:lnTo>
+                  <a:pt x="288519" y="736270"/>
+                </a:lnTo>
+                <a:lnTo>
+                  <a:pt x="252893" y="748145"/>
+                </a:lnTo>
+                <a:cubicBezTo>
+                  <a:pt x="241018" y="744187"/>
+                  <a:pt x="228463" y="741868"/>
+                  <a:pt x="217267" y="736270"/>
+                </a:cubicBezTo>
+                <a:cubicBezTo>
+                  <a:pt x="192318" y="723795"/>
+                  <a:pt x="162727" y="698380"/>
+                  <a:pt x="146015" y="676893"/>
+                </a:cubicBezTo>
+                <a:cubicBezTo>
+                  <a:pt x="128490" y="654361"/>
+                  <a:pt x="122265" y="621475"/>
+                  <a:pt x="98514" y="605641"/>
+                </a:cubicBezTo>
+                <a:lnTo>
+                  <a:pt x="27262" y="558140"/>
+                </a:lnTo>
+                <a:cubicBezTo>
+                  <a:pt x="19345" y="546265"/>
+                  <a:pt x="4803" y="536728"/>
+                  <a:pt x="3511" y="522514"/>
+                </a:cubicBezTo>
+                <a:cubicBezTo>
+                  <a:pt x="-7657" y="399667"/>
+                  <a:pt x="8782" y="460185"/>
+                  <a:pt x="39137" y="391886"/>
+                </a:cubicBezTo>
+                <a:cubicBezTo>
+                  <a:pt x="49305" y="369008"/>
+                  <a:pt x="54971" y="344385"/>
+                  <a:pt x="62888" y="320634"/>
+                </a:cubicBezTo>
+                <a:lnTo>
+                  <a:pt x="86639" y="273132"/>
+                </a:lnTo>
+                <a:close/>
+              </a:path>
+            </a:pathLst>
+          </a:custGeom>
+          <a:solidFill>
+            <a:schemeClr val="accent2"/>
+          </a:solidFill>
+          <a:ln w="19050">
+            <a:solidFill>
+              <a:schemeClr val="tx1"/>
+            </a:solidFill>
+          </a:ln>
+        </p:spPr>
+        <p:style>
+          <a:lnRef idx="2">
+            <a:schemeClr val="accent1">
+              <a:shade val="50000"/>
+            </a:schemeClr>
+          </a:lnRef>
+          <a:fillRef idx="1">
+            <a:schemeClr val="accent1"/>
+          </a:fillRef>
+          <a:effectRef idx="0">
+            <a:schemeClr val="accent1"/>
+          </a:effectRef>
+          <a:fontRef idx="minor">
+            <a:schemeClr val="lt1"/>
+          </a:fontRef>
+        </p:style>
+        <p:txBody>
+          <a:bodyPr rtlCol="0" anchor="ctr"/>
+          <a:lstStyle/>
+          <a:p>
+            <a:pPr algn="ctr"/>
+            <a:r>
+              <a:rPr kumimoji="1" lang="en-US" altLang="zh-CN" dirty="0" err="1"/>
+              <a:t>FokI</a:t>
+            </a:r>
+            <a:endParaRPr kumimoji="1" lang="zh-CN" altLang="en-US" dirty="0"/>
+          </a:p>
+        </p:txBody>
+      </p:sp>
+      <p:sp>
+        <p:nvSpPr>
+          <p:cNvPr id="13" name="TextBox 12">
+            <a:extLst>
+              <a:ext uri="{FF2B5EF4-FFF2-40B4-BE49-F238E27FC236}">
+                <a16:creationId xmlns:a16="http://schemas.microsoft.com/office/drawing/2014/main" id="{F744E56E-D273-0840-AFB3-836B8AAB44F8}"/>
               </a:ext>
             </a:extLst>
           </p:cNvPr>
@@ -9614,8 +9820,554 @@
         </p:nvSpPr>
         <p:spPr>
           <a:xfrm>
-            <a:off x="325821" y="1048925"/>
-            <a:ext cx="5628411" cy="464871"/>
+            <a:off x="1156498" y="1490142"/>
+            <a:ext cx="7714933" cy="369332"/>
+          </a:xfrm>
+          <a:prstGeom prst="rect">
+            <a:avLst/>
+          </a:prstGeom>
+          <a:noFill/>
+        </p:spPr>
+        <p:txBody>
+          <a:bodyPr wrap="none" rtlCol="0">
+            <a:spAutoFit/>
+          </a:bodyPr>
+          <a:lstStyle/>
+          <a:p>
+            <a:r>
+              <a:rPr kumimoji="1" lang="en-US" altLang="zh-CN" dirty="0"/>
+              <a:t>: </a:t>
+            </a:r>
+            <a:r>
+              <a:rPr kumimoji="1" lang="en-US" altLang="zh-CN" b="1" dirty="0"/>
+              <a:t>non-specific</a:t>
+            </a:r>
+            <a:r>
+              <a:rPr kumimoji="1" lang="en-US" altLang="zh-CN" dirty="0"/>
+              <a:t> </a:t>
+            </a:r>
+            <a:r>
+              <a:rPr kumimoji="1" lang="en-US" altLang="zh-CN" dirty="0">
+                <a:solidFill>
+                  <a:srgbClr val="FF0000"/>
+                </a:solidFill>
+              </a:rPr>
+              <a:t>nuclease domain</a:t>
+            </a:r>
+            <a:r>
+              <a:rPr kumimoji="1" lang="en-US" altLang="zh-CN" dirty="0"/>
+              <a:t> of the </a:t>
+            </a:r>
+            <a:r>
+              <a:rPr kumimoji="1" lang="en-US" altLang="zh-CN" i="1" dirty="0" err="1"/>
+              <a:t>Fok</a:t>
+            </a:r>
+            <a:r>
+              <a:rPr kumimoji="1" lang="en-US" altLang="zh-CN" dirty="0" err="1"/>
+              <a:t>I</a:t>
+            </a:r>
+            <a:r>
+              <a:rPr kumimoji="1" lang="en-US" altLang="zh-CN" dirty="0"/>
+              <a:t> restriction enzyme, function as dimers</a:t>
+            </a:r>
+            <a:endParaRPr kumimoji="1" lang="zh-CN" altLang="en-US" dirty="0"/>
+          </a:p>
+        </p:txBody>
+      </p:sp>
+      <p:sp>
+        <p:nvSpPr>
+          <p:cNvPr id="15" name="Freeform 14">
+            <a:extLst>
+              <a:ext uri="{FF2B5EF4-FFF2-40B4-BE49-F238E27FC236}">
+                <a16:creationId xmlns:a16="http://schemas.microsoft.com/office/drawing/2014/main" id="{9E73CA72-D9B2-3043-A53F-9B0A5A9E8A46}"/>
+              </a:ext>
+            </a:extLst>
+          </p:cNvPr>
+          <p:cNvSpPr/>
+          <p:nvPr/>
+        </p:nvSpPr>
+        <p:spPr>
+          <a:xfrm>
+            <a:off x="586136" y="2429282"/>
+            <a:ext cx="329689" cy="308788"/>
+          </a:xfrm>
+          <a:custGeom>
+            <a:avLst/>
+            <a:gdLst>
+              <a:gd name="connsiteX0" fmla="*/ 20930 w 329689"/>
+              <a:gd name="connsiteY0" fmla="*/ 59407 h 308788"/>
+              <a:gd name="connsiteX1" fmla="*/ 104057 w 329689"/>
+              <a:gd name="connsiteY1" fmla="*/ 11905 h 308788"/>
+              <a:gd name="connsiteX2" fmla="*/ 270312 w 329689"/>
+              <a:gd name="connsiteY2" fmla="*/ 11905 h 308788"/>
+              <a:gd name="connsiteX3" fmla="*/ 305938 w 329689"/>
+              <a:gd name="connsiteY3" fmla="*/ 47531 h 308788"/>
+              <a:gd name="connsiteX4" fmla="*/ 329689 w 329689"/>
+              <a:gd name="connsiteY4" fmla="*/ 118783 h 308788"/>
+              <a:gd name="connsiteX5" fmla="*/ 317813 w 329689"/>
+              <a:gd name="connsiteY5" fmla="*/ 249412 h 308788"/>
+              <a:gd name="connsiteX6" fmla="*/ 282187 w 329689"/>
+              <a:gd name="connsiteY6" fmla="*/ 261287 h 308788"/>
+              <a:gd name="connsiteX7" fmla="*/ 246561 w 329689"/>
+              <a:gd name="connsiteY7" fmla="*/ 285038 h 308788"/>
+              <a:gd name="connsiteX8" fmla="*/ 163434 w 329689"/>
+              <a:gd name="connsiteY8" fmla="*/ 308788 h 308788"/>
+              <a:gd name="connsiteX9" fmla="*/ 68432 w 329689"/>
+              <a:gd name="connsiteY9" fmla="*/ 296913 h 308788"/>
+              <a:gd name="connsiteX10" fmla="*/ 32806 w 329689"/>
+              <a:gd name="connsiteY10" fmla="*/ 261287 h 308788"/>
+              <a:gd name="connsiteX11" fmla="*/ 9055 w 329689"/>
+              <a:gd name="connsiteY11" fmla="*/ 190035 h 308788"/>
+              <a:gd name="connsiteX12" fmla="*/ 20930 w 329689"/>
+              <a:gd name="connsiteY12" fmla="*/ 59407 h 308788"/>
+            </a:gdLst>
+            <a:ahLst/>
+            <a:cxnLst>
+              <a:cxn ang="0">
+                <a:pos x="connsiteX0" y="connsiteY0"/>
+              </a:cxn>
+              <a:cxn ang="0">
+                <a:pos x="connsiteX1" y="connsiteY1"/>
+              </a:cxn>
+              <a:cxn ang="0">
+                <a:pos x="connsiteX2" y="connsiteY2"/>
+              </a:cxn>
+              <a:cxn ang="0">
+                <a:pos x="connsiteX3" y="connsiteY3"/>
+              </a:cxn>
+              <a:cxn ang="0">
+                <a:pos x="connsiteX4" y="connsiteY4"/>
+              </a:cxn>
+              <a:cxn ang="0">
+                <a:pos x="connsiteX5" y="connsiteY5"/>
+              </a:cxn>
+              <a:cxn ang="0">
+                <a:pos x="connsiteX6" y="connsiteY6"/>
+              </a:cxn>
+              <a:cxn ang="0">
+                <a:pos x="connsiteX7" y="connsiteY7"/>
+              </a:cxn>
+              <a:cxn ang="0">
+                <a:pos x="connsiteX8" y="connsiteY8"/>
+              </a:cxn>
+              <a:cxn ang="0">
+                <a:pos x="connsiteX9" y="connsiteY9"/>
+              </a:cxn>
+              <a:cxn ang="0">
+                <a:pos x="connsiteX10" y="connsiteY10"/>
+              </a:cxn>
+              <a:cxn ang="0">
+                <a:pos x="connsiteX11" y="connsiteY11"/>
+              </a:cxn>
+              <a:cxn ang="0">
+                <a:pos x="connsiteX12" y="connsiteY12"/>
+              </a:cxn>
+            </a:cxnLst>
+            <a:rect l="l" t="t" r="r" b="b"/>
+            <a:pathLst>
+              <a:path w="329689" h="308788">
+                <a:moveTo>
+                  <a:pt x="20930" y="59407"/>
+                </a:moveTo>
+                <a:cubicBezTo>
+                  <a:pt x="36764" y="29719"/>
+                  <a:pt x="74598" y="24180"/>
+                  <a:pt x="104057" y="11905"/>
+                </a:cubicBezTo>
+                <a:cubicBezTo>
+                  <a:pt x="159776" y="-11311"/>
+                  <a:pt x="212291" y="5458"/>
+                  <a:pt x="270312" y="11905"/>
+                </a:cubicBezTo>
+                <a:cubicBezTo>
+                  <a:pt x="282187" y="23780"/>
+                  <a:pt x="297782" y="32850"/>
+                  <a:pt x="305938" y="47531"/>
+                </a:cubicBezTo>
+                <a:cubicBezTo>
+                  <a:pt x="318096" y="69416"/>
+                  <a:pt x="329689" y="118783"/>
+                  <a:pt x="329689" y="118783"/>
+                </a:cubicBezTo>
+                <a:cubicBezTo>
+                  <a:pt x="325730" y="162326"/>
+                  <a:pt x="331639" y="207933"/>
+                  <a:pt x="317813" y="249412"/>
+                </a:cubicBezTo>
+                <a:cubicBezTo>
+                  <a:pt x="313855" y="261287"/>
+                  <a:pt x="293383" y="255689"/>
+                  <a:pt x="282187" y="261287"/>
+                </a:cubicBezTo>
+                <a:cubicBezTo>
+                  <a:pt x="269421" y="267670"/>
+                  <a:pt x="259327" y="278655"/>
+                  <a:pt x="246561" y="285038"/>
+                </a:cubicBezTo>
+                <a:cubicBezTo>
+                  <a:pt x="229526" y="293556"/>
+                  <a:pt x="178652" y="304984"/>
+                  <a:pt x="163434" y="308788"/>
+                </a:cubicBezTo>
+                <a:cubicBezTo>
+                  <a:pt x="131767" y="304830"/>
+                  <a:pt x="98424" y="307819"/>
+                  <a:pt x="68432" y="296913"/>
+                </a:cubicBezTo>
+                <a:cubicBezTo>
+                  <a:pt x="52649" y="291174"/>
+                  <a:pt x="40962" y="275968"/>
+                  <a:pt x="32806" y="261287"/>
+                </a:cubicBezTo>
+                <a:cubicBezTo>
+                  <a:pt x="20648" y="239402"/>
+                  <a:pt x="16972" y="213786"/>
+                  <a:pt x="9055" y="190035"/>
+                </a:cubicBezTo>
+                <a:cubicBezTo>
+                  <a:pt x="-10330" y="131879"/>
+                  <a:pt x="5096" y="89095"/>
+                  <a:pt x="20930" y="59407"/>
+                </a:cubicBezTo>
+                <a:close/>
+              </a:path>
+            </a:pathLst>
+          </a:custGeom>
+          <a:solidFill>
+            <a:schemeClr val="accent5"/>
+          </a:solidFill>
+          <a:ln w="19050">
+            <a:solidFill>
+              <a:schemeClr val="tx1"/>
+            </a:solidFill>
+          </a:ln>
+        </p:spPr>
+        <p:style>
+          <a:lnRef idx="2">
+            <a:schemeClr val="accent1">
+              <a:shade val="50000"/>
+            </a:schemeClr>
+          </a:lnRef>
+          <a:fillRef idx="1">
+            <a:schemeClr val="accent1"/>
+          </a:fillRef>
+          <a:effectRef idx="0">
+            <a:schemeClr val="accent1"/>
+          </a:effectRef>
+          <a:fontRef idx="minor">
+            <a:schemeClr val="lt1"/>
+          </a:fontRef>
+        </p:style>
+        <p:txBody>
+          <a:bodyPr rtlCol="0" anchor="ctr"/>
+          <a:lstStyle/>
+          <a:p>
+            <a:pPr algn="ctr"/>
+            <a:r>
+              <a:rPr kumimoji="1" lang="en-US" altLang="zh-CN" dirty="0"/>
+              <a:t>F</a:t>
+            </a:r>
+            <a:endParaRPr kumimoji="1" lang="zh-CN" altLang="en-US" sz="2000" dirty="0"/>
+          </a:p>
+        </p:txBody>
+      </p:sp>
+      <p:sp>
+        <p:nvSpPr>
+          <p:cNvPr id="16" name="TextBox 15">
+            <a:extLst>
+              <a:ext uri="{FF2B5EF4-FFF2-40B4-BE49-F238E27FC236}">
+                <a16:creationId xmlns:a16="http://schemas.microsoft.com/office/drawing/2014/main" id="{C7D0BC63-10A7-864E-B589-1131B716F4EC}"/>
+              </a:ext>
+            </a:extLst>
+          </p:cNvPr>
+          <p:cNvSpPr txBox="1"/>
+          <p:nvPr/>
+        </p:nvSpPr>
+        <p:spPr>
+          <a:xfrm>
+            <a:off x="915825" y="2368738"/>
+            <a:ext cx="9213163" cy="369332"/>
+          </a:xfrm>
+          <a:prstGeom prst="rect">
+            <a:avLst/>
+          </a:prstGeom>
+          <a:noFill/>
+        </p:spPr>
+        <p:txBody>
+          <a:bodyPr wrap="none" rtlCol="0">
+            <a:spAutoFit/>
+          </a:bodyPr>
+          <a:lstStyle/>
+          <a:p>
+            <a:r>
+              <a:rPr kumimoji="1" lang="en-US" altLang="zh-CN" dirty="0"/>
+              <a:t>: </a:t>
+            </a:r>
+            <a:r>
+              <a:rPr kumimoji="1" lang="en-US" altLang="zh-CN" b="1" dirty="0"/>
+              <a:t>specific</a:t>
+            </a:r>
+            <a:r>
+              <a:rPr kumimoji="1" lang="en-US" altLang="zh-CN" dirty="0"/>
+              <a:t> </a:t>
+            </a:r>
+            <a:r>
+              <a:rPr kumimoji="1" lang="en-US" altLang="zh-CN" dirty="0">
+                <a:solidFill>
+                  <a:srgbClr val="FF0000"/>
+                </a:solidFill>
+              </a:rPr>
+              <a:t>DNA-binding domain</a:t>
+            </a:r>
+            <a:r>
+              <a:rPr kumimoji="1" lang="en-US" altLang="zh-CN" dirty="0"/>
+              <a:t>, one (of three) zinc finger domains from zinc finger proteins (ZFPs)</a:t>
+            </a:r>
+            <a:endParaRPr kumimoji="1" lang="zh-CN" altLang="en-US" dirty="0"/>
+          </a:p>
+        </p:txBody>
+      </p:sp>
+      <p:cxnSp>
+        <p:nvCxnSpPr>
+          <p:cNvPr id="18" name="Straight Connector 17">
+            <a:extLst>
+              <a:ext uri="{FF2B5EF4-FFF2-40B4-BE49-F238E27FC236}">
+                <a16:creationId xmlns:a16="http://schemas.microsoft.com/office/drawing/2014/main" id="{4244F431-8431-BC42-B7E3-03CE1CA1BB86}"/>
+              </a:ext>
+            </a:extLst>
+          </p:cNvPr>
+          <p:cNvCxnSpPr>
+            <a:cxnSpLocks/>
+          </p:cNvCxnSpPr>
+          <p:nvPr/>
+        </p:nvCxnSpPr>
+        <p:spPr>
+          <a:xfrm flipH="1">
+            <a:off x="416717" y="2714320"/>
+            <a:ext cx="226405" cy="562339"/>
+          </a:xfrm>
+          <a:prstGeom prst="line">
+            <a:avLst/>
+          </a:prstGeom>
+        </p:spPr>
+        <p:style>
+          <a:lnRef idx="3">
+            <a:schemeClr val="dk1"/>
+          </a:lnRef>
+          <a:fillRef idx="0">
+            <a:schemeClr val="dk1"/>
+          </a:fillRef>
+          <a:effectRef idx="2">
+            <a:schemeClr val="dk1"/>
+          </a:effectRef>
+          <a:fontRef idx="minor">
+            <a:schemeClr val="tx1"/>
+          </a:fontRef>
+        </p:style>
+      </p:cxnSp>
+      <p:grpSp>
+        <p:nvGrpSpPr>
+          <p:cNvPr id="37" name="Group 36">
+            <a:extLst>
+              <a:ext uri="{FF2B5EF4-FFF2-40B4-BE49-F238E27FC236}">
+                <a16:creationId xmlns:a16="http://schemas.microsoft.com/office/drawing/2014/main" id="{3A70144C-85B4-094E-8AAA-1EE6BD8DDA58}"/>
+              </a:ext>
+            </a:extLst>
+          </p:cNvPr>
+          <p:cNvGrpSpPr/>
+          <p:nvPr/>
+        </p:nvGrpSpPr>
+        <p:grpSpPr>
+          <a:xfrm>
+            <a:off x="516731" y="2950091"/>
+            <a:ext cx="1503009" cy="1412125"/>
+            <a:chOff x="525816" y="3281058"/>
+            <a:chExt cx="986512" cy="1070910"/>
+          </a:xfrm>
+        </p:grpSpPr>
+        <p:pic>
+          <p:nvPicPr>
+            <p:cNvPr id="25" name="Picture 24">
+              <a:extLst>
+                <a:ext uri="{FF2B5EF4-FFF2-40B4-BE49-F238E27FC236}">
+                  <a16:creationId xmlns:a16="http://schemas.microsoft.com/office/drawing/2014/main" id="{4DC8CBB2-8CAC-4A4A-B0C5-3DE913202505}"/>
+                </a:ext>
+              </a:extLst>
+            </p:cNvPr>
+            <p:cNvPicPr>
+              <a:picLocks noChangeAspect="1"/>
+            </p:cNvPicPr>
+            <p:nvPr/>
+          </p:nvPicPr>
+          <p:blipFill>
+            <a:blip r:embed="rId2"/>
+            <a:stretch>
+              <a:fillRect/>
+            </a:stretch>
+          </p:blipFill>
+          <p:spPr>
+            <a:xfrm>
+              <a:off x="586136" y="3281058"/>
+              <a:ext cx="926192" cy="1070910"/>
+            </a:xfrm>
+            <a:prstGeom prst="rect">
+              <a:avLst/>
+            </a:prstGeom>
+          </p:spPr>
+        </p:pic>
+        <p:sp>
+          <p:nvSpPr>
+            <p:cNvPr id="32" name="Rectangle 31">
+              <a:extLst>
+                <a:ext uri="{FF2B5EF4-FFF2-40B4-BE49-F238E27FC236}">
+                  <a16:creationId xmlns:a16="http://schemas.microsoft.com/office/drawing/2014/main" id="{999CD4E0-E94D-8843-8058-FA3140F425DC}"/>
+                </a:ext>
+              </a:extLst>
+            </p:cNvPr>
+            <p:cNvSpPr/>
+            <p:nvPr/>
+          </p:nvSpPr>
+          <p:spPr>
+            <a:xfrm rot="2350952">
+              <a:off x="525816" y="3906252"/>
+              <a:ext cx="849002" cy="285750"/>
+            </a:xfrm>
+            <a:prstGeom prst="rect">
+              <a:avLst/>
+            </a:prstGeom>
+            <a:solidFill>
+              <a:schemeClr val="accent1">
+                <a:alpha val="40163"/>
+              </a:schemeClr>
+            </a:solidFill>
+            <a:ln>
+              <a:noFill/>
+            </a:ln>
+          </p:spPr>
+          <p:style>
+            <a:lnRef idx="2">
+              <a:schemeClr val="accent1">
+                <a:shade val="50000"/>
+              </a:schemeClr>
+            </a:lnRef>
+            <a:fillRef idx="1">
+              <a:schemeClr val="accent1"/>
+            </a:fillRef>
+            <a:effectRef idx="0">
+              <a:schemeClr val="accent1"/>
+            </a:effectRef>
+            <a:fontRef idx="minor">
+              <a:schemeClr val="lt1"/>
+            </a:fontRef>
+          </p:style>
+          <p:txBody>
+            <a:bodyPr rtlCol="0" anchor="ctr"/>
+            <a:lstStyle/>
+            <a:p>
+              <a:pPr algn="ctr"/>
+              <a:endParaRPr kumimoji="1" lang="zh-CN" altLang="en-US"/>
+            </a:p>
+          </p:txBody>
+        </p:sp>
+      </p:grpSp>
+      <p:cxnSp>
+        <p:nvCxnSpPr>
+          <p:cNvPr id="20" name="Straight Connector 19">
+            <a:extLst>
+              <a:ext uri="{FF2B5EF4-FFF2-40B4-BE49-F238E27FC236}">
+                <a16:creationId xmlns:a16="http://schemas.microsoft.com/office/drawing/2014/main" id="{8077C112-5A3E-B641-BF9C-8E985EA41C4E}"/>
+              </a:ext>
+            </a:extLst>
+          </p:cNvPr>
+          <p:cNvCxnSpPr>
+            <a:cxnSpLocks/>
+          </p:cNvCxnSpPr>
+          <p:nvPr/>
+        </p:nvCxnSpPr>
+        <p:spPr>
+          <a:xfrm>
+            <a:off x="902554" y="2667059"/>
+            <a:ext cx="740509" cy="318598"/>
+          </a:xfrm>
+          <a:prstGeom prst="line">
+            <a:avLst/>
+          </a:prstGeom>
+        </p:spPr>
+        <p:style>
+          <a:lnRef idx="3">
+            <a:schemeClr val="dk1"/>
+          </a:lnRef>
+          <a:fillRef idx="0">
+            <a:schemeClr val="dk1"/>
+          </a:fillRef>
+          <a:effectRef idx="2">
+            <a:schemeClr val="dk1"/>
+          </a:effectRef>
+          <a:fontRef idx="minor">
+            <a:schemeClr val="tx1"/>
+          </a:fontRef>
+        </p:style>
+      </p:cxnSp>
+      <p:sp>
+        <p:nvSpPr>
+          <p:cNvPr id="27" name="TextBox 26">
+            <a:extLst>
+              <a:ext uri="{FF2B5EF4-FFF2-40B4-BE49-F238E27FC236}">
+                <a16:creationId xmlns:a16="http://schemas.microsoft.com/office/drawing/2014/main" id="{90B7170F-56CE-0B4A-9B97-BBF955E768A6}"/>
+              </a:ext>
+            </a:extLst>
+          </p:cNvPr>
+          <p:cNvSpPr txBox="1"/>
+          <p:nvPr/>
+        </p:nvSpPr>
+        <p:spPr>
+          <a:xfrm>
+            <a:off x="325821" y="4449806"/>
+            <a:ext cx="3539943" cy="369332"/>
+          </a:xfrm>
+          <a:prstGeom prst="rect">
+            <a:avLst/>
+          </a:prstGeom>
+          <a:noFill/>
+        </p:spPr>
+        <p:txBody>
+          <a:bodyPr wrap="none" rtlCol="0">
+            <a:spAutoFit/>
+          </a:bodyPr>
+          <a:lstStyle/>
+          <a:p>
+            <a:r>
+              <a:rPr kumimoji="1" lang="en-US" altLang="zh-CN" dirty="0"/>
+              <a:t>about 30 aa, organized in </a:t>
+            </a:r>
+            <a:r>
+              <a:rPr kumimoji="1" lang="el-GR" altLang="zh-CN" dirty="0" err="1"/>
+              <a:t>ββα</a:t>
+            </a:r>
+            <a:r>
+              <a:rPr kumimoji="1" lang="en-US" altLang="zh-CN" dirty="0"/>
+              <a:t> motif</a:t>
+            </a:r>
+            <a:endParaRPr kumimoji="1" lang="zh-CN" altLang="en-US" dirty="0"/>
+          </a:p>
+        </p:txBody>
+      </p:sp>
+      <p:sp>
+        <p:nvSpPr>
+          <p:cNvPr id="33" name="TextBox 32">
+            <a:extLst>
+              <a:ext uri="{FF2B5EF4-FFF2-40B4-BE49-F238E27FC236}">
+                <a16:creationId xmlns:a16="http://schemas.microsoft.com/office/drawing/2014/main" id="{C3DC7F18-D86E-1E47-9FAD-927763BCFD4A}"/>
+              </a:ext>
+            </a:extLst>
+          </p:cNvPr>
+          <p:cNvSpPr txBox="1"/>
+          <p:nvPr/>
+        </p:nvSpPr>
+        <p:spPr>
+          <a:xfrm>
+            <a:off x="325820" y="4767827"/>
+            <a:ext cx="5617780" cy="1200329"/>
           </a:xfrm>
           <a:prstGeom prst="rect">
             <a:avLst/>
@@ -9628,18 +10380,5195 @@
           </a:bodyPr>
           <a:lstStyle/>
           <a:p>
-            <a:pPr marL="285750" indent="-285750">
-              <a:lnSpc>
-                <a:spcPct val="150000"/>
-              </a:lnSpc>
-              <a:buFont typeface="Arial" panose="020B0604020202020204" pitchFamily="34" charset="0"/>
-              <a:buChar char="•"/>
-            </a:pPr>
-            <a:r>
-              <a:rPr kumimoji="1" lang="en-CN" altLang="zh-CN" i="1" dirty="0"/>
-              <a:t>TODO</a:t>
-            </a:r>
-            <a:endParaRPr kumimoji="1" lang="en-US" altLang="zh-CN" i="1" dirty="0"/>
+            <a:r>
+              <a:rPr kumimoji="1" lang="en-US" altLang="zh-CN" dirty="0"/>
+              <a:t>TGEKPYK</a:t>
+            </a:r>
+            <a:r>
+              <a:rPr kumimoji="1" lang="en-US" altLang="zh-CN" dirty="0">
+                <a:solidFill>
+                  <a:schemeClr val="accent6"/>
+                </a:solidFill>
+              </a:rPr>
+              <a:t>C</a:t>
+            </a:r>
+            <a:r>
+              <a:rPr kumimoji="1" lang="en-US" altLang="zh-CN" dirty="0"/>
+              <a:t>PE</a:t>
+            </a:r>
+            <a:r>
+              <a:rPr kumimoji="1" lang="en-US" altLang="zh-CN" dirty="0">
+                <a:solidFill>
+                  <a:schemeClr val="accent6"/>
+                </a:solidFill>
+              </a:rPr>
+              <a:t>C</a:t>
+            </a:r>
+            <a:r>
+              <a:rPr kumimoji="1" lang="en-US" altLang="zh-CN" dirty="0"/>
+              <a:t>GKSFS</a:t>
+            </a:r>
+            <a:r>
+              <a:rPr kumimoji="1" lang="en-US" altLang="zh-CN" dirty="0">
+                <a:solidFill>
+                  <a:schemeClr val="accent1"/>
+                </a:solidFill>
+              </a:rPr>
+              <a:t>XXXXXXX</a:t>
+            </a:r>
+            <a:r>
+              <a:rPr kumimoji="1" lang="en-US" altLang="zh-CN" dirty="0">
+                <a:solidFill>
+                  <a:schemeClr val="accent6"/>
+                </a:solidFill>
+              </a:rPr>
+              <a:t>H</a:t>
+            </a:r>
+            <a:r>
+              <a:rPr kumimoji="1" lang="en-US" altLang="zh-CN" dirty="0"/>
+              <a:t>QRT</a:t>
+            </a:r>
+            <a:r>
+              <a:rPr kumimoji="1" lang="en-US" altLang="zh-CN" dirty="0">
+                <a:solidFill>
+                  <a:schemeClr val="accent6"/>
+                </a:solidFill>
+              </a:rPr>
+              <a:t>H</a:t>
+            </a:r>
+          </a:p>
+          <a:p>
+            <a:r>
+              <a:rPr kumimoji="1" lang="en-US" altLang="zh-CN" dirty="0">
+                <a:solidFill>
+                  <a:schemeClr val="accent6"/>
+                </a:solidFill>
+              </a:rPr>
+              <a:t>Cys2-His2 zinc finger</a:t>
+            </a:r>
+          </a:p>
+          <a:p>
+            <a:r>
+              <a:rPr kumimoji="1" lang="en-US" altLang="zh-CN" dirty="0">
+                <a:solidFill>
+                  <a:schemeClr val="accent1"/>
+                </a:solidFill>
+              </a:rPr>
+              <a:t>X can be any amino acid.</a:t>
+            </a:r>
+          </a:p>
+          <a:p>
+            <a:r>
+              <a:rPr kumimoji="1" lang="en-US" altLang="zh-CN" dirty="0">
+                <a:solidFill>
+                  <a:schemeClr val="accent1"/>
+                </a:solidFill>
+              </a:rPr>
+              <a:t>XXXXXXX recognizes and binds to 3 bp of DNA, </a:t>
+            </a:r>
+            <a:r>
+              <a:rPr kumimoji="1" lang="en-US" altLang="zh-CN" b="1" dirty="0">
+                <a:solidFill>
+                  <a:schemeClr val="accent1"/>
+                </a:solidFill>
+              </a:rPr>
+              <a:t>specifically</a:t>
+            </a:r>
+            <a:r>
+              <a:rPr kumimoji="1" lang="en-US" altLang="zh-CN" dirty="0">
+                <a:solidFill>
+                  <a:schemeClr val="accent1"/>
+                </a:solidFill>
+              </a:rPr>
+              <a:t>.</a:t>
+            </a:r>
+          </a:p>
+        </p:txBody>
+      </p:sp>
+      <p:cxnSp>
+        <p:nvCxnSpPr>
+          <p:cNvPr id="50" name="Straight Connector 49">
+            <a:extLst>
+              <a:ext uri="{FF2B5EF4-FFF2-40B4-BE49-F238E27FC236}">
+                <a16:creationId xmlns:a16="http://schemas.microsoft.com/office/drawing/2014/main" id="{25EFA0B1-7E3B-454F-B841-CDCC286E576D}"/>
+              </a:ext>
+            </a:extLst>
+          </p:cNvPr>
+          <p:cNvCxnSpPr/>
+          <p:nvPr/>
+        </p:nvCxnSpPr>
+        <p:spPr>
+          <a:xfrm>
+            <a:off x="5751752" y="3923103"/>
+            <a:ext cx="5457825" cy="0"/>
+          </a:xfrm>
+          <a:prstGeom prst="line">
+            <a:avLst/>
+          </a:prstGeom>
+          <a:ln w="31750">
+            <a:solidFill>
+              <a:schemeClr val="accent3"/>
+            </a:solidFill>
+          </a:ln>
+        </p:spPr>
+        <p:style>
+          <a:lnRef idx="3">
+            <a:schemeClr val="dk1"/>
+          </a:lnRef>
+          <a:fillRef idx="0">
+            <a:schemeClr val="dk1"/>
+          </a:fillRef>
+          <a:effectRef idx="2">
+            <a:schemeClr val="dk1"/>
+          </a:effectRef>
+          <a:fontRef idx="minor">
+            <a:schemeClr val="tx1"/>
+          </a:fontRef>
+        </p:style>
+      </p:cxnSp>
+      <p:cxnSp>
+        <p:nvCxnSpPr>
+          <p:cNvPr id="53" name="Straight Connector 52">
+            <a:extLst>
+              <a:ext uri="{FF2B5EF4-FFF2-40B4-BE49-F238E27FC236}">
+                <a16:creationId xmlns:a16="http://schemas.microsoft.com/office/drawing/2014/main" id="{5F2D7F31-2E50-1144-B946-DB82C412AD14}"/>
+              </a:ext>
+            </a:extLst>
+          </p:cNvPr>
+          <p:cNvCxnSpPr/>
+          <p:nvPr/>
+        </p:nvCxnSpPr>
+        <p:spPr>
+          <a:xfrm>
+            <a:off x="5751752" y="4239059"/>
+            <a:ext cx="5457825" cy="0"/>
+          </a:xfrm>
+          <a:prstGeom prst="line">
+            <a:avLst/>
+          </a:prstGeom>
+          <a:ln w="31750">
+            <a:solidFill>
+              <a:schemeClr val="accent3"/>
+            </a:solidFill>
+          </a:ln>
+        </p:spPr>
+        <p:style>
+          <a:lnRef idx="3">
+            <a:schemeClr val="dk1"/>
+          </a:lnRef>
+          <a:fillRef idx="0">
+            <a:schemeClr val="dk1"/>
+          </a:fillRef>
+          <a:effectRef idx="2">
+            <a:schemeClr val="dk1"/>
+          </a:effectRef>
+          <a:fontRef idx="minor">
+            <a:schemeClr val="tx1"/>
+          </a:fontRef>
+        </p:style>
+      </p:cxnSp>
+      <p:cxnSp>
+        <p:nvCxnSpPr>
+          <p:cNvPr id="54" name="Straight Connector 53">
+            <a:extLst>
+              <a:ext uri="{FF2B5EF4-FFF2-40B4-BE49-F238E27FC236}">
+                <a16:creationId xmlns:a16="http://schemas.microsoft.com/office/drawing/2014/main" id="{4A280CCC-9842-4B4C-AC0B-5C1AD2CB9C68}"/>
+              </a:ext>
+            </a:extLst>
+          </p:cNvPr>
+          <p:cNvCxnSpPr>
+            <a:cxnSpLocks/>
+          </p:cNvCxnSpPr>
+          <p:nvPr/>
+        </p:nvCxnSpPr>
+        <p:spPr>
+          <a:xfrm>
+            <a:off x="5938339" y="3923103"/>
+            <a:ext cx="0" cy="330477"/>
+          </a:xfrm>
+          <a:prstGeom prst="line">
+            <a:avLst/>
+          </a:prstGeom>
+          <a:ln w="31750">
+            <a:solidFill>
+              <a:schemeClr val="accent3"/>
+            </a:solidFill>
+          </a:ln>
+        </p:spPr>
+        <p:style>
+          <a:lnRef idx="3">
+            <a:schemeClr val="dk1"/>
+          </a:lnRef>
+          <a:fillRef idx="0">
+            <a:schemeClr val="dk1"/>
+          </a:fillRef>
+          <a:effectRef idx="2">
+            <a:schemeClr val="dk1"/>
+          </a:effectRef>
+          <a:fontRef idx="minor">
+            <a:schemeClr val="tx1"/>
+          </a:fontRef>
+        </p:style>
+      </p:cxnSp>
+      <p:cxnSp>
+        <p:nvCxnSpPr>
+          <p:cNvPr id="59" name="Straight Connector 58">
+            <a:extLst>
+              <a:ext uri="{FF2B5EF4-FFF2-40B4-BE49-F238E27FC236}">
+                <a16:creationId xmlns:a16="http://schemas.microsoft.com/office/drawing/2014/main" id="{8CB37102-FE96-A944-BB95-A91B74A2A52C}"/>
+              </a:ext>
+            </a:extLst>
+          </p:cNvPr>
+          <p:cNvCxnSpPr>
+            <a:cxnSpLocks/>
+          </p:cNvCxnSpPr>
+          <p:nvPr/>
+        </p:nvCxnSpPr>
+        <p:spPr>
+          <a:xfrm>
+            <a:off x="6083119" y="3908582"/>
+            <a:ext cx="0" cy="330477"/>
+          </a:xfrm>
+          <a:prstGeom prst="line">
+            <a:avLst/>
+          </a:prstGeom>
+          <a:ln w="31750">
+            <a:solidFill>
+              <a:schemeClr val="accent3"/>
+            </a:solidFill>
+          </a:ln>
+        </p:spPr>
+        <p:style>
+          <a:lnRef idx="3">
+            <a:schemeClr val="dk1"/>
+          </a:lnRef>
+          <a:fillRef idx="0">
+            <a:schemeClr val="dk1"/>
+          </a:fillRef>
+          <a:effectRef idx="2">
+            <a:schemeClr val="dk1"/>
+          </a:effectRef>
+          <a:fontRef idx="minor">
+            <a:schemeClr val="tx1"/>
+          </a:fontRef>
+        </p:style>
+      </p:cxnSp>
+      <p:cxnSp>
+        <p:nvCxnSpPr>
+          <p:cNvPr id="60" name="Straight Connector 59">
+            <a:extLst>
+              <a:ext uri="{FF2B5EF4-FFF2-40B4-BE49-F238E27FC236}">
+                <a16:creationId xmlns:a16="http://schemas.microsoft.com/office/drawing/2014/main" id="{3A822E18-2AEA-A347-B860-8699FBFA9F76}"/>
+              </a:ext>
+            </a:extLst>
+          </p:cNvPr>
+          <p:cNvCxnSpPr>
+            <a:cxnSpLocks/>
+          </p:cNvCxnSpPr>
+          <p:nvPr/>
+        </p:nvCxnSpPr>
+        <p:spPr>
+          <a:xfrm>
+            <a:off x="6220279" y="3908582"/>
+            <a:ext cx="0" cy="330477"/>
+          </a:xfrm>
+          <a:prstGeom prst="line">
+            <a:avLst/>
+          </a:prstGeom>
+          <a:ln w="31750">
+            <a:solidFill>
+              <a:schemeClr val="accent3"/>
+            </a:solidFill>
+          </a:ln>
+        </p:spPr>
+        <p:style>
+          <a:lnRef idx="3">
+            <a:schemeClr val="dk1"/>
+          </a:lnRef>
+          <a:fillRef idx="0">
+            <a:schemeClr val="dk1"/>
+          </a:fillRef>
+          <a:effectRef idx="2">
+            <a:schemeClr val="dk1"/>
+          </a:effectRef>
+          <a:fontRef idx="minor">
+            <a:schemeClr val="tx1"/>
+          </a:fontRef>
+        </p:style>
+      </p:cxnSp>
+      <p:cxnSp>
+        <p:nvCxnSpPr>
+          <p:cNvPr id="61" name="Straight Connector 60">
+            <a:extLst>
+              <a:ext uri="{FF2B5EF4-FFF2-40B4-BE49-F238E27FC236}">
+                <a16:creationId xmlns:a16="http://schemas.microsoft.com/office/drawing/2014/main" id="{E0098547-247A-AA41-9976-CDBF40F9A835}"/>
+              </a:ext>
+            </a:extLst>
+          </p:cNvPr>
+          <p:cNvCxnSpPr>
+            <a:cxnSpLocks/>
+          </p:cNvCxnSpPr>
+          <p:nvPr/>
+        </p:nvCxnSpPr>
+        <p:spPr>
+          <a:xfrm>
+            <a:off x="6349819" y="3908582"/>
+            <a:ext cx="0" cy="330477"/>
+          </a:xfrm>
+          <a:prstGeom prst="line">
+            <a:avLst/>
+          </a:prstGeom>
+          <a:ln w="31750">
+            <a:solidFill>
+              <a:schemeClr val="accent3"/>
+            </a:solidFill>
+          </a:ln>
+        </p:spPr>
+        <p:style>
+          <a:lnRef idx="3">
+            <a:schemeClr val="dk1"/>
+          </a:lnRef>
+          <a:fillRef idx="0">
+            <a:schemeClr val="dk1"/>
+          </a:fillRef>
+          <a:effectRef idx="2">
+            <a:schemeClr val="dk1"/>
+          </a:effectRef>
+          <a:fontRef idx="minor">
+            <a:schemeClr val="tx1"/>
+          </a:fontRef>
+        </p:style>
+      </p:cxnSp>
+      <p:cxnSp>
+        <p:nvCxnSpPr>
+          <p:cNvPr id="62" name="Straight Connector 61">
+            <a:extLst>
+              <a:ext uri="{FF2B5EF4-FFF2-40B4-BE49-F238E27FC236}">
+                <a16:creationId xmlns:a16="http://schemas.microsoft.com/office/drawing/2014/main" id="{D18EFA67-7F0E-2B48-BA10-B55B9EA19066}"/>
+              </a:ext>
+            </a:extLst>
+          </p:cNvPr>
+          <p:cNvCxnSpPr>
+            <a:cxnSpLocks/>
+          </p:cNvCxnSpPr>
+          <p:nvPr/>
+        </p:nvCxnSpPr>
+        <p:spPr>
+          <a:xfrm>
+            <a:off x="6479359" y="3923103"/>
+            <a:ext cx="0" cy="330477"/>
+          </a:xfrm>
+          <a:prstGeom prst="line">
+            <a:avLst/>
+          </a:prstGeom>
+          <a:ln w="31750">
+            <a:solidFill>
+              <a:schemeClr val="accent3"/>
+            </a:solidFill>
+          </a:ln>
+        </p:spPr>
+        <p:style>
+          <a:lnRef idx="3">
+            <a:schemeClr val="dk1"/>
+          </a:lnRef>
+          <a:fillRef idx="0">
+            <a:schemeClr val="dk1"/>
+          </a:fillRef>
+          <a:effectRef idx="2">
+            <a:schemeClr val="dk1"/>
+          </a:effectRef>
+          <a:fontRef idx="minor">
+            <a:schemeClr val="tx1"/>
+          </a:fontRef>
+        </p:style>
+      </p:cxnSp>
+      <p:cxnSp>
+        <p:nvCxnSpPr>
+          <p:cNvPr id="63" name="Straight Connector 62">
+            <a:extLst>
+              <a:ext uri="{FF2B5EF4-FFF2-40B4-BE49-F238E27FC236}">
+                <a16:creationId xmlns:a16="http://schemas.microsoft.com/office/drawing/2014/main" id="{22D7C89D-889B-3F43-9141-D8258E80E620}"/>
+              </a:ext>
+            </a:extLst>
+          </p:cNvPr>
+          <p:cNvCxnSpPr>
+            <a:cxnSpLocks/>
+          </p:cNvCxnSpPr>
+          <p:nvPr/>
+        </p:nvCxnSpPr>
+        <p:spPr>
+          <a:xfrm>
+            <a:off x="6617212" y="3923103"/>
+            <a:ext cx="0" cy="330477"/>
+          </a:xfrm>
+          <a:prstGeom prst="line">
+            <a:avLst/>
+          </a:prstGeom>
+          <a:ln w="31750">
+            <a:solidFill>
+              <a:schemeClr val="accent3"/>
+            </a:solidFill>
+          </a:ln>
+        </p:spPr>
+        <p:style>
+          <a:lnRef idx="3">
+            <a:schemeClr val="dk1"/>
+          </a:lnRef>
+          <a:fillRef idx="0">
+            <a:schemeClr val="dk1"/>
+          </a:fillRef>
+          <a:effectRef idx="2">
+            <a:schemeClr val="dk1"/>
+          </a:effectRef>
+          <a:fontRef idx="minor">
+            <a:schemeClr val="tx1"/>
+          </a:fontRef>
+        </p:style>
+      </p:cxnSp>
+      <p:cxnSp>
+        <p:nvCxnSpPr>
+          <p:cNvPr id="64" name="Straight Connector 63">
+            <a:extLst>
+              <a:ext uri="{FF2B5EF4-FFF2-40B4-BE49-F238E27FC236}">
+                <a16:creationId xmlns:a16="http://schemas.microsoft.com/office/drawing/2014/main" id="{5A706F8C-6D3F-1E40-B699-910C22F557A1}"/>
+              </a:ext>
+            </a:extLst>
+          </p:cNvPr>
+          <p:cNvCxnSpPr>
+            <a:cxnSpLocks/>
+          </p:cNvCxnSpPr>
+          <p:nvPr/>
+        </p:nvCxnSpPr>
+        <p:spPr>
+          <a:xfrm>
+            <a:off x="6761992" y="3908582"/>
+            <a:ext cx="0" cy="330477"/>
+          </a:xfrm>
+          <a:prstGeom prst="line">
+            <a:avLst/>
+          </a:prstGeom>
+          <a:ln w="31750">
+            <a:solidFill>
+              <a:schemeClr val="accent3"/>
+            </a:solidFill>
+          </a:ln>
+        </p:spPr>
+        <p:style>
+          <a:lnRef idx="3">
+            <a:schemeClr val="dk1"/>
+          </a:lnRef>
+          <a:fillRef idx="0">
+            <a:schemeClr val="dk1"/>
+          </a:fillRef>
+          <a:effectRef idx="2">
+            <a:schemeClr val="dk1"/>
+          </a:effectRef>
+          <a:fontRef idx="minor">
+            <a:schemeClr val="tx1"/>
+          </a:fontRef>
+        </p:style>
+      </p:cxnSp>
+      <p:cxnSp>
+        <p:nvCxnSpPr>
+          <p:cNvPr id="65" name="Straight Connector 64">
+            <a:extLst>
+              <a:ext uri="{FF2B5EF4-FFF2-40B4-BE49-F238E27FC236}">
+                <a16:creationId xmlns:a16="http://schemas.microsoft.com/office/drawing/2014/main" id="{79F8401F-B370-D442-BB1E-1CC3EE6EE25B}"/>
+              </a:ext>
+            </a:extLst>
+          </p:cNvPr>
+          <p:cNvCxnSpPr>
+            <a:cxnSpLocks/>
+          </p:cNvCxnSpPr>
+          <p:nvPr/>
+        </p:nvCxnSpPr>
+        <p:spPr>
+          <a:xfrm>
+            <a:off x="6899152" y="3908582"/>
+            <a:ext cx="0" cy="330477"/>
+          </a:xfrm>
+          <a:prstGeom prst="line">
+            <a:avLst/>
+          </a:prstGeom>
+          <a:ln w="31750">
+            <a:solidFill>
+              <a:schemeClr val="accent3"/>
+            </a:solidFill>
+          </a:ln>
+        </p:spPr>
+        <p:style>
+          <a:lnRef idx="3">
+            <a:schemeClr val="dk1"/>
+          </a:lnRef>
+          <a:fillRef idx="0">
+            <a:schemeClr val="dk1"/>
+          </a:fillRef>
+          <a:effectRef idx="2">
+            <a:schemeClr val="dk1"/>
+          </a:effectRef>
+          <a:fontRef idx="minor">
+            <a:schemeClr val="tx1"/>
+          </a:fontRef>
+        </p:style>
+      </p:cxnSp>
+      <p:cxnSp>
+        <p:nvCxnSpPr>
+          <p:cNvPr id="66" name="Straight Connector 65">
+            <a:extLst>
+              <a:ext uri="{FF2B5EF4-FFF2-40B4-BE49-F238E27FC236}">
+                <a16:creationId xmlns:a16="http://schemas.microsoft.com/office/drawing/2014/main" id="{57107B9B-9A95-3E44-B6F1-A0307D6452DA}"/>
+              </a:ext>
+            </a:extLst>
+          </p:cNvPr>
+          <p:cNvCxnSpPr>
+            <a:cxnSpLocks/>
+          </p:cNvCxnSpPr>
+          <p:nvPr/>
+        </p:nvCxnSpPr>
+        <p:spPr>
+          <a:xfrm>
+            <a:off x="7028692" y="3908582"/>
+            <a:ext cx="0" cy="330477"/>
+          </a:xfrm>
+          <a:prstGeom prst="line">
+            <a:avLst/>
+          </a:prstGeom>
+          <a:ln w="31750">
+            <a:solidFill>
+              <a:schemeClr val="accent3"/>
+            </a:solidFill>
+          </a:ln>
+        </p:spPr>
+        <p:style>
+          <a:lnRef idx="3">
+            <a:schemeClr val="dk1"/>
+          </a:lnRef>
+          <a:fillRef idx="0">
+            <a:schemeClr val="dk1"/>
+          </a:fillRef>
+          <a:effectRef idx="2">
+            <a:schemeClr val="dk1"/>
+          </a:effectRef>
+          <a:fontRef idx="minor">
+            <a:schemeClr val="tx1"/>
+          </a:fontRef>
+        </p:style>
+      </p:cxnSp>
+      <p:cxnSp>
+        <p:nvCxnSpPr>
+          <p:cNvPr id="67" name="Straight Connector 66">
+            <a:extLst>
+              <a:ext uri="{FF2B5EF4-FFF2-40B4-BE49-F238E27FC236}">
+                <a16:creationId xmlns:a16="http://schemas.microsoft.com/office/drawing/2014/main" id="{955DEBDD-F0FA-644B-B1FB-9007065D29AA}"/>
+              </a:ext>
+            </a:extLst>
+          </p:cNvPr>
+          <p:cNvCxnSpPr>
+            <a:cxnSpLocks/>
+          </p:cNvCxnSpPr>
+          <p:nvPr/>
+        </p:nvCxnSpPr>
+        <p:spPr>
+          <a:xfrm>
+            <a:off x="7158232" y="3923103"/>
+            <a:ext cx="0" cy="330477"/>
+          </a:xfrm>
+          <a:prstGeom prst="line">
+            <a:avLst/>
+          </a:prstGeom>
+          <a:ln w="31750">
+            <a:solidFill>
+              <a:schemeClr val="accent3"/>
+            </a:solidFill>
+          </a:ln>
+        </p:spPr>
+        <p:style>
+          <a:lnRef idx="3">
+            <a:schemeClr val="dk1"/>
+          </a:lnRef>
+          <a:fillRef idx="0">
+            <a:schemeClr val="dk1"/>
+          </a:fillRef>
+          <a:effectRef idx="2">
+            <a:schemeClr val="dk1"/>
+          </a:effectRef>
+          <a:fontRef idx="minor">
+            <a:schemeClr val="tx1"/>
+          </a:fontRef>
+        </p:style>
+      </p:cxnSp>
+      <p:cxnSp>
+        <p:nvCxnSpPr>
+          <p:cNvPr id="68" name="Straight Connector 67">
+            <a:extLst>
+              <a:ext uri="{FF2B5EF4-FFF2-40B4-BE49-F238E27FC236}">
+                <a16:creationId xmlns:a16="http://schemas.microsoft.com/office/drawing/2014/main" id="{56637E05-7C12-354E-AE11-FDA48A4CC7E8}"/>
+              </a:ext>
+            </a:extLst>
+          </p:cNvPr>
+          <p:cNvCxnSpPr>
+            <a:cxnSpLocks/>
+          </p:cNvCxnSpPr>
+          <p:nvPr/>
+        </p:nvCxnSpPr>
+        <p:spPr>
+          <a:xfrm>
+            <a:off x="7296085" y="3923103"/>
+            <a:ext cx="0" cy="330477"/>
+          </a:xfrm>
+          <a:prstGeom prst="line">
+            <a:avLst/>
+          </a:prstGeom>
+          <a:ln w="31750">
+            <a:solidFill>
+              <a:schemeClr val="accent3"/>
+            </a:solidFill>
+          </a:ln>
+        </p:spPr>
+        <p:style>
+          <a:lnRef idx="3">
+            <a:schemeClr val="dk1"/>
+          </a:lnRef>
+          <a:fillRef idx="0">
+            <a:schemeClr val="dk1"/>
+          </a:fillRef>
+          <a:effectRef idx="2">
+            <a:schemeClr val="dk1"/>
+          </a:effectRef>
+          <a:fontRef idx="minor">
+            <a:schemeClr val="tx1"/>
+          </a:fontRef>
+        </p:style>
+      </p:cxnSp>
+      <p:cxnSp>
+        <p:nvCxnSpPr>
+          <p:cNvPr id="69" name="Straight Connector 68">
+            <a:extLst>
+              <a:ext uri="{FF2B5EF4-FFF2-40B4-BE49-F238E27FC236}">
+                <a16:creationId xmlns:a16="http://schemas.microsoft.com/office/drawing/2014/main" id="{D01DE3D4-F8D7-9F40-BABD-3EDBFBDBEA9E}"/>
+              </a:ext>
+            </a:extLst>
+          </p:cNvPr>
+          <p:cNvCxnSpPr>
+            <a:cxnSpLocks/>
+          </p:cNvCxnSpPr>
+          <p:nvPr/>
+        </p:nvCxnSpPr>
+        <p:spPr>
+          <a:xfrm>
+            <a:off x="7440865" y="3908582"/>
+            <a:ext cx="0" cy="330477"/>
+          </a:xfrm>
+          <a:prstGeom prst="line">
+            <a:avLst/>
+          </a:prstGeom>
+          <a:ln w="31750">
+            <a:solidFill>
+              <a:schemeClr val="accent3"/>
+            </a:solidFill>
+          </a:ln>
+        </p:spPr>
+        <p:style>
+          <a:lnRef idx="3">
+            <a:schemeClr val="dk1"/>
+          </a:lnRef>
+          <a:fillRef idx="0">
+            <a:schemeClr val="dk1"/>
+          </a:fillRef>
+          <a:effectRef idx="2">
+            <a:schemeClr val="dk1"/>
+          </a:effectRef>
+          <a:fontRef idx="minor">
+            <a:schemeClr val="tx1"/>
+          </a:fontRef>
+        </p:style>
+      </p:cxnSp>
+      <p:cxnSp>
+        <p:nvCxnSpPr>
+          <p:cNvPr id="70" name="Straight Connector 69">
+            <a:extLst>
+              <a:ext uri="{FF2B5EF4-FFF2-40B4-BE49-F238E27FC236}">
+                <a16:creationId xmlns:a16="http://schemas.microsoft.com/office/drawing/2014/main" id="{2030FAF1-D6DA-634A-B6D2-E6880E5DB0CE}"/>
+              </a:ext>
+            </a:extLst>
+          </p:cNvPr>
+          <p:cNvCxnSpPr>
+            <a:cxnSpLocks/>
+          </p:cNvCxnSpPr>
+          <p:nvPr/>
+        </p:nvCxnSpPr>
+        <p:spPr>
+          <a:xfrm>
+            <a:off x="7578025" y="3908582"/>
+            <a:ext cx="0" cy="330477"/>
+          </a:xfrm>
+          <a:prstGeom prst="line">
+            <a:avLst/>
+          </a:prstGeom>
+          <a:ln w="31750">
+            <a:solidFill>
+              <a:schemeClr val="accent3"/>
+            </a:solidFill>
+          </a:ln>
+        </p:spPr>
+        <p:style>
+          <a:lnRef idx="3">
+            <a:schemeClr val="dk1"/>
+          </a:lnRef>
+          <a:fillRef idx="0">
+            <a:schemeClr val="dk1"/>
+          </a:fillRef>
+          <a:effectRef idx="2">
+            <a:schemeClr val="dk1"/>
+          </a:effectRef>
+          <a:fontRef idx="minor">
+            <a:schemeClr val="tx1"/>
+          </a:fontRef>
+        </p:style>
+      </p:cxnSp>
+      <p:cxnSp>
+        <p:nvCxnSpPr>
+          <p:cNvPr id="71" name="Straight Connector 70">
+            <a:extLst>
+              <a:ext uri="{FF2B5EF4-FFF2-40B4-BE49-F238E27FC236}">
+                <a16:creationId xmlns:a16="http://schemas.microsoft.com/office/drawing/2014/main" id="{49CD73B3-1844-4343-B6A8-D0ECD7ED6F2D}"/>
+              </a:ext>
+            </a:extLst>
+          </p:cNvPr>
+          <p:cNvCxnSpPr>
+            <a:cxnSpLocks/>
+          </p:cNvCxnSpPr>
+          <p:nvPr/>
+        </p:nvCxnSpPr>
+        <p:spPr>
+          <a:xfrm>
+            <a:off x="7707565" y="3908582"/>
+            <a:ext cx="0" cy="330477"/>
+          </a:xfrm>
+          <a:prstGeom prst="line">
+            <a:avLst/>
+          </a:prstGeom>
+          <a:ln w="31750">
+            <a:solidFill>
+              <a:schemeClr val="accent3"/>
+            </a:solidFill>
+          </a:ln>
+        </p:spPr>
+        <p:style>
+          <a:lnRef idx="3">
+            <a:schemeClr val="dk1"/>
+          </a:lnRef>
+          <a:fillRef idx="0">
+            <a:schemeClr val="dk1"/>
+          </a:fillRef>
+          <a:effectRef idx="2">
+            <a:schemeClr val="dk1"/>
+          </a:effectRef>
+          <a:fontRef idx="minor">
+            <a:schemeClr val="tx1"/>
+          </a:fontRef>
+        </p:style>
+      </p:cxnSp>
+      <p:cxnSp>
+        <p:nvCxnSpPr>
+          <p:cNvPr id="72" name="Straight Connector 71">
+            <a:extLst>
+              <a:ext uri="{FF2B5EF4-FFF2-40B4-BE49-F238E27FC236}">
+                <a16:creationId xmlns:a16="http://schemas.microsoft.com/office/drawing/2014/main" id="{DB8532BD-CA16-A049-9EE9-624883C0E707}"/>
+              </a:ext>
+            </a:extLst>
+          </p:cNvPr>
+          <p:cNvCxnSpPr>
+            <a:cxnSpLocks/>
+          </p:cNvCxnSpPr>
+          <p:nvPr/>
+        </p:nvCxnSpPr>
+        <p:spPr>
+          <a:xfrm>
+            <a:off x="7837105" y="3923103"/>
+            <a:ext cx="0" cy="330477"/>
+          </a:xfrm>
+          <a:prstGeom prst="line">
+            <a:avLst/>
+          </a:prstGeom>
+          <a:ln w="31750">
+            <a:solidFill>
+              <a:schemeClr val="accent3"/>
+            </a:solidFill>
+          </a:ln>
+        </p:spPr>
+        <p:style>
+          <a:lnRef idx="3">
+            <a:schemeClr val="dk1"/>
+          </a:lnRef>
+          <a:fillRef idx="0">
+            <a:schemeClr val="dk1"/>
+          </a:fillRef>
+          <a:effectRef idx="2">
+            <a:schemeClr val="dk1"/>
+          </a:effectRef>
+          <a:fontRef idx="minor">
+            <a:schemeClr val="tx1"/>
+          </a:fontRef>
+        </p:style>
+      </p:cxnSp>
+      <p:cxnSp>
+        <p:nvCxnSpPr>
+          <p:cNvPr id="73" name="Straight Connector 72">
+            <a:extLst>
+              <a:ext uri="{FF2B5EF4-FFF2-40B4-BE49-F238E27FC236}">
+                <a16:creationId xmlns:a16="http://schemas.microsoft.com/office/drawing/2014/main" id="{B88DFE8D-0A15-454E-A5BD-5D77CDCFDD0B}"/>
+              </a:ext>
+            </a:extLst>
+          </p:cNvPr>
+          <p:cNvCxnSpPr>
+            <a:cxnSpLocks/>
+          </p:cNvCxnSpPr>
+          <p:nvPr/>
+        </p:nvCxnSpPr>
+        <p:spPr>
+          <a:xfrm>
+            <a:off x="7974957" y="3923103"/>
+            <a:ext cx="0" cy="330477"/>
+          </a:xfrm>
+          <a:prstGeom prst="line">
+            <a:avLst/>
+          </a:prstGeom>
+          <a:ln w="31750">
+            <a:solidFill>
+              <a:schemeClr val="accent3"/>
+            </a:solidFill>
+          </a:ln>
+        </p:spPr>
+        <p:style>
+          <a:lnRef idx="3">
+            <a:schemeClr val="dk1"/>
+          </a:lnRef>
+          <a:fillRef idx="0">
+            <a:schemeClr val="dk1"/>
+          </a:fillRef>
+          <a:effectRef idx="2">
+            <a:schemeClr val="dk1"/>
+          </a:effectRef>
+          <a:fontRef idx="minor">
+            <a:schemeClr val="tx1"/>
+          </a:fontRef>
+        </p:style>
+      </p:cxnSp>
+      <p:cxnSp>
+        <p:nvCxnSpPr>
+          <p:cNvPr id="74" name="Straight Connector 73">
+            <a:extLst>
+              <a:ext uri="{FF2B5EF4-FFF2-40B4-BE49-F238E27FC236}">
+                <a16:creationId xmlns:a16="http://schemas.microsoft.com/office/drawing/2014/main" id="{B1330D54-FA49-A940-9984-42EB25D050CC}"/>
+              </a:ext>
+            </a:extLst>
+          </p:cNvPr>
+          <p:cNvCxnSpPr>
+            <a:cxnSpLocks/>
+          </p:cNvCxnSpPr>
+          <p:nvPr/>
+        </p:nvCxnSpPr>
+        <p:spPr>
+          <a:xfrm>
+            <a:off x="8119737" y="3908582"/>
+            <a:ext cx="0" cy="330477"/>
+          </a:xfrm>
+          <a:prstGeom prst="line">
+            <a:avLst/>
+          </a:prstGeom>
+          <a:ln w="31750">
+            <a:solidFill>
+              <a:schemeClr val="accent3"/>
+            </a:solidFill>
+          </a:ln>
+        </p:spPr>
+        <p:style>
+          <a:lnRef idx="3">
+            <a:schemeClr val="dk1"/>
+          </a:lnRef>
+          <a:fillRef idx="0">
+            <a:schemeClr val="dk1"/>
+          </a:fillRef>
+          <a:effectRef idx="2">
+            <a:schemeClr val="dk1"/>
+          </a:effectRef>
+          <a:fontRef idx="minor">
+            <a:schemeClr val="tx1"/>
+          </a:fontRef>
+        </p:style>
+      </p:cxnSp>
+      <p:cxnSp>
+        <p:nvCxnSpPr>
+          <p:cNvPr id="75" name="Straight Connector 74">
+            <a:extLst>
+              <a:ext uri="{FF2B5EF4-FFF2-40B4-BE49-F238E27FC236}">
+                <a16:creationId xmlns:a16="http://schemas.microsoft.com/office/drawing/2014/main" id="{A87C16CE-AD66-3244-A585-37B5F721B810}"/>
+              </a:ext>
+            </a:extLst>
+          </p:cNvPr>
+          <p:cNvCxnSpPr>
+            <a:cxnSpLocks/>
+          </p:cNvCxnSpPr>
+          <p:nvPr/>
+        </p:nvCxnSpPr>
+        <p:spPr>
+          <a:xfrm>
+            <a:off x="8256897" y="3908582"/>
+            <a:ext cx="0" cy="330477"/>
+          </a:xfrm>
+          <a:prstGeom prst="line">
+            <a:avLst/>
+          </a:prstGeom>
+          <a:ln w="31750">
+            <a:solidFill>
+              <a:schemeClr val="accent3"/>
+            </a:solidFill>
+          </a:ln>
+        </p:spPr>
+        <p:style>
+          <a:lnRef idx="3">
+            <a:schemeClr val="dk1"/>
+          </a:lnRef>
+          <a:fillRef idx="0">
+            <a:schemeClr val="dk1"/>
+          </a:fillRef>
+          <a:effectRef idx="2">
+            <a:schemeClr val="dk1"/>
+          </a:effectRef>
+          <a:fontRef idx="minor">
+            <a:schemeClr val="tx1"/>
+          </a:fontRef>
+        </p:style>
+      </p:cxnSp>
+      <p:cxnSp>
+        <p:nvCxnSpPr>
+          <p:cNvPr id="76" name="Straight Connector 75">
+            <a:extLst>
+              <a:ext uri="{FF2B5EF4-FFF2-40B4-BE49-F238E27FC236}">
+                <a16:creationId xmlns:a16="http://schemas.microsoft.com/office/drawing/2014/main" id="{313177CB-D233-A140-B3A2-7EC0EAE7484C}"/>
+              </a:ext>
+            </a:extLst>
+          </p:cNvPr>
+          <p:cNvCxnSpPr>
+            <a:cxnSpLocks/>
+          </p:cNvCxnSpPr>
+          <p:nvPr/>
+        </p:nvCxnSpPr>
+        <p:spPr>
+          <a:xfrm>
+            <a:off x="8386437" y="3908582"/>
+            <a:ext cx="0" cy="330477"/>
+          </a:xfrm>
+          <a:prstGeom prst="line">
+            <a:avLst/>
+          </a:prstGeom>
+          <a:ln w="31750">
+            <a:solidFill>
+              <a:schemeClr val="accent3"/>
+            </a:solidFill>
+          </a:ln>
+        </p:spPr>
+        <p:style>
+          <a:lnRef idx="3">
+            <a:schemeClr val="dk1"/>
+          </a:lnRef>
+          <a:fillRef idx="0">
+            <a:schemeClr val="dk1"/>
+          </a:fillRef>
+          <a:effectRef idx="2">
+            <a:schemeClr val="dk1"/>
+          </a:effectRef>
+          <a:fontRef idx="minor">
+            <a:schemeClr val="tx1"/>
+          </a:fontRef>
+        </p:style>
+      </p:cxnSp>
+      <p:cxnSp>
+        <p:nvCxnSpPr>
+          <p:cNvPr id="77" name="Straight Connector 76">
+            <a:extLst>
+              <a:ext uri="{FF2B5EF4-FFF2-40B4-BE49-F238E27FC236}">
+                <a16:creationId xmlns:a16="http://schemas.microsoft.com/office/drawing/2014/main" id="{F53F7FCA-0BBB-574B-9144-11068A2AB3D6}"/>
+              </a:ext>
+            </a:extLst>
+          </p:cNvPr>
+          <p:cNvCxnSpPr>
+            <a:cxnSpLocks/>
+          </p:cNvCxnSpPr>
+          <p:nvPr/>
+        </p:nvCxnSpPr>
+        <p:spPr>
+          <a:xfrm>
+            <a:off x="8515977" y="3923103"/>
+            <a:ext cx="0" cy="330477"/>
+          </a:xfrm>
+          <a:prstGeom prst="line">
+            <a:avLst/>
+          </a:prstGeom>
+          <a:ln w="31750">
+            <a:solidFill>
+              <a:schemeClr val="accent3"/>
+            </a:solidFill>
+          </a:ln>
+        </p:spPr>
+        <p:style>
+          <a:lnRef idx="3">
+            <a:schemeClr val="dk1"/>
+          </a:lnRef>
+          <a:fillRef idx="0">
+            <a:schemeClr val="dk1"/>
+          </a:fillRef>
+          <a:effectRef idx="2">
+            <a:schemeClr val="dk1"/>
+          </a:effectRef>
+          <a:fontRef idx="minor">
+            <a:schemeClr val="tx1"/>
+          </a:fontRef>
+        </p:style>
+      </p:cxnSp>
+      <p:cxnSp>
+        <p:nvCxnSpPr>
+          <p:cNvPr id="78" name="Straight Connector 77">
+            <a:extLst>
+              <a:ext uri="{FF2B5EF4-FFF2-40B4-BE49-F238E27FC236}">
+                <a16:creationId xmlns:a16="http://schemas.microsoft.com/office/drawing/2014/main" id="{9C9268C3-0421-9643-840C-E404482CFE08}"/>
+              </a:ext>
+            </a:extLst>
+          </p:cNvPr>
+          <p:cNvCxnSpPr>
+            <a:cxnSpLocks/>
+          </p:cNvCxnSpPr>
+          <p:nvPr/>
+        </p:nvCxnSpPr>
+        <p:spPr>
+          <a:xfrm>
+            <a:off x="8653830" y="3923103"/>
+            <a:ext cx="0" cy="330477"/>
+          </a:xfrm>
+          <a:prstGeom prst="line">
+            <a:avLst/>
+          </a:prstGeom>
+          <a:ln w="31750">
+            <a:solidFill>
+              <a:schemeClr val="accent3"/>
+            </a:solidFill>
+          </a:ln>
+        </p:spPr>
+        <p:style>
+          <a:lnRef idx="3">
+            <a:schemeClr val="dk1"/>
+          </a:lnRef>
+          <a:fillRef idx="0">
+            <a:schemeClr val="dk1"/>
+          </a:fillRef>
+          <a:effectRef idx="2">
+            <a:schemeClr val="dk1"/>
+          </a:effectRef>
+          <a:fontRef idx="minor">
+            <a:schemeClr val="tx1"/>
+          </a:fontRef>
+        </p:style>
+      </p:cxnSp>
+      <p:cxnSp>
+        <p:nvCxnSpPr>
+          <p:cNvPr id="79" name="Straight Connector 78">
+            <a:extLst>
+              <a:ext uri="{FF2B5EF4-FFF2-40B4-BE49-F238E27FC236}">
+                <a16:creationId xmlns:a16="http://schemas.microsoft.com/office/drawing/2014/main" id="{87B935C4-7A1C-484A-A38F-BD96E714C226}"/>
+              </a:ext>
+            </a:extLst>
+          </p:cNvPr>
+          <p:cNvCxnSpPr>
+            <a:cxnSpLocks/>
+          </p:cNvCxnSpPr>
+          <p:nvPr/>
+        </p:nvCxnSpPr>
+        <p:spPr>
+          <a:xfrm>
+            <a:off x="8798610" y="3908582"/>
+            <a:ext cx="0" cy="330477"/>
+          </a:xfrm>
+          <a:prstGeom prst="line">
+            <a:avLst/>
+          </a:prstGeom>
+          <a:ln w="31750">
+            <a:solidFill>
+              <a:schemeClr val="accent3"/>
+            </a:solidFill>
+          </a:ln>
+        </p:spPr>
+        <p:style>
+          <a:lnRef idx="3">
+            <a:schemeClr val="dk1"/>
+          </a:lnRef>
+          <a:fillRef idx="0">
+            <a:schemeClr val="dk1"/>
+          </a:fillRef>
+          <a:effectRef idx="2">
+            <a:schemeClr val="dk1"/>
+          </a:effectRef>
+          <a:fontRef idx="minor">
+            <a:schemeClr val="tx1"/>
+          </a:fontRef>
+        </p:style>
+      </p:cxnSp>
+      <p:cxnSp>
+        <p:nvCxnSpPr>
+          <p:cNvPr id="80" name="Straight Connector 79">
+            <a:extLst>
+              <a:ext uri="{FF2B5EF4-FFF2-40B4-BE49-F238E27FC236}">
+                <a16:creationId xmlns:a16="http://schemas.microsoft.com/office/drawing/2014/main" id="{ED8344FB-CA2B-B64D-AE02-64FD9DC36286}"/>
+              </a:ext>
+            </a:extLst>
+          </p:cNvPr>
+          <p:cNvCxnSpPr>
+            <a:cxnSpLocks/>
+          </p:cNvCxnSpPr>
+          <p:nvPr/>
+        </p:nvCxnSpPr>
+        <p:spPr>
+          <a:xfrm>
+            <a:off x="8935770" y="3908582"/>
+            <a:ext cx="0" cy="330477"/>
+          </a:xfrm>
+          <a:prstGeom prst="line">
+            <a:avLst/>
+          </a:prstGeom>
+          <a:ln w="31750">
+            <a:solidFill>
+              <a:schemeClr val="accent3"/>
+            </a:solidFill>
+          </a:ln>
+        </p:spPr>
+        <p:style>
+          <a:lnRef idx="3">
+            <a:schemeClr val="dk1"/>
+          </a:lnRef>
+          <a:fillRef idx="0">
+            <a:schemeClr val="dk1"/>
+          </a:fillRef>
+          <a:effectRef idx="2">
+            <a:schemeClr val="dk1"/>
+          </a:effectRef>
+          <a:fontRef idx="minor">
+            <a:schemeClr val="tx1"/>
+          </a:fontRef>
+        </p:style>
+      </p:cxnSp>
+      <p:cxnSp>
+        <p:nvCxnSpPr>
+          <p:cNvPr id="81" name="Straight Connector 80">
+            <a:extLst>
+              <a:ext uri="{FF2B5EF4-FFF2-40B4-BE49-F238E27FC236}">
+                <a16:creationId xmlns:a16="http://schemas.microsoft.com/office/drawing/2014/main" id="{F2A47626-5852-1D47-9019-3F27A4C2CD0C}"/>
+              </a:ext>
+            </a:extLst>
+          </p:cNvPr>
+          <p:cNvCxnSpPr>
+            <a:cxnSpLocks/>
+          </p:cNvCxnSpPr>
+          <p:nvPr/>
+        </p:nvCxnSpPr>
+        <p:spPr>
+          <a:xfrm>
+            <a:off x="9065310" y="3908582"/>
+            <a:ext cx="0" cy="330477"/>
+          </a:xfrm>
+          <a:prstGeom prst="line">
+            <a:avLst/>
+          </a:prstGeom>
+          <a:ln w="31750">
+            <a:solidFill>
+              <a:schemeClr val="accent3"/>
+            </a:solidFill>
+          </a:ln>
+        </p:spPr>
+        <p:style>
+          <a:lnRef idx="3">
+            <a:schemeClr val="dk1"/>
+          </a:lnRef>
+          <a:fillRef idx="0">
+            <a:schemeClr val="dk1"/>
+          </a:fillRef>
+          <a:effectRef idx="2">
+            <a:schemeClr val="dk1"/>
+          </a:effectRef>
+          <a:fontRef idx="minor">
+            <a:schemeClr val="tx1"/>
+          </a:fontRef>
+        </p:style>
+      </p:cxnSp>
+      <p:cxnSp>
+        <p:nvCxnSpPr>
+          <p:cNvPr id="82" name="Straight Connector 81">
+            <a:extLst>
+              <a:ext uri="{FF2B5EF4-FFF2-40B4-BE49-F238E27FC236}">
+                <a16:creationId xmlns:a16="http://schemas.microsoft.com/office/drawing/2014/main" id="{A46D5769-BF89-7D47-A081-07F6219037CF}"/>
+              </a:ext>
+            </a:extLst>
+          </p:cNvPr>
+          <p:cNvCxnSpPr>
+            <a:cxnSpLocks/>
+          </p:cNvCxnSpPr>
+          <p:nvPr/>
+        </p:nvCxnSpPr>
+        <p:spPr>
+          <a:xfrm>
+            <a:off x="9194850" y="3923103"/>
+            <a:ext cx="0" cy="330477"/>
+          </a:xfrm>
+          <a:prstGeom prst="line">
+            <a:avLst/>
+          </a:prstGeom>
+          <a:ln w="31750">
+            <a:solidFill>
+              <a:schemeClr val="accent3"/>
+            </a:solidFill>
+          </a:ln>
+        </p:spPr>
+        <p:style>
+          <a:lnRef idx="3">
+            <a:schemeClr val="dk1"/>
+          </a:lnRef>
+          <a:fillRef idx="0">
+            <a:schemeClr val="dk1"/>
+          </a:fillRef>
+          <a:effectRef idx="2">
+            <a:schemeClr val="dk1"/>
+          </a:effectRef>
+          <a:fontRef idx="minor">
+            <a:schemeClr val="tx1"/>
+          </a:fontRef>
+        </p:style>
+      </p:cxnSp>
+      <p:cxnSp>
+        <p:nvCxnSpPr>
+          <p:cNvPr id="83" name="Straight Connector 82">
+            <a:extLst>
+              <a:ext uri="{FF2B5EF4-FFF2-40B4-BE49-F238E27FC236}">
+                <a16:creationId xmlns:a16="http://schemas.microsoft.com/office/drawing/2014/main" id="{561F6326-1734-5C4B-898A-8FFCBA54CDC7}"/>
+              </a:ext>
+            </a:extLst>
+          </p:cNvPr>
+          <p:cNvCxnSpPr>
+            <a:cxnSpLocks/>
+          </p:cNvCxnSpPr>
+          <p:nvPr/>
+        </p:nvCxnSpPr>
+        <p:spPr>
+          <a:xfrm>
+            <a:off x="9325083" y="3908582"/>
+            <a:ext cx="0" cy="330477"/>
+          </a:xfrm>
+          <a:prstGeom prst="line">
+            <a:avLst/>
+          </a:prstGeom>
+          <a:ln w="31750">
+            <a:solidFill>
+              <a:schemeClr val="accent3"/>
+            </a:solidFill>
+          </a:ln>
+        </p:spPr>
+        <p:style>
+          <a:lnRef idx="3">
+            <a:schemeClr val="dk1"/>
+          </a:lnRef>
+          <a:fillRef idx="0">
+            <a:schemeClr val="dk1"/>
+          </a:fillRef>
+          <a:effectRef idx="2">
+            <a:schemeClr val="dk1"/>
+          </a:effectRef>
+          <a:fontRef idx="minor">
+            <a:schemeClr val="tx1"/>
+          </a:fontRef>
+        </p:style>
+      </p:cxnSp>
+      <p:cxnSp>
+        <p:nvCxnSpPr>
+          <p:cNvPr id="84" name="Straight Connector 83">
+            <a:extLst>
+              <a:ext uri="{FF2B5EF4-FFF2-40B4-BE49-F238E27FC236}">
+                <a16:creationId xmlns:a16="http://schemas.microsoft.com/office/drawing/2014/main" id="{B7720000-50BB-0F4B-A8B2-A28D8CCB557E}"/>
+              </a:ext>
+            </a:extLst>
+          </p:cNvPr>
+          <p:cNvCxnSpPr>
+            <a:cxnSpLocks/>
+          </p:cNvCxnSpPr>
+          <p:nvPr/>
+        </p:nvCxnSpPr>
+        <p:spPr>
+          <a:xfrm>
+            <a:off x="9462243" y="3908582"/>
+            <a:ext cx="0" cy="330477"/>
+          </a:xfrm>
+          <a:prstGeom prst="line">
+            <a:avLst/>
+          </a:prstGeom>
+          <a:ln w="31750">
+            <a:solidFill>
+              <a:schemeClr val="accent3"/>
+            </a:solidFill>
+          </a:ln>
+        </p:spPr>
+        <p:style>
+          <a:lnRef idx="3">
+            <a:schemeClr val="dk1"/>
+          </a:lnRef>
+          <a:fillRef idx="0">
+            <a:schemeClr val="dk1"/>
+          </a:fillRef>
+          <a:effectRef idx="2">
+            <a:schemeClr val="dk1"/>
+          </a:effectRef>
+          <a:fontRef idx="minor">
+            <a:schemeClr val="tx1"/>
+          </a:fontRef>
+        </p:style>
+      </p:cxnSp>
+      <p:cxnSp>
+        <p:nvCxnSpPr>
+          <p:cNvPr id="85" name="Straight Connector 84">
+            <a:extLst>
+              <a:ext uri="{FF2B5EF4-FFF2-40B4-BE49-F238E27FC236}">
+                <a16:creationId xmlns:a16="http://schemas.microsoft.com/office/drawing/2014/main" id="{EA97B87D-5D3E-7846-B3DB-8A12AAF36C56}"/>
+              </a:ext>
+            </a:extLst>
+          </p:cNvPr>
+          <p:cNvCxnSpPr>
+            <a:cxnSpLocks/>
+          </p:cNvCxnSpPr>
+          <p:nvPr/>
+        </p:nvCxnSpPr>
+        <p:spPr>
+          <a:xfrm>
+            <a:off x="9591783" y="3908582"/>
+            <a:ext cx="0" cy="330477"/>
+          </a:xfrm>
+          <a:prstGeom prst="line">
+            <a:avLst/>
+          </a:prstGeom>
+          <a:ln w="31750">
+            <a:solidFill>
+              <a:schemeClr val="accent3"/>
+            </a:solidFill>
+          </a:ln>
+        </p:spPr>
+        <p:style>
+          <a:lnRef idx="3">
+            <a:schemeClr val="dk1"/>
+          </a:lnRef>
+          <a:fillRef idx="0">
+            <a:schemeClr val="dk1"/>
+          </a:fillRef>
+          <a:effectRef idx="2">
+            <a:schemeClr val="dk1"/>
+          </a:effectRef>
+          <a:fontRef idx="minor">
+            <a:schemeClr val="tx1"/>
+          </a:fontRef>
+        </p:style>
+      </p:cxnSp>
+      <p:cxnSp>
+        <p:nvCxnSpPr>
+          <p:cNvPr id="86" name="Straight Connector 85">
+            <a:extLst>
+              <a:ext uri="{FF2B5EF4-FFF2-40B4-BE49-F238E27FC236}">
+                <a16:creationId xmlns:a16="http://schemas.microsoft.com/office/drawing/2014/main" id="{3010ED17-DCF5-EA4B-A8C2-82A6DCE36CA0}"/>
+              </a:ext>
+            </a:extLst>
+          </p:cNvPr>
+          <p:cNvCxnSpPr>
+            <a:cxnSpLocks/>
+          </p:cNvCxnSpPr>
+          <p:nvPr/>
+        </p:nvCxnSpPr>
+        <p:spPr>
+          <a:xfrm>
+            <a:off x="9721323" y="3923103"/>
+            <a:ext cx="0" cy="330477"/>
+          </a:xfrm>
+          <a:prstGeom prst="line">
+            <a:avLst/>
+          </a:prstGeom>
+          <a:ln w="31750">
+            <a:solidFill>
+              <a:schemeClr val="accent3"/>
+            </a:solidFill>
+          </a:ln>
+        </p:spPr>
+        <p:style>
+          <a:lnRef idx="3">
+            <a:schemeClr val="dk1"/>
+          </a:lnRef>
+          <a:fillRef idx="0">
+            <a:schemeClr val="dk1"/>
+          </a:fillRef>
+          <a:effectRef idx="2">
+            <a:schemeClr val="dk1"/>
+          </a:effectRef>
+          <a:fontRef idx="minor">
+            <a:schemeClr val="tx1"/>
+          </a:fontRef>
+        </p:style>
+      </p:cxnSp>
+      <p:cxnSp>
+        <p:nvCxnSpPr>
+          <p:cNvPr id="87" name="Straight Connector 86">
+            <a:extLst>
+              <a:ext uri="{FF2B5EF4-FFF2-40B4-BE49-F238E27FC236}">
+                <a16:creationId xmlns:a16="http://schemas.microsoft.com/office/drawing/2014/main" id="{74C99176-A41B-A841-B5B5-6E449FE3C4F0}"/>
+              </a:ext>
+            </a:extLst>
+          </p:cNvPr>
+          <p:cNvCxnSpPr>
+            <a:cxnSpLocks/>
+          </p:cNvCxnSpPr>
+          <p:nvPr/>
+        </p:nvCxnSpPr>
+        <p:spPr>
+          <a:xfrm>
+            <a:off x="9859175" y="3923103"/>
+            <a:ext cx="0" cy="330477"/>
+          </a:xfrm>
+          <a:prstGeom prst="line">
+            <a:avLst/>
+          </a:prstGeom>
+          <a:ln w="31750">
+            <a:solidFill>
+              <a:schemeClr val="accent3"/>
+            </a:solidFill>
+          </a:ln>
+        </p:spPr>
+        <p:style>
+          <a:lnRef idx="3">
+            <a:schemeClr val="dk1"/>
+          </a:lnRef>
+          <a:fillRef idx="0">
+            <a:schemeClr val="dk1"/>
+          </a:fillRef>
+          <a:effectRef idx="2">
+            <a:schemeClr val="dk1"/>
+          </a:effectRef>
+          <a:fontRef idx="minor">
+            <a:schemeClr val="tx1"/>
+          </a:fontRef>
+        </p:style>
+      </p:cxnSp>
+      <p:cxnSp>
+        <p:nvCxnSpPr>
+          <p:cNvPr id="88" name="Straight Connector 87">
+            <a:extLst>
+              <a:ext uri="{FF2B5EF4-FFF2-40B4-BE49-F238E27FC236}">
+                <a16:creationId xmlns:a16="http://schemas.microsoft.com/office/drawing/2014/main" id="{628F7442-8E65-314E-8DF1-C44408031E09}"/>
+              </a:ext>
+            </a:extLst>
+          </p:cNvPr>
+          <p:cNvCxnSpPr>
+            <a:cxnSpLocks/>
+          </p:cNvCxnSpPr>
+          <p:nvPr/>
+        </p:nvCxnSpPr>
+        <p:spPr>
+          <a:xfrm>
+            <a:off x="10003955" y="3908582"/>
+            <a:ext cx="0" cy="330477"/>
+          </a:xfrm>
+          <a:prstGeom prst="line">
+            <a:avLst/>
+          </a:prstGeom>
+          <a:ln w="31750">
+            <a:solidFill>
+              <a:schemeClr val="accent3"/>
+            </a:solidFill>
+          </a:ln>
+        </p:spPr>
+        <p:style>
+          <a:lnRef idx="3">
+            <a:schemeClr val="dk1"/>
+          </a:lnRef>
+          <a:fillRef idx="0">
+            <a:schemeClr val="dk1"/>
+          </a:fillRef>
+          <a:effectRef idx="2">
+            <a:schemeClr val="dk1"/>
+          </a:effectRef>
+          <a:fontRef idx="minor">
+            <a:schemeClr val="tx1"/>
+          </a:fontRef>
+        </p:style>
+      </p:cxnSp>
+      <p:cxnSp>
+        <p:nvCxnSpPr>
+          <p:cNvPr id="89" name="Straight Connector 88">
+            <a:extLst>
+              <a:ext uri="{FF2B5EF4-FFF2-40B4-BE49-F238E27FC236}">
+                <a16:creationId xmlns:a16="http://schemas.microsoft.com/office/drawing/2014/main" id="{F6676F29-446C-674D-B4BB-756982DB884E}"/>
+              </a:ext>
+            </a:extLst>
+          </p:cNvPr>
+          <p:cNvCxnSpPr>
+            <a:cxnSpLocks/>
+          </p:cNvCxnSpPr>
+          <p:nvPr/>
+        </p:nvCxnSpPr>
+        <p:spPr>
+          <a:xfrm>
+            <a:off x="10141115" y="3908582"/>
+            <a:ext cx="0" cy="330477"/>
+          </a:xfrm>
+          <a:prstGeom prst="line">
+            <a:avLst/>
+          </a:prstGeom>
+          <a:ln w="31750">
+            <a:solidFill>
+              <a:schemeClr val="accent3"/>
+            </a:solidFill>
+          </a:ln>
+        </p:spPr>
+        <p:style>
+          <a:lnRef idx="3">
+            <a:schemeClr val="dk1"/>
+          </a:lnRef>
+          <a:fillRef idx="0">
+            <a:schemeClr val="dk1"/>
+          </a:fillRef>
+          <a:effectRef idx="2">
+            <a:schemeClr val="dk1"/>
+          </a:effectRef>
+          <a:fontRef idx="minor">
+            <a:schemeClr val="tx1"/>
+          </a:fontRef>
+        </p:style>
+      </p:cxnSp>
+      <p:cxnSp>
+        <p:nvCxnSpPr>
+          <p:cNvPr id="90" name="Straight Connector 89">
+            <a:extLst>
+              <a:ext uri="{FF2B5EF4-FFF2-40B4-BE49-F238E27FC236}">
+                <a16:creationId xmlns:a16="http://schemas.microsoft.com/office/drawing/2014/main" id="{FBD28D57-8FE7-EE4D-80B1-D3C6781F1401}"/>
+              </a:ext>
+            </a:extLst>
+          </p:cNvPr>
+          <p:cNvCxnSpPr>
+            <a:cxnSpLocks/>
+          </p:cNvCxnSpPr>
+          <p:nvPr/>
+        </p:nvCxnSpPr>
+        <p:spPr>
+          <a:xfrm>
+            <a:off x="10270655" y="3908582"/>
+            <a:ext cx="0" cy="330477"/>
+          </a:xfrm>
+          <a:prstGeom prst="line">
+            <a:avLst/>
+          </a:prstGeom>
+          <a:ln w="31750">
+            <a:solidFill>
+              <a:schemeClr val="accent3"/>
+            </a:solidFill>
+          </a:ln>
+        </p:spPr>
+        <p:style>
+          <a:lnRef idx="3">
+            <a:schemeClr val="dk1"/>
+          </a:lnRef>
+          <a:fillRef idx="0">
+            <a:schemeClr val="dk1"/>
+          </a:fillRef>
+          <a:effectRef idx="2">
+            <a:schemeClr val="dk1"/>
+          </a:effectRef>
+          <a:fontRef idx="minor">
+            <a:schemeClr val="tx1"/>
+          </a:fontRef>
+        </p:style>
+      </p:cxnSp>
+      <p:cxnSp>
+        <p:nvCxnSpPr>
+          <p:cNvPr id="91" name="Straight Connector 90">
+            <a:extLst>
+              <a:ext uri="{FF2B5EF4-FFF2-40B4-BE49-F238E27FC236}">
+                <a16:creationId xmlns:a16="http://schemas.microsoft.com/office/drawing/2014/main" id="{A64ECB6A-A365-9343-87D6-006E4C7073F1}"/>
+              </a:ext>
+            </a:extLst>
+          </p:cNvPr>
+          <p:cNvCxnSpPr>
+            <a:cxnSpLocks/>
+          </p:cNvCxnSpPr>
+          <p:nvPr/>
+        </p:nvCxnSpPr>
+        <p:spPr>
+          <a:xfrm>
+            <a:off x="10400195" y="3923103"/>
+            <a:ext cx="0" cy="330477"/>
+          </a:xfrm>
+          <a:prstGeom prst="line">
+            <a:avLst/>
+          </a:prstGeom>
+          <a:ln w="31750">
+            <a:solidFill>
+              <a:schemeClr val="accent3"/>
+            </a:solidFill>
+          </a:ln>
+        </p:spPr>
+        <p:style>
+          <a:lnRef idx="3">
+            <a:schemeClr val="dk1"/>
+          </a:lnRef>
+          <a:fillRef idx="0">
+            <a:schemeClr val="dk1"/>
+          </a:fillRef>
+          <a:effectRef idx="2">
+            <a:schemeClr val="dk1"/>
+          </a:effectRef>
+          <a:fontRef idx="minor">
+            <a:schemeClr val="tx1"/>
+          </a:fontRef>
+        </p:style>
+      </p:cxnSp>
+      <p:cxnSp>
+        <p:nvCxnSpPr>
+          <p:cNvPr id="92" name="Straight Connector 91">
+            <a:extLst>
+              <a:ext uri="{FF2B5EF4-FFF2-40B4-BE49-F238E27FC236}">
+                <a16:creationId xmlns:a16="http://schemas.microsoft.com/office/drawing/2014/main" id="{8F432C32-A6B3-8E4F-ABE2-5E3C7ECEFD8B}"/>
+              </a:ext>
+            </a:extLst>
+          </p:cNvPr>
+          <p:cNvCxnSpPr>
+            <a:cxnSpLocks/>
+          </p:cNvCxnSpPr>
+          <p:nvPr/>
+        </p:nvCxnSpPr>
+        <p:spPr>
+          <a:xfrm>
+            <a:off x="10538048" y="3923103"/>
+            <a:ext cx="0" cy="330477"/>
+          </a:xfrm>
+          <a:prstGeom prst="line">
+            <a:avLst/>
+          </a:prstGeom>
+          <a:ln w="31750">
+            <a:solidFill>
+              <a:schemeClr val="accent3"/>
+            </a:solidFill>
+          </a:ln>
+        </p:spPr>
+        <p:style>
+          <a:lnRef idx="3">
+            <a:schemeClr val="dk1"/>
+          </a:lnRef>
+          <a:fillRef idx="0">
+            <a:schemeClr val="dk1"/>
+          </a:fillRef>
+          <a:effectRef idx="2">
+            <a:schemeClr val="dk1"/>
+          </a:effectRef>
+          <a:fontRef idx="minor">
+            <a:schemeClr val="tx1"/>
+          </a:fontRef>
+        </p:style>
+      </p:cxnSp>
+      <p:cxnSp>
+        <p:nvCxnSpPr>
+          <p:cNvPr id="93" name="Straight Connector 92">
+            <a:extLst>
+              <a:ext uri="{FF2B5EF4-FFF2-40B4-BE49-F238E27FC236}">
+                <a16:creationId xmlns:a16="http://schemas.microsoft.com/office/drawing/2014/main" id="{5CE01E0B-8573-DD4B-BAF4-F30912DD6844}"/>
+              </a:ext>
+            </a:extLst>
+          </p:cNvPr>
+          <p:cNvCxnSpPr>
+            <a:cxnSpLocks/>
+          </p:cNvCxnSpPr>
+          <p:nvPr/>
+        </p:nvCxnSpPr>
+        <p:spPr>
+          <a:xfrm>
+            <a:off x="10682828" y="3908582"/>
+            <a:ext cx="0" cy="330477"/>
+          </a:xfrm>
+          <a:prstGeom prst="line">
+            <a:avLst/>
+          </a:prstGeom>
+          <a:ln w="31750">
+            <a:solidFill>
+              <a:schemeClr val="accent3"/>
+            </a:solidFill>
+          </a:ln>
+        </p:spPr>
+        <p:style>
+          <a:lnRef idx="3">
+            <a:schemeClr val="dk1"/>
+          </a:lnRef>
+          <a:fillRef idx="0">
+            <a:schemeClr val="dk1"/>
+          </a:fillRef>
+          <a:effectRef idx="2">
+            <a:schemeClr val="dk1"/>
+          </a:effectRef>
+          <a:fontRef idx="minor">
+            <a:schemeClr val="tx1"/>
+          </a:fontRef>
+        </p:style>
+      </p:cxnSp>
+      <p:cxnSp>
+        <p:nvCxnSpPr>
+          <p:cNvPr id="94" name="Straight Connector 93">
+            <a:extLst>
+              <a:ext uri="{FF2B5EF4-FFF2-40B4-BE49-F238E27FC236}">
+                <a16:creationId xmlns:a16="http://schemas.microsoft.com/office/drawing/2014/main" id="{EE9206AB-36D1-3A4C-BA2A-DD6459312DE4}"/>
+              </a:ext>
+            </a:extLst>
+          </p:cNvPr>
+          <p:cNvCxnSpPr>
+            <a:cxnSpLocks/>
+          </p:cNvCxnSpPr>
+          <p:nvPr/>
+        </p:nvCxnSpPr>
+        <p:spPr>
+          <a:xfrm>
+            <a:off x="10819988" y="3908582"/>
+            <a:ext cx="0" cy="330477"/>
+          </a:xfrm>
+          <a:prstGeom prst="line">
+            <a:avLst/>
+          </a:prstGeom>
+          <a:ln w="31750">
+            <a:solidFill>
+              <a:schemeClr val="accent3"/>
+            </a:solidFill>
+          </a:ln>
+        </p:spPr>
+        <p:style>
+          <a:lnRef idx="3">
+            <a:schemeClr val="dk1"/>
+          </a:lnRef>
+          <a:fillRef idx="0">
+            <a:schemeClr val="dk1"/>
+          </a:fillRef>
+          <a:effectRef idx="2">
+            <a:schemeClr val="dk1"/>
+          </a:effectRef>
+          <a:fontRef idx="minor">
+            <a:schemeClr val="tx1"/>
+          </a:fontRef>
+        </p:style>
+      </p:cxnSp>
+      <p:cxnSp>
+        <p:nvCxnSpPr>
+          <p:cNvPr id="95" name="Straight Connector 94">
+            <a:extLst>
+              <a:ext uri="{FF2B5EF4-FFF2-40B4-BE49-F238E27FC236}">
+                <a16:creationId xmlns:a16="http://schemas.microsoft.com/office/drawing/2014/main" id="{6A8B2A1C-EDD7-9942-8A6E-F2A942F0E9B9}"/>
+              </a:ext>
+            </a:extLst>
+          </p:cNvPr>
+          <p:cNvCxnSpPr>
+            <a:cxnSpLocks/>
+          </p:cNvCxnSpPr>
+          <p:nvPr/>
+        </p:nvCxnSpPr>
+        <p:spPr>
+          <a:xfrm>
+            <a:off x="10949528" y="3908582"/>
+            <a:ext cx="0" cy="330477"/>
+          </a:xfrm>
+          <a:prstGeom prst="line">
+            <a:avLst/>
+          </a:prstGeom>
+          <a:ln w="31750">
+            <a:solidFill>
+              <a:schemeClr val="accent3"/>
+            </a:solidFill>
+          </a:ln>
+        </p:spPr>
+        <p:style>
+          <a:lnRef idx="3">
+            <a:schemeClr val="dk1"/>
+          </a:lnRef>
+          <a:fillRef idx="0">
+            <a:schemeClr val="dk1"/>
+          </a:fillRef>
+          <a:effectRef idx="2">
+            <a:schemeClr val="dk1"/>
+          </a:effectRef>
+          <a:fontRef idx="minor">
+            <a:schemeClr val="tx1"/>
+          </a:fontRef>
+        </p:style>
+      </p:cxnSp>
+      <p:cxnSp>
+        <p:nvCxnSpPr>
+          <p:cNvPr id="96" name="Straight Connector 95">
+            <a:extLst>
+              <a:ext uri="{FF2B5EF4-FFF2-40B4-BE49-F238E27FC236}">
+                <a16:creationId xmlns:a16="http://schemas.microsoft.com/office/drawing/2014/main" id="{41462180-95AE-B948-B77C-B911C66A4344}"/>
+              </a:ext>
+            </a:extLst>
+          </p:cNvPr>
+          <p:cNvCxnSpPr>
+            <a:cxnSpLocks/>
+          </p:cNvCxnSpPr>
+          <p:nvPr/>
+        </p:nvCxnSpPr>
+        <p:spPr>
+          <a:xfrm>
+            <a:off x="11079068" y="3923103"/>
+            <a:ext cx="0" cy="330477"/>
+          </a:xfrm>
+          <a:prstGeom prst="line">
+            <a:avLst/>
+          </a:prstGeom>
+          <a:ln w="31750">
+            <a:solidFill>
+              <a:schemeClr val="accent3"/>
+            </a:solidFill>
+          </a:ln>
+        </p:spPr>
+        <p:style>
+          <a:lnRef idx="3">
+            <a:schemeClr val="dk1"/>
+          </a:lnRef>
+          <a:fillRef idx="0">
+            <a:schemeClr val="dk1"/>
+          </a:fillRef>
+          <a:effectRef idx="2">
+            <a:schemeClr val="dk1"/>
+          </a:effectRef>
+          <a:fontRef idx="minor">
+            <a:schemeClr val="tx1"/>
+          </a:fontRef>
+        </p:style>
+      </p:cxnSp>
+      <p:cxnSp>
+        <p:nvCxnSpPr>
+          <p:cNvPr id="57" name="Straight Connector 56">
+            <a:extLst>
+              <a:ext uri="{FF2B5EF4-FFF2-40B4-BE49-F238E27FC236}">
+                <a16:creationId xmlns:a16="http://schemas.microsoft.com/office/drawing/2014/main" id="{4BD64A4F-1779-1341-8851-D13523F8FB1D}"/>
+              </a:ext>
+            </a:extLst>
+          </p:cNvPr>
+          <p:cNvCxnSpPr/>
+          <p:nvPr/>
+        </p:nvCxnSpPr>
+        <p:spPr>
+          <a:xfrm>
+            <a:off x="5591979" y="4096928"/>
+            <a:ext cx="5639493" cy="0"/>
+          </a:xfrm>
+          <a:prstGeom prst="line">
+            <a:avLst/>
+          </a:prstGeom>
+          <a:ln w="53975">
+            <a:solidFill>
+              <a:schemeClr val="bg1"/>
+            </a:solidFill>
+          </a:ln>
+        </p:spPr>
+        <p:style>
+          <a:lnRef idx="1">
+            <a:schemeClr val="accent1"/>
+          </a:lnRef>
+          <a:fillRef idx="0">
+            <a:schemeClr val="accent1"/>
+          </a:fillRef>
+          <a:effectRef idx="0">
+            <a:schemeClr val="accent1"/>
+          </a:effectRef>
+          <a:fontRef idx="minor">
+            <a:schemeClr val="tx1"/>
+          </a:fontRef>
+        </p:style>
+      </p:cxnSp>
+      <p:sp>
+        <p:nvSpPr>
+          <p:cNvPr id="97" name="TextBox 96">
+            <a:extLst>
+              <a:ext uri="{FF2B5EF4-FFF2-40B4-BE49-F238E27FC236}">
+                <a16:creationId xmlns:a16="http://schemas.microsoft.com/office/drawing/2014/main" id="{B1934176-E925-C949-A540-EFB4AF18F3FF}"/>
+              </a:ext>
+            </a:extLst>
+          </p:cNvPr>
+          <p:cNvSpPr txBox="1"/>
+          <p:nvPr/>
+        </p:nvSpPr>
+        <p:spPr>
+          <a:xfrm>
+            <a:off x="5392358" y="3738437"/>
+            <a:ext cx="359394" cy="369332"/>
+          </a:xfrm>
+          <a:prstGeom prst="rect">
+            <a:avLst/>
+          </a:prstGeom>
+          <a:noFill/>
+        </p:spPr>
+        <p:txBody>
+          <a:bodyPr wrap="none" rtlCol="0">
+            <a:spAutoFit/>
+          </a:bodyPr>
+          <a:lstStyle/>
+          <a:p>
+            <a:r>
+              <a:rPr kumimoji="1" lang="en-US" altLang="zh-CN" dirty="0"/>
+              <a:t>5’</a:t>
+            </a:r>
+            <a:endParaRPr kumimoji="1" lang="zh-CN" altLang="en-US" dirty="0"/>
+          </a:p>
+        </p:txBody>
+      </p:sp>
+      <p:sp>
+        <p:nvSpPr>
+          <p:cNvPr id="100" name="TextBox 99">
+            <a:extLst>
+              <a:ext uri="{FF2B5EF4-FFF2-40B4-BE49-F238E27FC236}">
+                <a16:creationId xmlns:a16="http://schemas.microsoft.com/office/drawing/2014/main" id="{31C97CFB-A2EF-3541-82B3-BA7EB697D403}"/>
+              </a:ext>
+            </a:extLst>
+          </p:cNvPr>
+          <p:cNvSpPr txBox="1"/>
+          <p:nvPr/>
+        </p:nvSpPr>
+        <p:spPr>
+          <a:xfrm>
+            <a:off x="5392358" y="4056458"/>
+            <a:ext cx="359394" cy="369332"/>
+          </a:xfrm>
+          <a:prstGeom prst="rect">
+            <a:avLst/>
+          </a:prstGeom>
+          <a:noFill/>
+        </p:spPr>
+        <p:txBody>
+          <a:bodyPr wrap="none" rtlCol="0">
+            <a:spAutoFit/>
+          </a:bodyPr>
+          <a:lstStyle/>
+          <a:p>
+            <a:r>
+              <a:rPr kumimoji="1" lang="en-US" altLang="zh-CN" dirty="0"/>
+              <a:t>3’</a:t>
+            </a:r>
+            <a:endParaRPr kumimoji="1" lang="zh-CN" altLang="en-US" dirty="0"/>
+          </a:p>
+        </p:txBody>
+      </p:sp>
+      <p:sp>
+        <p:nvSpPr>
+          <p:cNvPr id="101" name="TextBox 100">
+            <a:extLst>
+              <a:ext uri="{FF2B5EF4-FFF2-40B4-BE49-F238E27FC236}">
+                <a16:creationId xmlns:a16="http://schemas.microsoft.com/office/drawing/2014/main" id="{FE9F1BD6-E8B0-1748-9DA6-023C5BE21998}"/>
+              </a:ext>
+            </a:extLst>
+          </p:cNvPr>
+          <p:cNvSpPr txBox="1"/>
+          <p:nvPr/>
+        </p:nvSpPr>
+        <p:spPr>
+          <a:xfrm>
+            <a:off x="11224386" y="4053307"/>
+            <a:ext cx="359394" cy="369332"/>
+          </a:xfrm>
+          <a:prstGeom prst="rect">
+            <a:avLst/>
+          </a:prstGeom>
+          <a:noFill/>
+        </p:spPr>
+        <p:txBody>
+          <a:bodyPr wrap="none" rtlCol="0">
+            <a:spAutoFit/>
+          </a:bodyPr>
+          <a:lstStyle/>
+          <a:p>
+            <a:r>
+              <a:rPr kumimoji="1" lang="en-US" altLang="zh-CN" dirty="0"/>
+              <a:t>5’</a:t>
+            </a:r>
+            <a:endParaRPr kumimoji="1" lang="zh-CN" altLang="en-US" dirty="0"/>
+          </a:p>
+        </p:txBody>
+      </p:sp>
+      <p:sp>
+        <p:nvSpPr>
+          <p:cNvPr id="102" name="TextBox 101">
+            <a:extLst>
+              <a:ext uri="{FF2B5EF4-FFF2-40B4-BE49-F238E27FC236}">
+                <a16:creationId xmlns:a16="http://schemas.microsoft.com/office/drawing/2014/main" id="{6E951A94-E629-CD40-97F0-ABB7C0E85003}"/>
+              </a:ext>
+            </a:extLst>
+          </p:cNvPr>
+          <p:cNvSpPr txBox="1"/>
+          <p:nvPr/>
+        </p:nvSpPr>
+        <p:spPr>
+          <a:xfrm>
+            <a:off x="11225499" y="3738920"/>
+            <a:ext cx="359394" cy="369332"/>
+          </a:xfrm>
+          <a:prstGeom prst="rect">
+            <a:avLst/>
+          </a:prstGeom>
+          <a:noFill/>
+        </p:spPr>
+        <p:txBody>
+          <a:bodyPr wrap="none" rtlCol="0">
+            <a:spAutoFit/>
+          </a:bodyPr>
+          <a:lstStyle/>
+          <a:p>
+            <a:r>
+              <a:rPr kumimoji="1" lang="en-US" altLang="zh-CN" dirty="0"/>
+              <a:t>3’</a:t>
+            </a:r>
+            <a:endParaRPr kumimoji="1" lang="zh-CN" altLang="en-US" dirty="0"/>
+          </a:p>
+        </p:txBody>
+      </p:sp>
+      <p:sp>
+        <p:nvSpPr>
+          <p:cNvPr id="104" name="Freeform 103">
+            <a:extLst>
+              <a:ext uri="{FF2B5EF4-FFF2-40B4-BE49-F238E27FC236}">
+                <a16:creationId xmlns:a16="http://schemas.microsoft.com/office/drawing/2014/main" id="{CFA2F973-85A9-1D4B-903E-BF119EB5F2F2}"/>
+              </a:ext>
+            </a:extLst>
+          </p:cNvPr>
+          <p:cNvSpPr/>
+          <p:nvPr/>
+        </p:nvSpPr>
+        <p:spPr>
+          <a:xfrm>
+            <a:off x="8488773" y="3823456"/>
+            <a:ext cx="739781" cy="748145"/>
+          </a:xfrm>
+          <a:custGeom>
+            <a:avLst/>
+            <a:gdLst>
+              <a:gd name="connsiteX0" fmla="*/ 86639 w 739781"/>
+              <a:gd name="connsiteY0" fmla="*/ 273132 h 748145"/>
+              <a:gd name="connsiteX1" fmla="*/ 169766 w 739781"/>
+              <a:gd name="connsiteY1" fmla="*/ 225631 h 748145"/>
+              <a:gd name="connsiteX2" fmla="*/ 205392 w 739781"/>
+              <a:gd name="connsiteY2" fmla="*/ 190005 h 748145"/>
+              <a:gd name="connsiteX3" fmla="*/ 241018 w 739781"/>
+              <a:gd name="connsiteY3" fmla="*/ 166254 h 748145"/>
+              <a:gd name="connsiteX4" fmla="*/ 264768 w 739781"/>
+              <a:gd name="connsiteY4" fmla="*/ 130628 h 748145"/>
+              <a:gd name="connsiteX5" fmla="*/ 300394 w 739781"/>
+              <a:gd name="connsiteY5" fmla="*/ 106878 h 748145"/>
+              <a:gd name="connsiteX6" fmla="*/ 383522 w 739781"/>
+              <a:gd name="connsiteY6" fmla="*/ 11875 h 748145"/>
+              <a:gd name="connsiteX7" fmla="*/ 419148 w 739781"/>
+              <a:gd name="connsiteY7" fmla="*/ 0 h 748145"/>
+              <a:gd name="connsiteX8" fmla="*/ 549776 w 739781"/>
+              <a:gd name="connsiteY8" fmla="*/ 23750 h 748145"/>
+              <a:gd name="connsiteX9" fmla="*/ 621028 w 739781"/>
+              <a:gd name="connsiteY9" fmla="*/ 71252 h 748145"/>
+              <a:gd name="connsiteX10" fmla="*/ 692280 w 739781"/>
+              <a:gd name="connsiteY10" fmla="*/ 142504 h 748145"/>
+              <a:gd name="connsiteX11" fmla="*/ 739781 w 739781"/>
+              <a:gd name="connsiteY11" fmla="*/ 213756 h 748145"/>
+              <a:gd name="connsiteX12" fmla="*/ 727906 w 739781"/>
+              <a:gd name="connsiteY12" fmla="*/ 427512 h 748145"/>
+              <a:gd name="connsiteX13" fmla="*/ 609153 w 739781"/>
+              <a:gd name="connsiteY13" fmla="*/ 546265 h 748145"/>
+              <a:gd name="connsiteX14" fmla="*/ 573527 w 739781"/>
+              <a:gd name="connsiteY14" fmla="*/ 570015 h 748145"/>
+              <a:gd name="connsiteX15" fmla="*/ 537901 w 739781"/>
+              <a:gd name="connsiteY15" fmla="*/ 593766 h 748145"/>
+              <a:gd name="connsiteX16" fmla="*/ 466649 w 739781"/>
+              <a:gd name="connsiteY16" fmla="*/ 641267 h 748145"/>
+              <a:gd name="connsiteX17" fmla="*/ 395397 w 739781"/>
+              <a:gd name="connsiteY17" fmla="*/ 688769 h 748145"/>
+              <a:gd name="connsiteX18" fmla="*/ 359771 w 739781"/>
+              <a:gd name="connsiteY18" fmla="*/ 712519 h 748145"/>
+              <a:gd name="connsiteX19" fmla="*/ 288519 w 739781"/>
+              <a:gd name="connsiteY19" fmla="*/ 736270 h 748145"/>
+              <a:gd name="connsiteX20" fmla="*/ 252893 w 739781"/>
+              <a:gd name="connsiteY20" fmla="*/ 748145 h 748145"/>
+              <a:gd name="connsiteX21" fmla="*/ 217267 w 739781"/>
+              <a:gd name="connsiteY21" fmla="*/ 736270 h 748145"/>
+              <a:gd name="connsiteX22" fmla="*/ 146015 w 739781"/>
+              <a:gd name="connsiteY22" fmla="*/ 676893 h 748145"/>
+              <a:gd name="connsiteX23" fmla="*/ 98514 w 739781"/>
+              <a:gd name="connsiteY23" fmla="*/ 605641 h 748145"/>
+              <a:gd name="connsiteX24" fmla="*/ 27262 w 739781"/>
+              <a:gd name="connsiteY24" fmla="*/ 558140 h 748145"/>
+              <a:gd name="connsiteX25" fmla="*/ 3511 w 739781"/>
+              <a:gd name="connsiteY25" fmla="*/ 522514 h 748145"/>
+              <a:gd name="connsiteX26" fmla="*/ 39137 w 739781"/>
+              <a:gd name="connsiteY26" fmla="*/ 391886 h 748145"/>
+              <a:gd name="connsiteX27" fmla="*/ 62888 w 739781"/>
+              <a:gd name="connsiteY27" fmla="*/ 320634 h 748145"/>
+              <a:gd name="connsiteX28" fmla="*/ 86639 w 739781"/>
+              <a:gd name="connsiteY28" fmla="*/ 273132 h 748145"/>
+            </a:gdLst>
+            <a:ahLst/>
+            <a:cxnLst>
+              <a:cxn ang="0">
+                <a:pos x="connsiteX0" y="connsiteY0"/>
+              </a:cxn>
+              <a:cxn ang="0">
+                <a:pos x="connsiteX1" y="connsiteY1"/>
+              </a:cxn>
+              <a:cxn ang="0">
+                <a:pos x="connsiteX2" y="connsiteY2"/>
+              </a:cxn>
+              <a:cxn ang="0">
+                <a:pos x="connsiteX3" y="connsiteY3"/>
+              </a:cxn>
+              <a:cxn ang="0">
+                <a:pos x="connsiteX4" y="connsiteY4"/>
+              </a:cxn>
+              <a:cxn ang="0">
+                <a:pos x="connsiteX5" y="connsiteY5"/>
+              </a:cxn>
+              <a:cxn ang="0">
+                <a:pos x="connsiteX6" y="connsiteY6"/>
+              </a:cxn>
+              <a:cxn ang="0">
+                <a:pos x="connsiteX7" y="connsiteY7"/>
+              </a:cxn>
+              <a:cxn ang="0">
+                <a:pos x="connsiteX8" y="connsiteY8"/>
+              </a:cxn>
+              <a:cxn ang="0">
+                <a:pos x="connsiteX9" y="connsiteY9"/>
+              </a:cxn>
+              <a:cxn ang="0">
+                <a:pos x="connsiteX10" y="connsiteY10"/>
+              </a:cxn>
+              <a:cxn ang="0">
+                <a:pos x="connsiteX11" y="connsiteY11"/>
+              </a:cxn>
+              <a:cxn ang="0">
+                <a:pos x="connsiteX12" y="connsiteY12"/>
+              </a:cxn>
+              <a:cxn ang="0">
+                <a:pos x="connsiteX13" y="connsiteY13"/>
+              </a:cxn>
+              <a:cxn ang="0">
+                <a:pos x="connsiteX14" y="connsiteY14"/>
+              </a:cxn>
+              <a:cxn ang="0">
+                <a:pos x="connsiteX15" y="connsiteY15"/>
+              </a:cxn>
+              <a:cxn ang="0">
+                <a:pos x="connsiteX16" y="connsiteY16"/>
+              </a:cxn>
+              <a:cxn ang="0">
+                <a:pos x="connsiteX17" y="connsiteY17"/>
+              </a:cxn>
+              <a:cxn ang="0">
+                <a:pos x="connsiteX18" y="connsiteY18"/>
+              </a:cxn>
+              <a:cxn ang="0">
+                <a:pos x="connsiteX19" y="connsiteY19"/>
+              </a:cxn>
+              <a:cxn ang="0">
+                <a:pos x="connsiteX20" y="connsiteY20"/>
+              </a:cxn>
+              <a:cxn ang="0">
+                <a:pos x="connsiteX21" y="connsiteY21"/>
+              </a:cxn>
+              <a:cxn ang="0">
+                <a:pos x="connsiteX22" y="connsiteY22"/>
+              </a:cxn>
+              <a:cxn ang="0">
+                <a:pos x="connsiteX23" y="connsiteY23"/>
+              </a:cxn>
+              <a:cxn ang="0">
+                <a:pos x="connsiteX24" y="connsiteY24"/>
+              </a:cxn>
+              <a:cxn ang="0">
+                <a:pos x="connsiteX25" y="connsiteY25"/>
+              </a:cxn>
+              <a:cxn ang="0">
+                <a:pos x="connsiteX26" y="connsiteY26"/>
+              </a:cxn>
+              <a:cxn ang="0">
+                <a:pos x="connsiteX27" y="connsiteY27"/>
+              </a:cxn>
+              <a:cxn ang="0">
+                <a:pos x="connsiteX28" y="connsiteY28"/>
+              </a:cxn>
+            </a:cxnLst>
+            <a:rect l="l" t="t" r="r" b="b"/>
+            <a:pathLst>
+              <a:path w="739781" h="748145">
+                <a:moveTo>
+                  <a:pt x="86639" y="273132"/>
+                </a:moveTo>
+                <a:cubicBezTo>
+                  <a:pt x="114348" y="257298"/>
+                  <a:pt x="143621" y="243932"/>
+                  <a:pt x="169766" y="225631"/>
+                </a:cubicBezTo>
+                <a:cubicBezTo>
+                  <a:pt x="183524" y="216000"/>
+                  <a:pt x="192490" y="200756"/>
+                  <a:pt x="205392" y="190005"/>
+                </a:cubicBezTo>
+                <a:cubicBezTo>
+                  <a:pt x="216356" y="180868"/>
+                  <a:pt x="229143" y="174171"/>
+                  <a:pt x="241018" y="166254"/>
+                </a:cubicBezTo>
+                <a:cubicBezTo>
+                  <a:pt x="248935" y="154379"/>
+                  <a:pt x="254676" y="140720"/>
+                  <a:pt x="264768" y="130628"/>
+                </a:cubicBezTo>
+                <a:cubicBezTo>
+                  <a:pt x="274860" y="120536"/>
+                  <a:pt x="290996" y="117619"/>
+                  <a:pt x="300394" y="106878"/>
+                </a:cubicBezTo>
+                <a:cubicBezTo>
+                  <a:pt x="355811" y="43545"/>
+                  <a:pt x="324146" y="41563"/>
+                  <a:pt x="383522" y="11875"/>
+                </a:cubicBezTo>
+                <a:cubicBezTo>
+                  <a:pt x="394718" y="6277"/>
+                  <a:pt x="407273" y="3958"/>
+                  <a:pt x="419148" y="0"/>
+                </a:cubicBezTo>
+                <a:cubicBezTo>
+                  <a:pt x="423174" y="503"/>
+                  <a:pt x="524430" y="6853"/>
+                  <a:pt x="549776" y="23750"/>
+                </a:cubicBezTo>
+                <a:cubicBezTo>
+                  <a:pt x="638735" y="83055"/>
+                  <a:pt x="536315" y="43013"/>
+                  <a:pt x="621028" y="71252"/>
+                </a:cubicBezTo>
+                <a:cubicBezTo>
+                  <a:pt x="644779" y="95003"/>
+                  <a:pt x="673649" y="114557"/>
+                  <a:pt x="692280" y="142504"/>
+                </a:cubicBezTo>
+                <a:lnTo>
+                  <a:pt x="739781" y="213756"/>
+                </a:lnTo>
+                <a:cubicBezTo>
+                  <a:pt x="735823" y="285008"/>
+                  <a:pt x="742460" y="357650"/>
+                  <a:pt x="727906" y="427512"/>
+                </a:cubicBezTo>
+                <a:cubicBezTo>
+                  <a:pt x="715137" y="488802"/>
+                  <a:pt x="653588" y="516642"/>
+                  <a:pt x="609153" y="546265"/>
+                </a:cubicBezTo>
+                <a:lnTo>
+                  <a:pt x="573527" y="570015"/>
+                </a:lnTo>
+                <a:cubicBezTo>
+                  <a:pt x="561652" y="577932"/>
+                  <a:pt x="547993" y="583674"/>
+                  <a:pt x="537901" y="593766"/>
+                </a:cubicBezTo>
+                <a:cubicBezTo>
+                  <a:pt x="493424" y="638243"/>
+                  <a:pt x="518207" y="624081"/>
+                  <a:pt x="466649" y="641267"/>
+                </a:cubicBezTo>
+                <a:lnTo>
+                  <a:pt x="395397" y="688769"/>
+                </a:lnTo>
+                <a:cubicBezTo>
+                  <a:pt x="383522" y="696686"/>
+                  <a:pt x="373311" y="708006"/>
+                  <a:pt x="359771" y="712519"/>
+                </a:cubicBezTo>
+                <a:lnTo>
+                  <a:pt x="288519" y="736270"/>
+                </a:lnTo>
+                <a:lnTo>
+                  <a:pt x="252893" y="748145"/>
+                </a:lnTo>
+                <a:cubicBezTo>
+                  <a:pt x="241018" y="744187"/>
+                  <a:pt x="228463" y="741868"/>
+                  <a:pt x="217267" y="736270"/>
+                </a:cubicBezTo>
+                <a:cubicBezTo>
+                  <a:pt x="192318" y="723795"/>
+                  <a:pt x="162727" y="698380"/>
+                  <a:pt x="146015" y="676893"/>
+                </a:cubicBezTo>
+                <a:cubicBezTo>
+                  <a:pt x="128490" y="654361"/>
+                  <a:pt x="122265" y="621475"/>
+                  <a:pt x="98514" y="605641"/>
+                </a:cubicBezTo>
+                <a:lnTo>
+                  <a:pt x="27262" y="558140"/>
+                </a:lnTo>
+                <a:cubicBezTo>
+                  <a:pt x="19345" y="546265"/>
+                  <a:pt x="4803" y="536728"/>
+                  <a:pt x="3511" y="522514"/>
+                </a:cubicBezTo>
+                <a:cubicBezTo>
+                  <a:pt x="-7657" y="399667"/>
+                  <a:pt x="8782" y="460185"/>
+                  <a:pt x="39137" y="391886"/>
+                </a:cubicBezTo>
+                <a:cubicBezTo>
+                  <a:pt x="49305" y="369008"/>
+                  <a:pt x="54971" y="344385"/>
+                  <a:pt x="62888" y="320634"/>
+                </a:cubicBezTo>
+                <a:lnTo>
+                  <a:pt x="86639" y="273132"/>
+                </a:lnTo>
+                <a:close/>
+              </a:path>
+            </a:pathLst>
+          </a:custGeom>
+          <a:solidFill>
+            <a:schemeClr val="accent2"/>
+          </a:solidFill>
+          <a:ln w="19050">
+            <a:solidFill>
+              <a:schemeClr val="tx1"/>
+            </a:solidFill>
+          </a:ln>
+        </p:spPr>
+        <p:style>
+          <a:lnRef idx="2">
+            <a:schemeClr val="accent1">
+              <a:shade val="50000"/>
+            </a:schemeClr>
+          </a:lnRef>
+          <a:fillRef idx="1">
+            <a:schemeClr val="accent1"/>
+          </a:fillRef>
+          <a:effectRef idx="0">
+            <a:schemeClr val="accent1"/>
+          </a:effectRef>
+          <a:fontRef idx="minor">
+            <a:schemeClr val="lt1"/>
+          </a:fontRef>
+        </p:style>
+        <p:txBody>
+          <a:bodyPr rtlCol="0" anchor="ctr"/>
+          <a:lstStyle/>
+          <a:p>
+            <a:pPr algn="ctr"/>
+            <a:r>
+              <a:rPr kumimoji="1" lang="en-US" altLang="zh-CN" dirty="0" err="1"/>
+              <a:t>FokI</a:t>
+            </a:r>
+            <a:endParaRPr kumimoji="1" lang="zh-CN" altLang="en-US" dirty="0"/>
+          </a:p>
+        </p:txBody>
+      </p:sp>
+      <p:sp>
+        <p:nvSpPr>
+          <p:cNvPr id="114" name="Freeform 113">
+            <a:extLst>
+              <a:ext uri="{FF2B5EF4-FFF2-40B4-BE49-F238E27FC236}">
+                <a16:creationId xmlns:a16="http://schemas.microsoft.com/office/drawing/2014/main" id="{3966A459-F40C-F045-B5DA-70AF602C9481}"/>
+              </a:ext>
+            </a:extLst>
+          </p:cNvPr>
+          <p:cNvSpPr/>
+          <p:nvPr/>
+        </p:nvSpPr>
+        <p:spPr>
+          <a:xfrm>
+            <a:off x="6706367" y="4338706"/>
+            <a:ext cx="329689" cy="308788"/>
+          </a:xfrm>
+          <a:custGeom>
+            <a:avLst/>
+            <a:gdLst>
+              <a:gd name="connsiteX0" fmla="*/ 20930 w 329689"/>
+              <a:gd name="connsiteY0" fmla="*/ 59407 h 308788"/>
+              <a:gd name="connsiteX1" fmla="*/ 104057 w 329689"/>
+              <a:gd name="connsiteY1" fmla="*/ 11905 h 308788"/>
+              <a:gd name="connsiteX2" fmla="*/ 270312 w 329689"/>
+              <a:gd name="connsiteY2" fmla="*/ 11905 h 308788"/>
+              <a:gd name="connsiteX3" fmla="*/ 305938 w 329689"/>
+              <a:gd name="connsiteY3" fmla="*/ 47531 h 308788"/>
+              <a:gd name="connsiteX4" fmla="*/ 329689 w 329689"/>
+              <a:gd name="connsiteY4" fmla="*/ 118783 h 308788"/>
+              <a:gd name="connsiteX5" fmla="*/ 317813 w 329689"/>
+              <a:gd name="connsiteY5" fmla="*/ 249412 h 308788"/>
+              <a:gd name="connsiteX6" fmla="*/ 282187 w 329689"/>
+              <a:gd name="connsiteY6" fmla="*/ 261287 h 308788"/>
+              <a:gd name="connsiteX7" fmla="*/ 246561 w 329689"/>
+              <a:gd name="connsiteY7" fmla="*/ 285038 h 308788"/>
+              <a:gd name="connsiteX8" fmla="*/ 163434 w 329689"/>
+              <a:gd name="connsiteY8" fmla="*/ 308788 h 308788"/>
+              <a:gd name="connsiteX9" fmla="*/ 68432 w 329689"/>
+              <a:gd name="connsiteY9" fmla="*/ 296913 h 308788"/>
+              <a:gd name="connsiteX10" fmla="*/ 32806 w 329689"/>
+              <a:gd name="connsiteY10" fmla="*/ 261287 h 308788"/>
+              <a:gd name="connsiteX11" fmla="*/ 9055 w 329689"/>
+              <a:gd name="connsiteY11" fmla="*/ 190035 h 308788"/>
+              <a:gd name="connsiteX12" fmla="*/ 20930 w 329689"/>
+              <a:gd name="connsiteY12" fmla="*/ 59407 h 308788"/>
+            </a:gdLst>
+            <a:ahLst/>
+            <a:cxnLst>
+              <a:cxn ang="0">
+                <a:pos x="connsiteX0" y="connsiteY0"/>
+              </a:cxn>
+              <a:cxn ang="0">
+                <a:pos x="connsiteX1" y="connsiteY1"/>
+              </a:cxn>
+              <a:cxn ang="0">
+                <a:pos x="connsiteX2" y="connsiteY2"/>
+              </a:cxn>
+              <a:cxn ang="0">
+                <a:pos x="connsiteX3" y="connsiteY3"/>
+              </a:cxn>
+              <a:cxn ang="0">
+                <a:pos x="connsiteX4" y="connsiteY4"/>
+              </a:cxn>
+              <a:cxn ang="0">
+                <a:pos x="connsiteX5" y="connsiteY5"/>
+              </a:cxn>
+              <a:cxn ang="0">
+                <a:pos x="connsiteX6" y="connsiteY6"/>
+              </a:cxn>
+              <a:cxn ang="0">
+                <a:pos x="connsiteX7" y="connsiteY7"/>
+              </a:cxn>
+              <a:cxn ang="0">
+                <a:pos x="connsiteX8" y="connsiteY8"/>
+              </a:cxn>
+              <a:cxn ang="0">
+                <a:pos x="connsiteX9" y="connsiteY9"/>
+              </a:cxn>
+              <a:cxn ang="0">
+                <a:pos x="connsiteX10" y="connsiteY10"/>
+              </a:cxn>
+              <a:cxn ang="0">
+                <a:pos x="connsiteX11" y="connsiteY11"/>
+              </a:cxn>
+              <a:cxn ang="0">
+                <a:pos x="connsiteX12" y="connsiteY12"/>
+              </a:cxn>
+            </a:cxnLst>
+            <a:rect l="l" t="t" r="r" b="b"/>
+            <a:pathLst>
+              <a:path w="329689" h="308788">
+                <a:moveTo>
+                  <a:pt x="20930" y="59407"/>
+                </a:moveTo>
+                <a:cubicBezTo>
+                  <a:pt x="36764" y="29719"/>
+                  <a:pt x="74598" y="24180"/>
+                  <a:pt x="104057" y="11905"/>
+                </a:cubicBezTo>
+                <a:cubicBezTo>
+                  <a:pt x="159776" y="-11311"/>
+                  <a:pt x="212291" y="5458"/>
+                  <a:pt x="270312" y="11905"/>
+                </a:cubicBezTo>
+                <a:cubicBezTo>
+                  <a:pt x="282187" y="23780"/>
+                  <a:pt x="297782" y="32850"/>
+                  <a:pt x="305938" y="47531"/>
+                </a:cubicBezTo>
+                <a:cubicBezTo>
+                  <a:pt x="318096" y="69416"/>
+                  <a:pt x="329689" y="118783"/>
+                  <a:pt x="329689" y="118783"/>
+                </a:cubicBezTo>
+                <a:cubicBezTo>
+                  <a:pt x="325730" y="162326"/>
+                  <a:pt x="331639" y="207933"/>
+                  <a:pt x="317813" y="249412"/>
+                </a:cubicBezTo>
+                <a:cubicBezTo>
+                  <a:pt x="313855" y="261287"/>
+                  <a:pt x="293383" y="255689"/>
+                  <a:pt x="282187" y="261287"/>
+                </a:cubicBezTo>
+                <a:cubicBezTo>
+                  <a:pt x="269421" y="267670"/>
+                  <a:pt x="259327" y="278655"/>
+                  <a:pt x="246561" y="285038"/>
+                </a:cubicBezTo>
+                <a:cubicBezTo>
+                  <a:pt x="229526" y="293556"/>
+                  <a:pt x="178652" y="304984"/>
+                  <a:pt x="163434" y="308788"/>
+                </a:cubicBezTo>
+                <a:cubicBezTo>
+                  <a:pt x="131767" y="304830"/>
+                  <a:pt x="98424" y="307819"/>
+                  <a:pt x="68432" y="296913"/>
+                </a:cubicBezTo>
+                <a:cubicBezTo>
+                  <a:pt x="52649" y="291174"/>
+                  <a:pt x="40962" y="275968"/>
+                  <a:pt x="32806" y="261287"/>
+                </a:cubicBezTo>
+                <a:cubicBezTo>
+                  <a:pt x="20648" y="239402"/>
+                  <a:pt x="16972" y="213786"/>
+                  <a:pt x="9055" y="190035"/>
+                </a:cubicBezTo>
+                <a:cubicBezTo>
+                  <a:pt x="-10330" y="131879"/>
+                  <a:pt x="5096" y="89095"/>
+                  <a:pt x="20930" y="59407"/>
+                </a:cubicBezTo>
+                <a:close/>
+              </a:path>
+            </a:pathLst>
+          </a:custGeom>
+          <a:solidFill>
+            <a:schemeClr val="accent5"/>
+          </a:solidFill>
+          <a:ln w="19050">
+            <a:solidFill>
+              <a:schemeClr val="tx1"/>
+            </a:solidFill>
+          </a:ln>
+        </p:spPr>
+        <p:style>
+          <a:lnRef idx="2">
+            <a:schemeClr val="accent1">
+              <a:shade val="50000"/>
+            </a:schemeClr>
+          </a:lnRef>
+          <a:fillRef idx="1">
+            <a:schemeClr val="accent1"/>
+          </a:fillRef>
+          <a:effectRef idx="0">
+            <a:schemeClr val="accent1"/>
+          </a:effectRef>
+          <a:fontRef idx="minor">
+            <a:schemeClr val="lt1"/>
+          </a:fontRef>
+        </p:style>
+        <p:txBody>
+          <a:bodyPr rtlCol="0" anchor="ctr"/>
+          <a:lstStyle/>
+          <a:p>
+            <a:pPr algn="ctr"/>
+            <a:r>
+              <a:rPr kumimoji="1" lang="en-US" altLang="zh-CN" dirty="0"/>
+              <a:t>F</a:t>
+            </a:r>
+            <a:endParaRPr kumimoji="1" lang="zh-CN" altLang="en-US" sz="2000" dirty="0"/>
+          </a:p>
+        </p:txBody>
+      </p:sp>
+      <p:sp>
+        <p:nvSpPr>
+          <p:cNvPr id="115" name="Freeform 114">
+            <a:extLst>
+              <a:ext uri="{FF2B5EF4-FFF2-40B4-BE49-F238E27FC236}">
+                <a16:creationId xmlns:a16="http://schemas.microsoft.com/office/drawing/2014/main" id="{FFAEDE10-DBAC-4741-B154-FA0EAA78581B}"/>
+              </a:ext>
+            </a:extLst>
+          </p:cNvPr>
+          <p:cNvSpPr/>
+          <p:nvPr/>
+        </p:nvSpPr>
+        <p:spPr>
+          <a:xfrm>
+            <a:off x="7116815" y="4325246"/>
+            <a:ext cx="329689" cy="308788"/>
+          </a:xfrm>
+          <a:custGeom>
+            <a:avLst/>
+            <a:gdLst>
+              <a:gd name="connsiteX0" fmla="*/ 20930 w 329689"/>
+              <a:gd name="connsiteY0" fmla="*/ 59407 h 308788"/>
+              <a:gd name="connsiteX1" fmla="*/ 104057 w 329689"/>
+              <a:gd name="connsiteY1" fmla="*/ 11905 h 308788"/>
+              <a:gd name="connsiteX2" fmla="*/ 270312 w 329689"/>
+              <a:gd name="connsiteY2" fmla="*/ 11905 h 308788"/>
+              <a:gd name="connsiteX3" fmla="*/ 305938 w 329689"/>
+              <a:gd name="connsiteY3" fmla="*/ 47531 h 308788"/>
+              <a:gd name="connsiteX4" fmla="*/ 329689 w 329689"/>
+              <a:gd name="connsiteY4" fmla="*/ 118783 h 308788"/>
+              <a:gd name="connsiteX5" fmla="*/ 317813 w 329689"/>
+              <a:gd name="connsiteY5" fmla="*/ 249412 h 308788"/>
+              <a:gd name="connsiteX6" fmla="*/ 282187 w 329689"/>
+              <a:gd name="connsiteY6" fmla="*/ 261287 h 308788"/>
+              <a:gd name="connsiteX7" fmla="*/ 246561 w 329689"/>
+              <a:gd name="connsiteY7" fmla="*/ 285038 h 308788"/>
+              <a:gd name="connsiteX8" fmla="*/ 163434 w 329689"/>
+              <a:gd name="connsiteY8" fmla="*/ 308788 h 308788"/>
+              <a:gd name="connsiteX9" fmla="*/ 68432 w 329689"/>
+              <a:gd name="connsiteY9" fmla="*/ 296913 h 308788"/>
+              <a:gd name="connsiteX10" fmla="*/ 32806 w 329689"/>
+              <a:gd name="connsiteY10" fmla="*/ 261287 h 308788"/>
+              <a:gd name="connsiteX11" fmla="*/ 9055 w 329689"/>
+              <a:gd name="connsiteY11" fmla="*/ 190035 h 308788"/>
+              <a:gd name="connsiteX12" fmla="*/ 20930 w 329689"/>
+              <a:gd name="connsiteY12" fmla="*/ 59407 h 308788"/>
+            </a:gdLst>
+            <a:ahLst/>
+            <a:cxnLst>
+              <a:cxn ang="0">
+                <a:pos x="connsiteX0" y="connsiteY0"/>
+              </a:cxn>
+              <a:cxn ang="0">
+                <a:pos x="connsiteX1" y="connsiteY1"/>
+              </a:cxn>
+              <a:cxn ang="0">
+                <a:pos x="connsiteX2" y="connsiteY2"/>
+              </a:cxn>
+              <a:cxn ang="0">
+                <a:pos x="connsiteX3" y="connsiteY3"/>
+              </a:cxn>
+              <a:cxn ang="0">
+                <a:pos x="connsiteX4" y="connsiteY4"/>
+              </a:cxn>
+              <a:cxn ang="0">
+                <a:pos x="connsiteX5" y="connsiteY5"/>
+              </a:cxn>
+              <a:cxn ang="0">
+                <a:pos x="connsiteX6" y="connsiteY6"/>
+              </a:cxn>
+              <a:cxn ang="0">
+                <a:pos x="connsiteX7" y="connsiteY7"/>
+              </a:cxn>
+              <a:cxn ang="0">
+                <a:pos x="connsiteX8" y="connsiteY8"/>
+              </a:cxn>
+              <a:cxn ang="0">
+                <a:pos x="connsiteX9" y="connsiteY9"/>
+              </a:cxn>
+              <a:cxn ang="0">
+                <a:pos x="connsiteX10" y="connsiteY10"/>
+              </a:cxn>
+              <a:cxn ang="0">
+                <a:pos x="connsiteX11" y="connsiteY11"/>
+              </a:cxn>
+              <a:cxn ang="0">
+                <a:pos x="connsiteX12" y="connsiteY12"/>
+              </a:cxn>
+            </a:cxnLst>
+            <a:rect l="l" t="t" r="r" b="b"/>
+            <a:pathLst>
+              <a:path w="329689" h="308788">
+                <a:moveTo>
+                  <a:pt x="20930" y="59407"/>
+                </a:moveTo>
+                <a:cubicBezTo>
+                  <a:pt x="36764" y="29719"/>
+                  <a:pt x="74598" y="24180"/>
+                  <a:pt x="104057" y="11905"/>
+                </a:cubicBezTo>
+                <a:cubicBezTo>
+                  <a:pt x="159776" y="-11311"/>
+                  <a:pt x="212291" y="5458"/>
+                  <a:pt x="270312" y="11905"/>
+                </a:cubicBezTo>
+                <a:cubicBezTo>
+                  <a:pt x="282187" y="23780"/>
+                  <a:pt x="297782" y="32850"/>
+                  <a:pt x="305938" y="47531"/>
+                </a:cubicBezTo>
+                <a:cubicBezTo>
+                  <a:pt x="318096" y="69416"/>
+                  <a:pt x="329689" y="118783"/>
+                  <a:pt x="329689" y="118783"/>
+                </a:cubicBezTo>
+                <a:cubicBezTo>
+                  <a:pt x="325730" y="162326"/>
+                  <a:pt x="331639" y="207933"/>
+                  <a:pt x="317813" y="249412"/>
+                </a:cubicBezTo>
+                <a:cubicBezTo>
+                  <a:pt x="313855" y="261287"/>
+                  <a:pt x="293383" y="255689"/>
+                  <a:pt x="282187" y="261287"/>
+                </a:cubicBezTo>
+                <a:cubicBezTo>
+                  <a:pt x="269421" y="267670"/>
+                  <a:pt x="259327" y="278655"/>
+                  <a:pt x="246561" y="285038"/>
+                </a:cubicBezTo>
+                <a:cubicBezTo>
+                  <a:pt x="229526" y="293556"/>
+                  <a:pt x="178652" y="304984"/>
+                  <a:pt x="163434" y="308788"/>
+                </a:cubicBezTo>
+                <a:cubicBezTo>
+                  <a:pt x="131767" y="304830"/>
+                  <a:pt x="98424" y="307819"/>
+                  <a:pt x="68432" y="296913"/>
+                </a:cubicBezTo>
+                <a:cubicBezTo>
+                  <a:pt x="52649" y="291174"/>
+                  <a:pt x="40962" y="275968"/>
+                  <a:pt x="32806" y="261287"/>
+                </a:cubicBezTo>
+                <a:cubicBezTo>
+                  <a:pt x="20648" y="239402"/>
+                  <a:pt x="16972" y="213786"/>
+                  <a:pt x="9055" y="190035"/>
+                </a:cubicBezTo>
+                <a:cubicBezTo>
+                  <a:pt x="-10330" y="131879"/>
+                  <a:pt x="5096" y="89095"/>
+                  <a:pt x="20930" y="59407"/>
+                </a:cubicBezTo>
+                <a:close/>
+              </a:path>
+            </a:pathLst>
+          </a:custGeom>
+          <a:solidFill>
+            <a:schemeClr val="accent1">
+              <a:lumMod val="20000"/>
+              <a:lumOff val="80000"/>
+            </a:schemeClr>
+          </a:solidFill>
+          <a:ln w="19050">
+            <a:solidFill>
+              <a:schemeClr val="tx1"/>
+            </a:solidFill>
+          </a:ln>
+        </p:spPr>
+        <p:style>
+          <a:lnRef idx="2">
+            <a:schemeClr val="accent1">
+              <a:shade val="50000"/>
+            </a:schemeClr>
+          </a:lnRef>
+          <a:fillRef idx="1">
+            <a:schemeClr val="accent1"/>
+          </a:fillRef>
+          <a:effectRef idx="0">
+            <a:schemeClr val="accent1"/>
+          </a:effectRef>
+          <a:fontRef idx="minor">
+            <a:schemeClr val="lt1"/>
+          </a:fontRef>
+        </p:style>
+        <p:txBody>
+          <a:bodyPr rtlCol="0" anchor="ctr"/>
+          <a:lstStyle/>
+          <a:p>
+            <a:pPr algn="ctr"/>
+            <a:r>
+              <a:rPr kumimoji="1" lang="en-US" altLang="zh-CN" dirty="0"/>
+              <a:t>F</a:t>
+            </a:r>
+            <a:endParaRPr kumimoji="1" lang="zh-CN" altLang="en-US" sz="2000" dirty="0"/>
+          </a:p>
+        </p:txBody>
+      </p:sp>
+      <p:sp>
+        <p:nvSpPr>
+          <p:cNvPr id="116" name="Freeform 115">
+            <a:extLst>
+              <a:ext uri="{FF2B5EF4-FFF2-40B4-BE49-F238E27FC236}">
+                <a16:creationId xmlns:a16="http://schemas.microsoft.com/office/drawing/2014/main" id="{5325F4D9-B558-9B4B-AFE8-4C5BF145B226}"/>
+              </a:ext>
+            </a:extLst>
+          </p:cNvPr>
+          <p:cNvSpPr/>
+          <p:nvPr/>
+        </p:nvSpPr>
+        <p:spPr>
+          <a:xfrm>
+            <a:off x="7536180" y="4326814"/>
+            <a:ext cx="329689" cy="308788"/>
+          </a:xfrm>
+          <a:custGeom>
+            <a:avLst/>
+            <a:gdLst>
+              <a:gd name="connsiteX0" fmla="*/ 20930 w 329689"/>
+              <a:gd name="connsiteY0" fmla="*/ 59407 h 308788"/>
+              <a:gd name="connsiteX1" fmla="*/ 104057 w 329689"/>
+              <a:gd name="connsiteY1" fmla="*/ 11905 h 308788"/>
+              <a:gd name="connsiteX2" fmla="*/ 270312 w 329689"/>
+              <a:gd name="connsiteY2" fmla="*/ 11905 h 308788"/>
+              <a:gd name="connsiteX3" fmla="*/ 305938 w 329689"/>
+              <a:gd name="connsiteY3" fmla="*/ 47531 h 308788"/>
+              <a:gd name="connsiteX4" fmla="*/ 329689 w 329689"/>
+              <a:gd name="connsiteY4" fmla="*/ 118783 h 308788"/>
+              <a:gd name="connsiteX5" fmla="*/ 317813 w 329689"/>
+              <a:gd name="connsiteY5" fmla="*/ 249412 h 308788"/>
+              <a:gd name="connsiteX6" fmla="*/ 282187 w 329689"/>
+              <a:gd name="connsiteY6" fmla="*/ 261287 h 308788"/>
+              <a:gd name="connsiteX7" fmla="*/ 246561 w 329689"/>
+              <a:gd name="connsiteY7" fmla="*/ 285038 h 308788"/>
+              <a:gd name="connsiteX8" fmla="*/ 163434 w 329689"/>
+              <a:gd name="connsiteY8" fmla="*/ 308788 h 308788"/>
+              <a:gd name="connsiteX9" fmla="*/ 68432 w 329689"/>
+              <a:gd name="connsiteY9" fmla="*/ 296913 h 308788"/>
+              <a:gd name="connsiteX10" fmla="*/ 32806 w 329689"/>
+              <a:gd name="connsiteY10" fmla="*/ 261287 h 308788"/>
+              <a:gd name="connsiteX11" fmla="*/ 9055 w 329689"/>
+              <a:gd name="connsiteY11" fmla="*/ 190035 h 308788"/>
+              <a:gd name="connsiteX12" fmla="*/ 20930 w 329689"/>
+              <a:gd name="connsiteY12" fmla="*/ 59407 h 308788"/>
+            </a:gdLst>
+            <a:ahLst/>
+            <a:cxnLst>
+              <a:cxn ang="0">
+                <a:pos x="connsiteX0" y="connsiteY0"/>
+              </a:cxn>
+              <a:cxn ang="0">
+                <a:pos x="connsiteX1" y="connsiteY1"/>
+              </a:cxn>
+              <a:cxn ang="0">
+                <a:pos x="connsiteX2" y="connsiteY2"/>
+              </a:cxn>
+              <a:cxn ang="0">
+                <a:pos x="connsiteX3" y="connsiteY3"/>
+              </a:cxn>
+              <a:cxn ang="0">
+                <a:pos x="connsiteX4" y="connsiteY4"/>
+              </a:cxn>
+              <a:cxn ang="0">
+                <a:pos x="connsiteX5" y="connsiteY5"/>
+              </a:cxn>
+              <a:cxn ang="0">
+                <a:pos x="connsiteX6" y="connsiteY6"/>
+              </a:cxn>
+              <a:cxn ang="0">
+                <a:pos x="connsiteX7" y="connsiteY7"/>
+              </a:cxn>
+              <a:cxn ang="0">
+                <a:pos x="connsiteX8" y="connsiteY8"/>
+              </a:cxn>
+              <a:cxn ang="0">
+                <a:pos x="connsiteX9" y="connsiteY9"/>
+              </a:cxn>
+              <a:cxn ang="0">
+                <a:pos x="connsiteX10" y="connsiteY10"/>
+              </a:cxn>
+              <a:cxn ang="0">
+                <a:pos x="connsiteX11" y="connsiteY11"/>
+              </a:cxn>
+              <a:cxn ang="0">
+                <a:pos x="connsiteX12" y="connsiteY12"/>
+              </a:cxn>
+            </a:cxnLst>
+            <a:rect l="l" t="t" r="r" b="b"/>
+            <a:pathLst>
+              <a:path w="329689" h="308788">
+                <a:moveTo>
+                  <a:pt x="20930" y="59407"/>
+                </a:moveTo>
+                <a:cubicBezTo>
+                  <a:pt x="36764" y="29719"/>
+                  <a:pt x="74598" y="24180"/>
+                  <a:pt x="104057" y="11905"/>
+                </a:cubicBezTo>
+                <a:cubicBezTo>
+                  <a:pt x="159776" y="-11311"/>
+                  <a:pt x="212291" y="5458"/>
+                  <a:pt x="270312" y="11905"/>
+                </a:cubicBezTo>
+                <a:cubicBezTo>
+                  <a:pt x="282187" y="23780"/>
+                  <a:pt x="297782" y="32850"/>
+                  <a:pt x="305938" y="47531"/>
+                </a:cubicBezTo>
+                <a:cubicBezTo>
+                  <a:pt x="318096" y="69416"/>
+                  <a:pt x="329689" y="118783"/>
+                  <a:pt x="329689" y="118783"/>
+                </a:cubicBezTo>
+                <a:cubicBezTo>
+                  <a:pt x="325730" y="162326"/>
+                  <a:pt x="331639" y="207933"/>
+                  <a:pt x="317813" y="249412"/>
+                </a:cubicBezTo>
+                <a:cubicBezTo>
+                  <a:pt x="313855" y="261287"/>
+                  <a:pt x="293383" y="255689"/>
+                  <a:pt x="282187" y="261287"/>
+                </a:cubicBezTo>
+                <a:cubicBezTo>
+                  <a:pt x="269421" y="267670"/>
+                  <a:pt x="259327" y="278655"/>
+                  <a:pt x="246561" y="285038"/>
+                </a:cubicBezTo>
+                <a:cubicBezTo>
+                  <a:pt x="229526" y="293556"/>
+                  <a:pt x="178652" y="304984"/>
+                  <a:pt x="163434" y="308788"/>
+                </a:cubicBezTo>
+                <a:cubicBezTo>
+                  <a:pt x="131767" y="304830"/>
+                  <a:pt x="98424" y="307819"/>
+                  <a:pt x="68432" y="296913"/>
+                </a:cubicBezTo>
+                <a:cubicBezTo>
+                  <a:pt x="52649" y="291174"/>
+                  <a:pt x="40962" y="275968"/>
+                  <a:pt x="32806" y="261287"/>
+                </a:cubicBezTo>
+                <a:cubicBezTo>
+                  <a:pt x="20648" y="239402"/>
+                  <a:pt x="16972" y="213786"/>
+                  <a:pt x="9055" y="190035"/>
+                </a:cubicBezTo>
+                <a:cubicBezTo>
+                  <a:pt x="-10330" y="131879"/>
+                  <a:pt x="5096" y="89095"/>
+                  <a:pt x="20930" y="59407"/>
+                </a:cubicBezTo>
+                <a:close/>
+              </a:path>
+            </a:pathLst>
+          </a:custGeom>
+          <a:solidFill>
+            <a:schemeClr val="accent1">
+              <a:lumMod val="60000"/>
+              <a:lumOff val="40000"/>
+            </a:schemeClr>
+          </a:solidFill>
+          <a:ln w="19050">
+            <a:solidFill>
+              <a:schemeClr val="tx1"/>
+            </a:solidFill>
+          </a:ln>
+        </p:spPr>
+        <p:style>
+          <a:lnRef idx="2">
+            <a:schemeClr val="accent1">
+              <a:shade val="50000"/>
+            </a:schemeClr>
+          </a:lnRef>
+          <a:fillRef idx="1">
+            <a:schemeClr val="accent1"/>
+          </a:fillRef>
+          <a:effectRef idx="0">
+            <a:schemeClr val="accent1"/>
+          </a:effectRef>
+          <a:fontRef idx="minor">
+            <a:schemeClr val="lt1"/>
+          </a:fontRef>
+        </p:style>
+        <p:txBody>
+          <a:bodyPr rtlCol="0" anchor="ctr"/>
+          <a:lstStyle/>
+          <a:p>
+            <a:pPr algn="ctr"/>
+            <a:r>
+              <a:rPr kumimoji="1" lang="en-US" altLang="zh-CN" dirty="0"/>
+              <a:t>F</a:t>
+            </a:r>
+            <a:endParaRPr kumimoji="1" lang="zh-CN" altLang="en-US" sz="2000" dirty="0"/>
+          </a:p>
+        </p:txBody>
+      </p:sp>
+      <p:sp>
+        <p:nvSpPr>
+          <p:cNvPr id="117" name="Freeform 116">
+            <a:extLst>
+              <a:ext uri="{FF2B5EF4-FFF2-40B4-BE49-F238E27FC236}">
+                <a16:creationId xmlns:a16="http://schemas.microsoft.com/office/drawing/2014/main" id="{DE6167DE-AE58-BB4F-8246-4DB0B22709E5}"/>
+              </a:ext>
+            </a:extLst>
+          </p:cNvPr>
+          <p:cNvSpPr/>
+          <p:nvPr/>
+        </p:nvSpPr>
+        <p:spPr>
+          <a:xfrm>
+            <a:off x="7934368" y="4325246"/>
+            <a:ext cx="329689" cy="308788"/>
+          </a:xfrm>
+          <a:custGeom>
+            <a:avLst/>
+            <a:gdLst>
+              <a:gd name="connsiteX0" fmla="*/ 20930 w 329689"/>
+              <a:gd name="connsiteY0" fmla="*/ 59407 h 308788"/>
+              <a:gd name="connsiteX1" fmla="*/ 104057 w 329689"/>
+              <a:gd name="connsiteY1" fmla="*/ 11905 h 308788"/>
+              <a:gd name="connsiteX2" fmla="*/ 270312 w 329689"/>
+              <a:gd name="connsiteY2" fmla="*/ 11905 h 308788"/>
+              <a:gd name="connsiteX3" fmla="*/ 305938 w 329689"/>
+              <a:gd name="connsiteY3" fmla="*/ 47531 h 308788"/>
+              <a:gd name="connsiteX4" fmla="*/ 329689 w 329689"/>
+              <a:gd name="connsiteY4" fmla="*/ 118783 h 308788"/>
+              <a:gd name="connsiteX5" fmla="*/ 317813 w 329689"/>
+              <a:gd name="connsiteY5" fmla="*/ 249412 h 308788"/>
+              <a:gd name="connsiteX6" fmla="*/ 282187 w 329689"/>
+              <a:gd name="connsiteY6" fmla="*/ 261287 h 308788"/>
+              <a:gd name="connsiteX7" fmla="*/ 246561 w 329689"/>
+              <a:gd name="connsiteY7" fmla="*/ 285038 h 308788"/>
+              <a:gd name="connsiteX8" fmla="*/ 163434 w 329689"/>
+              <a:gd name="connsiteY8" fmla="*/ 308788 h 308788"/>
+              <a:gd name="connsiteX9" fmla="*/ 68432 w 329689"/>
+              <a:gd name="connsiteY9" fmla="*/ 296913 h 308788"/>
+              <a:gd name="connsiteX10" fmla="*/ 32806 w 329689"/>
+              <a:gd name="connsiteY10" fmla="*/ 261287 h 308788"/>
+              <a:gd name="connsiteX11" fmla="*/ 9055 w 329689"/>
+              <a:gd name="connsiteY11" fmla="*/ 190035 h 308788"/>
+              <a:gd name="connsiteX12" fmla="*/ 20930 w 329689"/>
+              <a:gd name="connsiteY12" fmla="*/ 59407 h 308788"/>
+            </a:gdLst>
+            <a:ahLst/>
+            <a:cxnLst>
+              <a:cxn ang="0">
+                <a:pos x="connsiteX0" y="connsiteY0"/>
+              </a:cxn>
+              <a:cxn ang="0">
+                <a:pos x="connsiteX1" y="connsiteY1"/>
+              </a:cxn>
+              <a:cxn ang="0">
+                <a:pos x="connsiteX2" y="connsiteY2"/>
+              </a:cxn>
+              <a:cxn ang="0">
+                <a:pos x="connsiteX3" y="connsiteY3"/>
+              </a:cxn>
+              <a:cxn ang="0">
+                <a:pos x="connsiteX4" y="connsiteY4"/>
+              </a:cxn>
+              <a:cxn ang="0">
+                <a:pos x="connsiteX5" y="connsiteY5"/>
+              </a:cxn>
+              <a:cxn ang="0">
+                <a:pos x="connsiteX6" y="connsiteY6"/>
+              </a:cxn>
+              <a:cxn ang="0">
+                <a:pos x="connsiteX7" y="connsiteY7"/>
+              </a:cxn>
+              <a:cxn ang="0">
+                <a:pos x="connsiteX8" y="connsiteY8"/>
+              </a:cxn>
+              <a:cxn ang="0">
+                <a:pos x="connsiteX9" y="connsiteY9"/>
+              </a:cxn>
+              <a:cxn ang="0">
+                <a:pos x="connsiteX10" y="connsiteY10"/>
+              </a:cxn>
+              <a:cxn ang="0">
+                <a:pos x="connsiteX11" y="connsiteY11"/>
+              </a:cxn>
+              <a:cxn ang="0">
+                <a:pos x="connsiteX12" y="connsiteY12"/>
+              </a:cxn>
+            </a:cxnLst>
+            <a:rect l="l" t="t" r="r" b="b"/>
+            <a:pathLst>
+              <a:path w="329689" h="308788">
+                <a:moveTo>
+                  <a:pt x="20930" y="59407"/>
+                </a:moveTo>
+                <a:cubicBezTo>
+                  <a:pt x="36764" y="29719"/>
+                  <a:pt x="74598" y="24180"/>
+                  <a:pt x="104057" y="11905"/>
+                </a:cubicBezTo>
+                <a:cubicBezTo>
+                  <a:pt x="159776" y="-11311"/>
+                  <a:pt x="212291" y="5458"/>
+                  <a:pt x="270312" y="11905"/>
+                </a:cubicBezTo>
+                <a:cubicBezTo>
+                  <a:pt x="282187" y="23780"/>
+                  <a:pt x="297782" y="32850"/>
+                  <a:pt x="305938" y="47531"/>
+                </a:cubicBezTo>
+                <a:cubicBezTo>
+                  <a:pt x="318096" y="69416"/>
+                  <a:pt x="329689" y="118783"/>
+                  <a:pt x="329689" y="118783"/>
+                </a:cubicBezTo>
+                <a:cubicBezTo>
+                  <a:pt x="325730" y="162326"/>
+                  <a:pt x="331639" y="207933"/>
+                  <a:pt x="317813" y="249412"/>
+                </a:cubicBezTo>
+                <a:cubicBezTo>
+                  <a:pt x="313855" y="261287"/>
+                  <a:pt x="293383" y="255689"/>
+                  <a:pt x="282187" y="261287"/>
+                </a:cubicBezTo>
+                <a:cubicBezTo>
+                  <a:pt x="269421" y="267670"/>
+                  <a:pt x="259327" y="278655"/>
+                  <a:pt x="246561" y="285038"/>
+                </a:cubicBezTo>
+                <a:cubicBezTo>
+                  <a:pt x="229526" y="293556"/>
+                  <a:pt x="178652" y="304984"/>
+                  <a:pt x="163434" y="308788"/>
+                </a:cubicBezTo>
+                <a:cubicBezTo>
+                  <a:pt x="131767" y="304830"/>
+                  <a:pt x="98424" y="307819"/>
+                  <a:pt x="68432" y="296913"/>
+                </a:cubicBezTo>
+                <a:cubicBezTo>
+                  <a:pt x="52649" y="291174"/>
+                  <a:pt x="40962" y="275968"/>
+                  <a:pt x="32806" y="261287"/>
+                </a:cubicBezTo>
+                <a:cubicBezTo>
+                  <a:pt x="20648" y="239402"/>
+                  <a:pt x="16972" y="213786"/>
+                  <a:pt x="9055" y="190035"/>
+                </a:cubicBezTo>
+                <a:cubicBezTo>
+                  <a:pt x="-10330" y="131879"/>
+                  <a:pt x="5096" y="89095"/>
+                  <a:pt x="20930" y="59407"/>
+                </a:cubicBezTo>
+                <a:close/>
+              </a:path>
+            </a:pathLst>
+          </a:custGeom>
+          <a:solidFill>
+            <a:schemeClr val="accent1">
+              <a:lumMod val="50000"/>
+            </a:schemeClr>
+          </a:solidFill>
+          <a:ln w="19050">
+            <a:solidFill>
+              <a:schemeClr val="tx1"/>
+            </a:solidFill>
+          </a:ln>
+        </p:spPr>
+        <p:style>
+          <a:lnRef idx="2">
+            <a:schemeClr val="accent1">
+              <a:shade val="50000"/>
+            </a:schemeClr>
+          </a:lnRef>
+          <a:fillRef idx="1">
+            <a:schemeClr val="accent1"/>
+          </a:fillRef>
+          <a:effectRef idx="0">
+            <a:schemeClr val="accent1"/>
+          </a:effectRef>
+          <a:fontRef idx="minor">
+            <a:schemeClr val="lt1"/>
+          </a:fontRef>
+        </p:style>
+        <p:txBody>
+          <a:bodyPr rtlCol="0" anchor="ctr"/>
+          <a:lstStyle/>
+          <a:p>
+            <a:pPr algn="ctr"/>
+            <a:r>
+              <a:rPr kumimoji="1" lang="en-US" altLang="zh-CN" dirty="0"/>
+              <a:t>F</a:t>
+            </a:r>
+            <a:endParaRPr kumimoji="1" lang="zh-CN" altLang="en-US" sz="2000" dirty="0"/>
+          </a:p>
+        </p:txBody>
+      </p:sp>
+      <p:grpSp>
+        <p:nvGrpSpPr>
+          <p:cNvPr id="121" name="Group 120">
+            <a:extLst>
+              <a:ext uri="{FF2B5EF4-FFF2-40B4-BE49-F238E27FC236}">
+                <a16:creationId xmlns:a16="http://schemas.microsoft.com/office/drawing/2014/main" id="{8A05399E-822C-314A-B575-3BA42AD4AC93}"/>
+              </a:ext>
+            </a:extLst>
+          </p:cNvPr>
+          <p:cNvGrpSpPr/>
+          <p:nvPr/>
+        </p:nvGrpSpPr>
+        <p:grpSpPr>
+          <a:xfrm>
+            <a:off x="8308639" y="3431406"/>
+            <a:ext cx="2518671" cy="793133"/>
+            <a:chOff x="8308639" y="3431406"/>
+            <a:chExt cx="2518671" cy="793133"/>
+          </a:xfrm>
+        </p:grpSpPr>
+        <p:sp>
+          <p:nvSpPr>
+            <p:cNvPr id="103" name="Freeform 102">
+              <a:extLst>
+                <a:ext uri="{FF2B5EF4-FFF2-40B4-BE49-F238E27FC236}">
+                  <a16:creationId xmlns:a16="http://schemas.microsoft.com/office/drawing/2014/main" id="{98D5E6F9-EB37-6549-94AC-1CB114A0683B}"/>
+                </a:ext>
+              </a:extLst>
+            </p:cNvPr>
+            <p:cNvSpPr/>
+            <p:nvPr/>
+          </p:nvSpPr>
+          <p:spPr>
+            <a:xfrm>
+              <a:off x="8308639" y="3476394"/>
+              <a:ext cx="739781" cy="748145"/>
+            </a:xfrm>
+            <a:custGeom>
+              <a:avLst/>
+              <a:gdLst>
+                <a:gd name="connsiteX0" fmla="*/ 86639 w 739781"/>
+                <a:gd name="connsiteY0" fmla="*/ 273132 h 748145"/>
+                <a:gd name="connsiteX1" fmla="*/ 169766 w 739781"/>
+                <a:gd name="connsiteY1" fmla="*/ 225631 h 748145"/>
+                <a:gd name="connsiteX2" fmla="*/ 205392 w 739781"/>
+                <a:gd name="connsiteY2" fmla="*/ 190005 h 748145"/>
+                <a:gd name="connsiteX3" fmla="*/ 241018 w 739781"/>
+                <a:gd name="connsiteY3" fmla="*/ 166254 h 748145"/>
+                <a:gd name="connsiteX4" fmla="*/ 264768 w 739781"/>
+                <a:gd name="connsiteY4" fmla="*/ 130628 h 748145"/>
+                <a:gd name="connsiteX5" fmla="*/ 300394 w 739781"/>
+                <a:gd name="connsiteY5" fmla="*/ 106878 h 748145"/>
+                <a:gd name="connsiteX6" fmla="*/ 383522 w 739781"/>
+                <a:gd name="connsiteY6" fmla="*/ 11875 h 748145"/>
+                <a:gd name="connsiteX7" fmla="*/ 419148 w 739781"/>
+                <a:gd name="connsiteY7" fmla="*/ 0 h 748145"/>
+                <a:gd name="connsiteX8" fmla="*/ 549776 w 739781"/>
+                <a:gd name="connsiteY8" fmla="*/ 23750 h 748145"/>
+                <a:gd name="connsiteX9" fmla="*/ 621028 w 739781"/>
+                <a:gd name="connsiteY9" fmla="*/ 71252 h 748145"/>
+                <a:gd name="connsiteX10" fmla="*/ 692280 w 739781"/>
+                <a:gd name="connsiteY10" fmla="*/ 142504 h 748145"/>
+                <a:gd name="connsiteX11" fmla="*/ 739781 w 739781"/>
+                <a:gd name="connsiteY11" fmla="*/ 213756 h 748145"/>
+                <a:gd name="connsiteX12" fmla="*/ 727906 w 739781"/>
+                <a:gd name="connsiteY12" fmla="*/ 427512 h 748145"/>
+                <a:gd name="connsiteX13" fmla="*/ 609153 w 739781"/>
+                <a:gd name="connsiteY13" fmla="*/ 546265 h 748145"/>
+                <a:gd name="connsiteX14" fmla="*/ 573527 w 739781"/>
+                <a:gd name="connsiteY14" fmla="*/ 570015 h 748145"/>
+                <a:gd name="connsiteX15" fmla="*/ 537901 w 739781"/>
+                <a:gd name="connsiteY15" fmla="*/ 593766 h 748145"/>
+                <a:gd name="connsiteX16" fmla="*/ 466649 w 739781"/>
+                <a:gd name="connsiteY16" fmla="*/ 641267 h 748145"/>
+                <a:gd name="connsiteX17" fmla="*/ 395397 w 739781"/>
+                <a:gd name="connsiteY17" fmla="*/ 688769 h 748145"/>
+                <a:gd name="connsiteX18" fmla="*/ 359771 w 739781"/>
+                <a:gd name="connsiteY18" fmla="*/ 712519 h 748145"/>
+                <a:gd name="connsiteX19" fmla="*/ 288519 w 739781"/>
+                <a:gd name="connsiteY19" fmla="*/ 736270 h 748145"/>
+                <a:gd name="connsiteX20" fmla="*/ 252893 w 739781"/>
+                <a:gd name="connsiteY20" fmla="*/ 748145 h 748145"/>
+                <a:gd name="connsiteX21" fmla="*/ 217267 w 739781"/>
+                <a:gd name="connsiteY21" fmla="*/ 736270 h 748145"/>
+                <a:gd name="connsiteX22" fmla="*/ 146015 w 739781"/>
+                <a:gd name="connsiteY22" fmla="*/ 676893 h 748145"/>
+                <a:gd name="connsiteX23" fmla="*/ 98514 w 739781"/>
+                <a:gd name="connsiteY23" fmla="*/ 605641 h 748145"/>
+                <a:gd name="connsiteX24" fmla="*/ 27262 w 739781"/>
+                <a:gd name="connsiteY24" fmla="*/ 558140 h 748145"/>
+                <a:gd name="connsiteX25" fmla="*/ 3511 w 739781"/>
+                <a:gd name="connsiteY25" fmla="*/ 522514 h 748145"/>
+                <a:gd name="connsiteX26" fmla="*/ 39137 w 739781"/>
+                <a:gd name="connsiteY26" fmla="*/ 391886 h 748145"/>
+                <a:gd name="connsiteX27" fmla="*/ 62888 w 739781"/>
+                <a:gd name="connsiteY27" fmla="*/ 320634 h 748145"/>
+                <a:gd name="connsiteX28" fmla="*/ 86639 w 739781"/>
+                <a:gd name="connsiteY28" fmla="*/ 273132 h 748145"/>
+              </a:gdLst>
+              <a:ahLst/>
+              <a:cxnLst>
+                <a:cxn ang="0">
+                  <a:pos x="connsiteX0" y="connsiteY0"/>
+                </a:cxn>
+                <a:cxn ang="0">
+                  <a:pos x="connsiteX1" y="connsiteY1"/>
+                </a:cxn>
+                <a:cxn ang="0">
+                  <a:pos x="connsiteX2" y="connsiteY2"/>
+                </a:cxn>
+                <a:cxn ang="0">
+                  <a:pos x="connsiteX3" y="connsiteY3"/>
+                </a:cxn>
+                <a:cxn ang="0">
+                  <a:pos x="connsiteX4" y="connsiteY4"/>
+                </a:cxn>
+                <a:cxn ang="0">
+                  <a:pos x="connsiteX5" y="connsiteY5"/>
+                </a:cxn>
+                <a:cxn ang="0">
+                  <a:pos x="connsiteX6" y="connsiteY6"/>
+                </a:cxn>
+                <a:cxn ang="0">
+                  <a:pos x="connsiteX7" y="connsiteY7"/>
+                </a:cxn>
+                <a:cxn ang="0">
+                  <a:pos x="connsiteX8" y="connsiteY8"/>
+                </a:cxn>
+                <a:cxn ang="0">
+                  <a:pos x="connsiteX9" y="connsiteY9"/>
+                </a:cxn>
+                <a:cxn ang="0">
+                  <a:pos x="connsiteX10" y="connsiteY10"/>
+                </a:cxn>
+                <a:cxn ang="0">
+                  <a:pos x="connsiteX11" y="connsiteY11"/>
+                </a:cxn>
+                <a:cxn ang="0">
+                  <a:pos x="connsiteX12" y="connsiteY12"/>
+                </a:cxn>
+                <a:cxn ang="0">
+                  <a:pos x="connsiteX13" y="connsiteY13"/>
+                </a:cxn>
+                <a:cxn ang="0">
+                  <a:pos x="connsiteX14" y="connsiteY14"/>
+                </a:cxn>
+                <a:cxn ang="0">
+                  <a:pos x="connsiteX15" y="connsiteY15"/>
+                </a:cxn>
+                <a:cxn ang="0">
+                  <a:pos x="connsiteX16" y="connsiteY16"/>
+                </a:cxn>
+                <a:cxn ang="0">
+                  <a:pos x="connsiteX17" y="connsiteY17"/>
+                </a:cxn>
+                <a:cxn ang="0">
+                  <a:pos x="connsiteX18" y="connsiteY18"/>
+                </a:cxn>
+                <a:cxn ang="0">
+                  <a:pos x="connsiteX19" y="connsiteY19"/>
+                </a:cxn>
+                <a:cxn ang="0">
+                  <a:pos x="connsiteX20" y="connsiteY20"/>
+                </a:cxn>
+                <a:cxn ang="0">
+                  <a:pos x="connsiteX21" y="connsiteY21"/>
+                </a:cxn>
+                <a:cxn ang="0">
+                  <a:pos x="connsiteX22" y="connsiteY22"/>
+                </a:cxn>
+                <a:cxn ang="0">
+                  <a:pos x="connsiteX23" y="connsiteY23"/>
+                </a:cxn>
+                <a:cxn ang="0">
+                  <a:pos x="connsiteX24" y="connsiteY24"/>
+                </a:cxn>
+                <a:cxn ang="0">
+                  <a:pos x="connsiteX25" y="connsiteY25"/>
+                </a:cxn>
+                <a:cxn ang="0">
+                  <a:pos x="connsiteX26" y="connsiteY26"/>
+                </a:cxn>
+                <a:cxn ang="0">
+                  <a:pos x="connsiteX27" y="connsiteY27"/>
+                </a:cxn>
+                <a:cxn ang="0">
+                  <a:pos x="connsiteX28" y="connsiteY28"/>
+                </a:cxn>
+              </a:cxnLst>
+              <a:rect l="l" t="t" r="r" b="b"/>
+              <a:pathLst>
+                <a:path w="739781" h="748145">
+                  <a:moveTo>
+                    <a:pt x="86639" y="273132"/>
+                  </a:moveTo>
+                  <a:cubicBezTo>
+                    <a:pt x="114348" y="257298"/>
+                    <a:pt x="143621" y="243932"/>
+                    <a:pt x="169766" y="225631"/>
+                  </a:cubicBezTo>
+                  <a:cubicBezTo>
+                    <a:pt x="183524" y="216000"/>
+                    <a:pt x="192490" y="200756"/>
+                    <a:pt x="205392" y="190005"/>
+                  </a:cubicBezTo>
+                  <a:cubicBezTo>
+                    <a:pt x="216356" y="180868"/>
+                    <a:pt x="229143" y="174171"/>
+                    <a:pt x="241018" y="166254"/>
+                  </a:cubicBezTo>
+                  <a:cubicBezTo>
+                    <a:pt x="248935" y="154379"/>
+                    <a:pt x="254676" y="140720"/>
+                    <a:pt x="264768" y="130628"/>
+                  </a:cubicBezTo>
+                  <a:cubicBezTo>
+                    <a:pt x="274860" y="120536"/>
+                    <a:pt x="290996" y="117619"/>
+                    <a:pt x="300394" y="106878"/>
+                  </a:cubicBezTo>
+                  <a:cubicBezTo>
+                    <a:pt x="355811" y="43545"/>
+                    <a:pt x="324146" y="41563"/>
+                    <a:pt x="383522" y="11875"/>
+                  </a:cubicBezTo>
+                  <a:cubicBezTo>
+                    <a:pt x="394718" y="6277"/>
+                    <a:pt x="407273" y="3958"/>
+                    <a:pt x="419148" y="0"/>
+                  </a:cubicBezTo>
+                  <a:cubicBezTo>
+                    <a:pt x="423174" y="503"/>
+                    <a:pt x="524430" y="6853"/>
+                    <a:pt x="549776" y="23750"/>
+                  </a:cubicBezTo>
+                  <a:cubicBezTo>
+                    <a:pt x="638735" y="83055"/>
+                    <a:pt x="536315" y="43013"/>
+                    <a:pt x="621028" y="71252"/>
+                  </a:cubicBezTo>
+                  <a:cubicBezTo>
+                    <a:pt x="644779" y="95003"/>
+                    <a:pt x="673649" y="114557"/>
+                    <a:pt x="692280" y="142504"/>
+                  </a:cubicBezTo>
+                  <a:lnTo>
+                    <a:pt x="739781" y="213756"/>
+                  </a:lnTo>
+                  <a:cubicBezTo>
+                    <a:pt x="735823" y="285008"/>
+                    <a:pt x="742460" y="357650"/>
+                    <a:pt x="727906" y="427512"/>
+                  </a:cubicBezTo>
+                  <a:cubicBezTo>
+                    <a:pt x="715137" y="488802"/>
+                    <a:pt x="653588" y="516642"/>
+                    <a:pt x="609153" y="546265"/>
+                  </a:cubicBezTo>
+                  <a:lnTo>
+                    <a:pt x="573527" y="570015"/>
+                  </a:lnTo>
+                  <a:cubicBezTo>
+                    <a:pt x="561652" y="577932"/>
+                    <a:pt x="547993" y="583674"/>
+                    <a:pt x="537901" y="593766"/>
+                  </a:cubicBezTo>
+                  <a:cubicBezTo>
+                    <a:pt x="493424" y="638243"/>
+                    <a:pt x="518207" y="624081"/>
+                    <a:pt x="466649" y="641267"/>
+                  </a:cubicBezTo>
+                  <a:lnTo>
+                    <a:pt x="395397" y="688769"/>
+                  </a:lnTo>
+                  <a:cubicBezTo>
+                    <a:pt x="383522" y="696686"/>
+                    <a:pt x="373311" y="708006"/>
+                    <a:pt x="359771" y="712519"/>
+                  </a:cubicBezTo>
+                  <a:lnTo>
+                    <a:pt x="288519" y="736270"/>
+                  </a:lnTo>
+                  <a:lnTo>
+                    <a:pt x="252893" y="748145"/>
+                  </a:lnTo>
+                  <a:cubicBezTo>
+                    <a:pt x="241018" y="744187"/>
+                    <a:pt x="228463" y="741868"/>
+                    <a:pt x="217267" y="736270"/>
+                  </a:cubicBezTo>
+                  <a:cubicBezTo>
+                    <a:pt x="192318" y="723795"/>
+                    <a:pt x="162727" y="698380"/>
+                    <a:pt x="146015" y="676893"/>
+                  </a:cubicBezTo>
+                  <a:cubicBezTo>
+                    <a:pt x="128490" y="654361"/>
+                    <a:pt x="122265" y="621475"/>
+                    <a:pt x="98514" y="605641"/>
+                  </a:cubicBezTo>
+                  <a:lnTo>
+                    <a:pt x="27262" y="558140"/>
+                  </a:lnTo>
+                  <a:cubicBezTo>
+                    <a:pt x="19345" y="546265"/>
+                    <a:pt x="4803" y="536728"/>
+                    <a:pt x="3511" y="522514"/>
+                  </a:cubicBezTo>
+                  <a:cubicBezTo>
+                    <a:pt x="-7657" y="399667"/>
+                    <a:pt x="8782" y="460185"/>
+                    <a:pt x="39137" y="391886"/>
+                  </a:cubicBezTo>
+                  <a:cubicBezTo>
+                    <a:pt x="49305" y="369008"/>
+                    <a:pt x="54971" y="344385"/>
+                    <a:pt x="62888" y="320634"/>
+                  </a:cubicBezTo>
+                  <a:lnTo>
+                    <a:pt x="86639" y="273132"/>
+                  </a:lnTo>
+                  <a:close/>
+                </a:path>
+              </a:pathLst>
+            </a:custGeom>
+            <a:solidFill>
+              <a:schemeClr val="accent2"/>
+            </a:solidFill>
+            <a:ln w="19050">
+              <a:solidFill>
+                <a:schemeClr val="tx1"/>
+              </a:solidFill>
+            </a:ln>
+          </p:spPr>
+          <p:style>
+            <a:lnRef idx="2">
+              <a:schemeClr val="accent1">
+                <a:shade val="50000"/>
+              </a:schemeClr>
+            </a:lnRef>
+            <a:fillRef idx="1">
+              <a:schemeClr val="accent1"/>
+            </a:fillRef>
+            <a:effectRef idx="0">
+              <a:schemeClr val="accent1"/>
+            </a:effectRef>
+            <a:fontRef idx="minor">
+              <a:schemeClr val="lt1"/>
+            </a:fontRef>
+          </p:style>
+          <p:txBody>
+            <a:bodyPr rtlCol="0" anchor="ctr"/>
+            <a:lstStyle/>
+            <a:p>
+              <a:pPr algn="ctr"/>
+              <a:r>
+                <a:rPr kumimoji="1" lang="en-US" altLang="zh-CN" dirty="0" err="1"/>
+                <a:t>FokI</a:t>
+              </a:r>
+              <a:endParaRPr kumimoji="1" lang="zh-CN" altLang="en-US" dirty="0"/>
+            </a:p>
+          </p:txBody>
+        </p:sp>
+        <p:sp>
+          <p:nvSpPr>
+            <p:cNvPr id="105" name="Freeform 104">
+              <a:extLst>
+                <a:ext uri="{FF2B5EF4-FFF2-40B4-BE49-F238E27FC236}">
+                  <a16:creationId xmlns:a16="http://schemas.microsoft.com/office/drawing/2014/main" id="{DBF4AA9D-319E-F54F-B188-A977C8C01DB9}"/>
+                </a:ext>
+              </a:extLst>
+            </p:cNvPr>
+            <p:cNvSpPr/>
+            <p:nvPr/>
+          </p:nvSpPr>
+          <p:spPr>
+            <a:xfrm>
+              <a:off x="9269620" y="3507686"/>
+              <a:ext cx="329689" cy="308788"/>
+            </a:xfrm>
+            <a:custGeom>
+              <a:avLst/>
+              <a:gdLst>
+                <a:gd name="connsiteX0" fmla="*/ 20930 w 329689"/>
+                <a:gd name="connsiteY0" fmla="*/ 59407 h 308788"/>
+                <a:gd name="connsiteX1" fmla="*/ 104057 w 329689"/>
+                <a:gd name="connsiteY1" fmla="*/ 11905 h 308788"/>
+                <a:gd name="connsiteX2" fmla="*/ 270312 w 329689"/>
+                <a:gd name="connsiteY2" fmla="*/ 11905 h 308788"/>
+                <a:gd name="connsiteX3" fmla="*/ 305938 w 329689"/>
+                <a:gd name="connsiteY3" fmla="*/ 47531 h 308788"/>
+                <a:gd name="connsiteX4" fmla="*/ 329689 w 329689"/>
+                <a:gd name="connsiteY4" fmla="*/ 118783 h 308788"/>
+                <a:gd name="connsiteX5" fmla="*/ 317813 w 329689"/>
+                <a:gd name="connsiteY5" fmla="*/ 249412 h 308788"/>
+                <a:gd name="connsiteX6" fmla="*/ 282187 w 329689"/>
+                <a:gd name="connsiteY6" fmla="*/ 261287 h 308788"/>
+                <a:gd name="connsiteX7" fmla="*/ 246561 w 329689"/>
+                <a:gd name="connsiteY7" fmla="*/ 285038 h 308788"/>
+                <a:gd name="connsiteX8" fmla="*/ 163434 w 329689"/>
+                <a:gd name="connsiteY8" fmla="*/ 308788 h 308788"/>
+                <a:gd name="connsiteX9" fmla="*/ 68432 w 329689"/>
+                <a:gd name="connsiteY9" fmla="*/ 296913 h 308788"/>
+                <a:gd name="connsiteX10" fmla="*/ 32806 w 329689"/>
+                <a:gd name="connsiteY10" fmla="*/ 261287 h 308788"/>
+                <a:gd name="connsiteX11" fmla="*/ 9055 w 329689"/>
+                <a:gd name="connsiteY11" fmla="*/ 190035 h 308788"/>
+                <a:gd name="connsiteX12" fmla="*/ 20930 w 329689"/>
+                <a:gd name="connsiteY12" fmla="*/ 59407 h 308788"/>
+              </a:gdLst>
+              <a:ahLst/>
+              <a:cxnLst>
+                <a:cxn ang="0">
+                  <a:pos x="connsiteX0" y="connsiteY0"/>
+                </a:cxn>
+                <a:cxn ang="0">
+                  <a:pos x="connsiteX1" y="connsiteY1"/>
+                </a:cxn>
+                <a:cxn ang="0">
+                  <a:pos x="connsiteX2" y="connsiteY2"/>
+                </a:cxn>
+                <a:cxn ang="0">
+                  <a:pos x="connsiteX3" y="connsiteY3"/>
+                </a:cxn>
+                <a:cxn ang="0">
+                  <a:pos x="connsiteX4" y="connsiteY4"/>
+                </a:cxn>
+                <a:cxn ang="0">
+                  <a:pos x="connsiteX5" y="connsiteY5"/>
+                </a:cxn>
+                <a:cxn ang="0">
+                  <a:pos x="connsiteX6" y="connsiteY6"/>
+                </a:cxn>
+                <a:cxn ang="0">
+                  <a:pos x="connsiteX7" y="connsiteY7"/>
+                </a:cxn>
+                <a:cxn ang="0">
+                  <a:pos x="connsiteX8" y="connsiteY8"/>
+                </a:cxn>
+                <a:cxn ang="0">
+                  <a:pos x="connsiteX9" y="connsiteY9"/>
+                </a:cxn>
+                <a:cxn ang="0">
+                  <a:pos x="connsiteX10" y="connsiteY10"/>
+                </a:cxn>
+                <a:cxn ang="0">
+                  <a:pos x="connsiteX11" y="connsiteY11"/>
+                </a:cxn>
+                <a:cxn ang="0">
+                  <a:pos x="connsiteX12" y="connsiteY12"/>
+                </a:cxn>
+              </a:cxnLst>
+              <a:rect l="l" t="t" r="r" b="b"/>
+              <a:pathLst>
+                <a:path w="329689" h="308788">
+                  <a:moveTo>
+                    <a:pt x="20930" y="59407"/>
+                  </a:moveTo>
+                  <a:cubicBezTo>
+                    <a:pt x="36764" y="29719"/>
+                    <a:pt x="74598" y="24180"/>
+                    <a:pt x="104057" y="11905"/>
+                  </a:cubicBezTo>
+                  <a:cubicBezTo>
+                    <a:pt x="159776" y="-11311"/>
+                    <a:pt x="212291" y="5458"/>
+                    <a:pt x="270312" y="11905"/>
+                  </a:cubicBezTo>
+                  <a:cubicBezTo>
+                    <a:pt x="282187" y="23780"/>
+                    <a:pt x="297782" y="32850"/>
+                    <a:pt x="305938" y="47531"/>
+                  </a:cubicBezTo>
+                  <a:cubicBezTo>
+                    <a:pt x="318096" y="69416"/>
+                    <a:pt x="329689" y="118783"/>
+                    <a:pt x="329689" y="118783"/>
+                  </a:cubicBezTo>
+                  <a:cubicBezTo>
+                    <a:pt x="325730" y="162326"/>
+                    <a:pt x="331639" y="207933"/>
+                    <a:pt x="317813" y="249412"/>
+                  </a:cubicBezTo>
+                  <a:cubicBezTo>
+                    <a:pt x="313855" y="261287"/>
+                    <a:pt x="293383" y="255689"/>
+                    <a:pt x="282187" y="261287"/>
+                  </a:cubicBezTo>
+                  <a:cubicBezTo>
+                    <a:pt x="269421" y="267670"/>
+                    <a:pt x="259327" y="278655"/>
+                    <a:pt x="246561" y="285038"/>
+                  </a:cubicBezTo>
+                  <a:cubicBezTo>
+                    <a:pt x="229526" y="293556"/>
+                    <a:pt x="178652" y="304984"/>
+                    <a:pt x="163434" y="308788"/>
+                  </a:cubicBezTo>
+                  <a:cubicBezTo>
+                    <a:pt x="131767" y="304830"/>
+                    <a:pt x="98424" y="307819"/>
+                    <a:pt x="68432" y="296913"/>
+                  </a:cubicBezTo>
+                  <a:cubicBezTo>
+                    <a:pt x="52649" y="291174"/>
+                    <a:pt x="40962" y="275968"/>
+                    <a:pt x="32806" y="261287"/>
+                  </a:cubicBezTo>
+                  <a:cubicBezTo>
+                    <a:pt x="20648" y="239402"/>
+                    <a:pt x="16972" y="213786"/>
+                    <a:pt x="9055" y="190035"/>
+                  </a:cubicBezTo>
+                  <a:cubicBezTo>
+                    <a:pt x="-10330" y="131879"/>
+                    <a:pt x="5096" y="89095"/>
+                    <a:pt x="20930" y="59407"/>
+                  </a:cubicBezTo>
+                  <a:close/>
+                </a:path>
+              </a:pathLst>
+            </a:custGeom>
+            <a:solidFill>
+              <a:schemeClr val="accent5"/>
+            </a:solidFill>
+            <a:ln w="19050">
+              <a:solidFill>
+                <a:schemeClr val="tx1"/>
+              </a:solidFill>
+            </a:ln>
+          </p:spPr>
+          <p:style>
+            <a:lnRef idx="2">
+              <a:schemeClr val="accent1">
+                <a:shade val="50000"/>
+              </a:schemeClr>
+            </a:lnRef>
+            <a:fillRef idx="1">
+              <a:schemeClr val="accent1"/>
+            </a:fillRef>
+            <a:effectRef idx="0">
+              <a:schemeClr val="accent1"/>
+            </a:effectRef>
+            <a:fontRef idx="minor">
+              <a:schemeClr val="lt1"/>
+            </a:fontRef>
+          </p:style>
+          <p:txBody>
+            <a:bodyPr rtlCol="0" anchor="ctr"/>
+            <a:lstStyle/>
+            <a:p>
+              <a:pPr algn="ctr"/>
+              <a:r>
+                <a:rPr kumimoji="1" lang="en-US" altLang="zh-CN" dirty="0"/>
+                <a:t>F</a:t>
+              </a:r>
+              <a:endParaRPr kumimoji="1" lang="zh-CN" altLang="en-US" sz="2000" dirty="0"/>
+            </a:p>
+          </p:txBody>
+        </p:sp>
+        <p:sp>
+          <p:nvSpPr>
+            <p:cNvPr id="106" name="Freeform 105">
+              <a:extLst>
+                <a:ext uri="{FF2B5EF4-FFF2-40B4-BE49-F238E27FC236}">
+                  <a16:creationId xmlns:a16="http://schemas.microsoft.com/office/drawing/2014/main" id="{B3279C36-2BC2-1C40-8F86-D5D639F35896}"/>
+                </a:ext>
+              </a:extLst>
+            </p:cNvPr>
+            <p:cNvSpPr/>
+            <p:nvPr/>
+          </p:nvSpPr>
+          <p:spPr>
+            <a:xfrm>
+              <a:off x="9680068" y="3494226"/>
+              <a:ext cx="329689" cy="308788"/>
+            </a:xfrm>
+            <a:custGeom>
+              <a:avLst/>
+              <a:gdLst>
+                <a:gd name="connsiteX0" fmla="*/ 20930 w 329689"/>
+                <a:gd name="connsiteY0" fmla="*/ 59407 h 308788"/>
+                <a:gd name="connsiteX1" fmla="*/ 104057 w 329689"/>
+                <a:gd name="connsiteY1" fmla="*/ 11905 h 308788"/>
+                <a:gd name="connsiteX2" fmla="*/ 270312 w 329689"/>
+                <a:gd name="connsiteY2" fmla="*/ 11905 h 308788"/>
+                <a:gd name="connsiteX3" fmla="*/ 305938 w 329689"/>
+                <a:gd name="connsiteY3" fmla="*/ 47531 h 308788"/>
+                <a:gd name="connsiteX4" fmla="*/ 329689 w 329689"/>
+                <a:gd name="connsiteY4" fmla="*/ 118783 h 308788"/>
+                <a:gd name="connsiteX5" fmla="*/ 317813 w 329689"/>
+                <a:gd name="connsiteY5" fmla="*/ 249412 h 308788"/>
+                <a:gd name="connsiteX6" fmla="*/ 282187 w 329689"/>
+                <a:gd name="connsiteY6" fmla="*/ 261287 h 308788"/>
+                <a:gd name="connsiteX7" fmla="*/ 246561 w 329689"/>
+                <a:gd name="connsiteY7" fmla="*/ 285038 h 308788"/>
+                <a:gd name="connsiteX8" fmla="*/ 163434 w 329689"/>
+                <a:gd name="connsiteY8" fmla="*/ 308788 h 308788"/>
+                <a:gd name="connsiteX9" fmla="*/ 68432 w 329689"/>
+                <a:gd name="connsiteY9" fmla="*/ 296913 h 308788"/>
+                <a:gd name="connsiteX10" fmla="*/ 32806 w 329689"/>
+                <a:gd name="connsiteY10" fmla="*/ 261287 h 308788"/>
+                <a:gd name="connsiteX11" fmla="*/ 9055 w 329689"/>
+                <a:gd name="connsiteY11" fmla="*/ 190035 h 308788"/>
+                <a:gd name="connsiteX12" fmla="*/ 20930 w 329689"/>
+                <a:gd name="connsiteY12" fmla="*/ 59407 h 308788"/>
+              </a:gdLst>
+              <a:ahLst/>
+              <a:cxnLst>
+                <a:cxn ang="0">
+                  <a:pos x="connsiteX0" y="connsiteY0"/>
+                </a:cxn>
+                <a:cxn ang="0">
+                  <a:pos x="connsiteX1" y="connsiteY1"/>
+                </a:cxn>
+                <a:cxn ang="0">
+                  <a:pos x="connsiteX2" y="connsiteY2"/>
+                </a:cxn>
+                <a:cxn ang="0">
+                  <a:pos x="connsiteX3" y="connsiteY3"/>
+                </a:cxn>
+                <a:cxn ang="0">
+                  <a:pos x="connsiteX4" y="connsiteY4"/>
+                </a:cxn>
+                <a:cxn ang="0">
+                  <a:pos x="connsiteX5" y="connsiteY5"/>
+                </a:cxn>
+                <a:cxn ang="0">
+                  <a:pos x="connsiteX6" y="connsiteY6"/>
+                </a:cxn>
+                <a:cxn ang="0">
+                  <a:pos x="connsiteX7" y="connsiteY7"/>
+                </a:cxn>
+                <a:cxn ang="0">
+                  <a:pos x="connsiteX8" y="connsiteY8"/>
+                </a:cxn>
+                <a:cxn ang="0">
+                  <a:pos x="connsiteX9" y="connsiteY9"/>
+                </a:cxn>
+                <a:cxn ang="0">
+                  <a:pos x="connsiteX10" y="connsiteY10"/>
+                </a:cxn>
+                <a:cxn ang="0">
+                  <a:pos x="connsiteX11" y="connsiteY11"/>
+                </a:cxn>
+                <a:cxn ang="0">
+                  <a:pos x="connsiteX12" y="connsiteY12"/>
+                </a:cxn>
+              </a:cxnLst>
+              <a:rect l="l" t="t" r="r" b="b"/>
+              <a:pathLst>
+                <a:path w="329689" h="308788">
+                  <a:moveTo>
+                    <a:pt x="20930" y="59407"/>
+                  </a:moveTo>
+                  <a:cubicBezTo>
+                    <a:pt x="36764" y="29719"/>
+                    <a:pt x="74598" y="24180"/>
+                    <a:pt x="104057" y="11905"/>
+                  </a:cubicBezTo>
+                  <a:cubicBezTo>
+                    <a:pt x="159776" y="-11311"/>
+                    <a:pt x="212291" y="5458"/>
+                    <a:pt x="270312" y="11905"/>
+                  </a:cubicBezTo>
+                  <a:cubicBezTo>
+                    <a:pt x="282187" y="23780"/>
+                    <a:pt x="297782" y="32850"/>
+                    <a:pt x="305938" y="47531"/>
+                  </a:cubicBezTo>
+                  <a:cubicBezTo>
+                    <a:pt x="318096" y="69416"/>
+                    <a:pt x="329689" y="118783"/>
+                    <a:pt x="329689" y="118783"/>
+                  </a:cubicBezTo>
+                  <a:cubicBezTo>
+                    <a:pt x="325730" y="162326"/>
+                    <a:pt x="331639" y="207933"/>
+                    <a:pt x="317813" y="249412"/>
+                  </a:cubicBezTo>
+                  <a:cubicBezTo>
+                    <a:pt x="313855" y="261287"/>
+                    <a:pt x="293383" y="255689"/>
+                    <a:pt x="282187" y="261287"/>
+                  </a:cubicBezTo>
+                  <a:cubicBezTo>
+                    <a:pt x="269421" y="267670"/>
+                    <a:pt x="259327" y="278655"/>
+                    <a:pt x="246561" y="285038"/>
+                  </a:cubicBezTo>
+                  <a:cubicBezTo>
+                    <a:pt x="229526" y="293556"/>
+                    <a:pt x="178652" y="304984"/>
+                    <a:pt x="163434" y="308788"/>
+                  </a:cubicBezTo>
+                  <a:cubicBezTo>
+                    <a:pt x="131767" y="304830"/>
+                    <a:pt x="98424" y="307819"/>
+                    <a:pt x="68432" y="296913"/>
+                  </a:cubicBezTo>
+                  <a:cubicBezTo>
+                    <a:pt x="52649" y="291174"/>
+                    <a:pt x="40962" y="275968"/>
+                    <a:pt x="32806" y="261287"/>
+                  </a:cubicBezTo>
+                  <a:cubicBezTo>
+                    <a:pt x="20648" y="239402"/>
+                    <a:pt x="16972" y="213786"/>
+                    <a:pt x="9055" y="190035"/>
+                  </a:cubicBezTo>
+                  <a:cubicBezTo>
+                    <a:pt x="-10330" y="131879"/>
+                    <a:pt x="5096" y="89095"/>
+                    <a:pt x="20930" y="59407"/>
+                  </a:cubicBezTo>
+                  <a:close/>
+                </a:path>
+              </a:pathLst>
+            </a:custGeom>
+            <a:solidFill>
+              <a:schemeClr val="accent1">
+                <a:lumMod val="20000"/>
+                <a:lumOff val="80000"/>
+              </a:schemeClr>
+            </a:solidFill>
+            <a:ln w="19050">
+              <a:solidFill>
+                <a:schemeClr val="tx1"/>
+              </a:solidFill>
+            </a:ln>
+          </p:spPr>
+          <p:style>
+            <a:lnRef idx="2">
+              <a:schemeClr val="accent1">
+                <a:shade val="50000"/>
+              </a:schemeClr>
+            </a:lnRef>
+            <a:fillRef idx="1">
+              <a:schemeClr val="accent1"/>
+            </a:fillRef>
+            <a:effectRef idx="0">
+              <a:schemeClr val="accent1"/>
+            </a:effectRef>
+            <a:fontRef idx="minor">
+              <a:schemeClr val="lt1"/>
+            </a:fontRef>
+          </p:style>
+          <p:txBody>
+            <a:bodyPr rtlCol="0" anchor="ctr"/>
+            <a:lstStyle/>
+            <a:p>
+              <a:pPr algn="ctr"/>
+              <a:r>
+                <a:rPr kumimoji="1" lang="en-US" altLang="zh-CN" dirty="0"/>
+                <a:t>F</a:t>
+              </a:r>
+              <a:endParaRPr kumimoji="1" lang="zh-CN" altLang="en-US" sz="2000" dirty="0"/>
+            </a:p>
+          </p:txBody>
+        </p:sp>
+        <p:sp>
+          <p:nvSpPr>
+            <p:cNvPr id="107" name="Freeform 106">
+              <a:extLst>
+                <a:ext uri="{FF2B5EF4-FFF2-40B4-BE49-F238E27FC236}">
+                  <a16:creationId xmlns:a16="http://schemas.microsoft.com/office/drawing/2014/main" id="{2D0D6FC2-A692-064F-B71E-AF38760EC122}"/>
+                </a:ext>
+              </a:extLst>
+            </p:cNvPr>
+            <p:cNvSpPr/>
+            <p:nvPr/>
+          </p:nvSpPr>
+          <p:spPr>
+            <a:xfrm>
+              <a:off x="10099433" y="3495794"/>
+              <a:ext cx="329689" cy="308788"/>
+            </a:xfrm>
+            <a:custGeom>
+              <a:avLst/>
+              <a:gdLst>
+                <a:gd name="connsiteX0" fmla="*/ 20930 w 329689"/>
+                <a:gd name="connsiteY0" fmla="*/ 59407 h 308788"/>
+                <a:gd name="connsiteX1" fmla="*/ 104057 w 329689"/>
+                <a:gd name="connsiteY1" fmla="*/ 11905 h 308788"/>
+                <a:gd name="connsiteX2" fmla="*/ 270312 w 329689"/>
+                <a:gd name="connsiteY2" fmla="*/ 11905 h 308788"/>
+                <a:gd name="connsiteX3" fmla="*/ 305938 w 329689"/>
+                <a:gd name="connsiteY3" fmla="*/ 47531 h 308788"/>
+                <a:gd name="connsiteX4" fmla="*/ 329689 w 329689"/>
+                <a:gd name="connsiteY4" fmla="*/ 118783 h 308788"/>
+                <a:gd name="connsiteX5" fmla="*/ 317813 w 329689"/>
+                <a:gd name="connsiteY5" fmla="*/ 249412 h 308788"/>
+                <a:gd name="connsiteX6" fmla="*/ 282187 w 329689"/>
+                <a:gd name="connsiteY6" fmla="*/ 261287 h 308788"/>
+                <a:gd name="connsiteX7" fmla="*/ 246561 w 329689"/>
+                <a:gd name="connsiteY7" fmla="*/ 285038 h 308788"/>
+                <a:gd name="connsiteX8" fmla="*/ 163434 w 329689"/>
+                <a:gd name="connsiteY8" fmla="*/ 308788 h 308788"/>
+                <a:gd name="connsiteX9" fmla="*/ 68432 w 329689"/>
+                <a:gd name="connsiteY9" fmla="*/ 296913 h 308788"/>
+                <a:gd name="connsiteX10" fmla="*/ 32806 w 329689"/>
+                <a:gd name="connsiteY10" fmla="*/ 261287 h 308788"/>
+                <a:gd name="connsiteX11" fmla="*/ 9055 w 329689"/>
+                <a:gd name="connsiteY11" fmla="*/ 190035 h 308788"/>
+                <a:gd name="connsiteX12" fmla="*/ 20930 w 329689"/>
+                <a:gd name="connsiteY12" fmla="*/ 59407 h 308788"/>
+              </a:gdLst>
+              <a:ahLst/>
+              <a:cxnLst>
+                <a:cxn ang="0">
+                  <a:pos x="connsiteX0" y="connsiteY0"/>
+                </a:cxn>
+                <a:cxn ang="0">
+                  <a:pos x="connsiteX1" y="connsiteY1"/>
+                </a:cxn>
+                <a:cxn ang="0">
+                  <a:pos x="connsiteX2" y="connsiteY2"/>
+                </a:cxn>
+                <a:cxn ang="0">
+                  <a:pos x="connsiteX3" y="connsiteY3"/>
+                </a:cxn>
+                <a:cxn ang="0">
+                  <a:pos x="connsiteX4" y="connsiteY4"/>
+                </a:cxn>
+                <a:cxn ang="0">
+                  <a:pos x="connsiteX5" y="connsiteY5"/>
+                </a:cxn>
+                <a:cxn ang="0">
+                  <a:pos x="connsiteX6" y="connsiteY6"/>
+                </a:cxn>
+                <a:cxn ang="0">
+                  <a:pos x="connsiteX7" y="connsiteY7"/>
+                </a:cxn>
+                <a:cxn ang="0">
+                  <a:pos x="connsiteX8" y="connsiteY8"/>
+                </a:cxn>
+                <a:cxn ang="0">
+                  <a:pos x="connsiteX9" y="connsiteY9"/>
+                </a:cxn>
+                <a:cxn ang="0">
+                  <a:pos x="connsiteX10" y="connsiteY10"/>
+                </a:cxn>
+                <a:cxn ang="0">
+                  <a:pos x="connsiteX11" y="connsiteY11"/>
+                </a:cxn>
+                <a:cxn ang="0">
+                  <a:pos x="connsiteX12" y="connsiteY12"/>
+                </a:cxn>
+              </a:cxnLst>
+              <a:rect l="l" t="t" r="r" b="b"/>
+              <a:pathLst>
+                <a:path w="329689" h="308788">
+                  <a:moveTo>
+                    <a:pt x="20930" y="59407"/>
+                  </a:moveTo>
+                  <a:cubicBezTo>
+                    <a:pt x="36764" y="29719"/>
+                    <a:pt x="74598" y="24180"/>
+                    <a:pt x="104057" y="11905"/>
+                  </a:cubicBezTo>
+                  <a:cubicBezTo>
+                    <a:pt x="159776" y="-11311"/>
+                    <a:pt x="212291" y="5458"/>
+                    <a:pt x="270312" y="11905"/>
+                  </a:cubicBezTo>
+                  <a:cubicBezTo>
+                    <a:pt x="282187" y="23780"/>
+                    <a:pt x="297782" y="32850"/>
+                    <a:pt x="305938" y="47531"/>
+                  </a:cubicBezTo>
+                  <a:cubicBezTo>
+                    <a:pt x="318096" y="69416"/>
+                    <a:pt x="329689" y="118783"/>
+                    <a:pt x="329689" y="118783"/>
+                  </a:cubicBezTo>
+                  <a:cubicBezTo>
+                    <a:pt x="325730" y="162326"/>
+                    <a:pt x="331639" y="207933"/>
+                    <a:pt x="317813" y="249412"/>
+                  </a:cubicBezTo>
+                  <a:cubicBezTo>
+                    <a:pt x="313855" y="261287"/>
+                    <a:pt x="293383" y="255689"/>
+                    <a:pt x="282187" y="261287"/>
+                  </a:cubicBezTo>
+                  <a:cubicBezTo>
+                    <a:pt x="269421" y="267670"/>
+                    <a:pt x="259327" y="278655"/>
+                    <a:pt x="246561" y="285038"/>
+                  </a:cubicBezTo>
+                  <a:cubicBezTo>
+                    <a:pt x="229526" y="293556"/>
+                    <a:pt x="178652" y="304984"/>
+                    <a:pt x="163434" y="308788"/>
+                  </a:cubicBezTo>
+                  <a:cubicBezTo>
+                    <a:pt x="131767" y="304830"/>
+                    <a:pt x="98424" y="307819"/>
+                    <a:pt x="68432" y="296913"/>
+                  </a:cubicBezTo>
+                  <a:cubicBezTo>
+                    <a:pt x="52649" y="291174"/>
+                    <a:pt x="40962" y="275968"/>
+                    <a:pt x="32806" y="261287"/>
+                  </a:cubicBezTo>
+                  <a:cubicBezTo>
+                    <a:pt x="20648" y="239402"/>
+                    <a:pt x="16972" y="213786"/>
+                    <a:pt x="9055" y="190035"/>
+                  </a:cubicBezTo>
+                  <a:cubicBezTo>
+                    <a:pt x="-10330" y="131879"/>
+                    <a:pt x="5096" y="89095"/>
+                    <a:pt x="20930" y="59407"/>
+                  </a:cubicBezTo>
+                  <a:close/>
+                </a:path>
+              </a:pathLst>
+            </a:custGeom>
+            <a:solidFill>
+              <a:schemeClr val="accent1">
+                <a:lumMod val="60000"/>
+                <a:lumOff val="40000"/>
+              </a:schemeClr>
+            </a:solidFill>
+            <a:ln w="19050">
+              <a:solidFill>
+                <a:schemeClr val="tx1"/>
+              </a:solidFill>
+            </a:ln>
+          </p:spPr>
+          <p:style>
+            <a:lnRef idx="2">
+              <a:schemeClr val="accent1">
+                <a:shade val="50000"/>
+              </a:schemeClr>
+            </a:lnRef>
+            <a:fillRef idx="1">
+              <a:schemeClr val="accent1"/>
+            </a:fillRef>
+            <a:effectRef idx="0">
+              <a:schemeClr val="accent1"/>
+            </a:effectRef>
+            <a:fontRef idx="minor">
+              <a:schemeClr val="lt1"/>
+            </a:fontRef>
+          </p:style>
+          <p:txBody>
+            <a:bodyPr rtlCol="0" anchor="ctr"/>
+            <a:lstStyle/>
+            <a:p>
+              <a:pPr algn="ctr"/>
+              <a:r>
+                <a:rPr kumimoji="1" lang="en-US" altLang="zh-CN" dirty="0"/>
+                <a:t>F</a:t>
+              </a:r>
+              <a:endParaRPr kumimoji="1" lang="zh-CN" altLang="en-US" sz="2000" dirty="0"/>
+            </a:p>
+          </p:txBody>
+        </p:sp>
+        <p:sp>
+          <p:nvSpPr>
+            <p:cNvPr id="108" name="Freeform 107">
+              <a:extLst>
+                <a:ext uri="{FF2B5EF4-FFF2-40B4-BE49-F238E27FC236}">
+                  <a16:creationId xmlns:a16="http://schemas.microsoft.com/office/drawing/2014/main" id="{75B94C21-BD49-0A48-B2C1-0B4D88ADCFA3}"/>
+                </a:ext>
+              </a:extLst>
+            </p:cNvPr>
+            <p:cNvSpPr/>
+            <p:nvPr/>
+          </p:nvSpPr>
+          <p:spPr>
+            <a:xfrm>
+              <a:off x="10497621" y="3494226"/>
+              <a:ext cx="329689" cy="308788"/>
+            </a:xfrm>
+            <a:custGeom>
+              <a:avLst/>
+              <a:gdLst>
+                <a:gd name="connsiteX0" fmla="*/ 20930 w 329689"/>
+                <a:gd name="connsiteY0" fmla="*/ 59407 h 308788"/>
+                <a:gd name="connsiteX1" fmla="*/ 104057 w 329689"/>
+                <a:gd name="connsiteY1" fmla="*/ 11905 h 308788"/>
+                <a:gd name="connsiteX2" fmla="*/ 270312 w 329689"/>
+                <a:gd name="connsiteY2" fmla="*/ 11905 h 308788"/>
+                <a:gd name="connsiteX3" fmla="*/ 305938 w 329689"/>
+                <a:gd name="connsiteY3" fmla="*/ 47531 h 308788"/>
+                <a:gd name="connsiteX4" fmla="*/ 329689 w 329689"/>
+                <a:gd name="connsiteY4" fmla="*/ 118783 h 308788"/>
+                <a:gd name="connsiteX5" fmla="*/ 317813 w 329689"/>
+                <a:gd name="connsiteY5" fmla="*/ 249412 h 308788"/>
+                <a:gd name="connsiteX6" fmla="*/ 282187 w 329689"/>
+                <a:gd name="connsiteY6" fmla="*/ 261287 h 308788"/>
+                <a:gd name="connsiteX7" fmla="*/ 246561 w 329689"/>
+                <a:gd name="connsiteY7" fmla="*/ 285038 h 308788"/>
+                <a:gd name="connsiteX8" fmla="*/ 163434 w 329689"/>
+                <a:gd name="connsiteY8" fmla="*/ 308788 h 308788"/>
+                <a:gd name="connsiteX9" fmla="*/ 68432 w 329689"/>
+                <a:gd name="connsiteY9" fmla="*/ 296913 h 308788"/>
+                <a:gd name="connsiteX10" fmla="*/ 32806 w 329689"/>
+                <a:gd name="connsiteY10" fmla="*/ 261287 h 308788"/>
+                <a:gd name="connsiteX11" fmla="*/ 9055 w 329689"/>
+                <a:gd name="connsiteY11" fmla="*/ 190035 h 308788"/>
+                <a:gd name="connsiteX12" fmla="*/ 20930 w 329689"/>
+                <a:gd name="connsiteY12" fmla="*/ 59407 h 308788"/>
+              </a:gdLst>
+              <a:ahLst/>
+              <a:cxnLst>
+                <a:cxn ang="0">
+                  <a:pos x="connsiteX0" y="connsiteY0"/>
+                </a:cxn>
+                <a:cxn ang="0">
+                  <a:pos x="connsiteX1" y="connsiteY1"/>
+                </a:cxn>
+                <a:cxn ang="0">
+                  <a:pos x="connsiteX2" y="connsiteY2"/>
+                </a:cxn>
+                <a:cxn ang="0">
+                  <a:pos x="connsiteX3" y="connsiteY3"/>
+                </a:cxn>
+                <a:cxn ang="0">
+                  <a:pos x="connsiteX4" y="connsiteY4"/>
+                </a:cxn>
+                <a:cxn ang="0">
+                  <a:pos x="connsiteX5" y="connsiteY5"/>
+                </a:cxn>
+                <a:cxn ang="0">
+                  <a:pos x="connsiteX6" y="connsiteY6"/>
+                </a:cxn>
+                <a:cxn ang="0">
+                  <a:pos x="connsiteX7" y="connsiteY7"/>
+                </a:cxn>
+                <a:cxn ang="0">
+                  <a:pos x="connsiteX8" y="connsiteY8"/>
+                </a:cxn>
+                <a:cxn ang="0">
+                  <a:pos x="connsiteX9" y="connsiteY9"/>
+                </a:cxn>
+                <a:cxn ang="0">
+                  <a:pos x="connsiteX10" y="connsiteY10"/>
+                </a:cxn>
+                <a:cxn ang="0">
+                  <a:pos x="connsiteX11" y="connsiteY11"/>
+                </a:cxn>
+                <a:cxn ang="0">
+                  <a:pos x="connsiteX12" y="connsiteY12"/>
+                </a:cxn>
+              </a:cxnLst>
+              <a:rect l="l" t="t" r="r" b="b"/>
+              <a:pathLst>
+                <a:path w="329689" h="308788">
+                  <a:moveTo>
+                    <a:pt x="20930" y="59407"/>
+                  </a:moveTo>
+                  <a:cubicBezTo>
+                    <a:pt x="36764" y="29719"/>
+                    <a:pt x="74598" y="24180"/>
+                    <a:pt x="104057" y="11905"/>
+                  </a:cubicBezTo>
+                  <a:cubicBezTo>
+                    <a:pt x="159776" y="-11311"/>
+                    <a:pt x="212291" y="5458"/>
+                    <a:pt x="270312" y="11905"/>
+                  </a:cubicBezTo>
+                  <a:cubicBezTo>
+                    <a:pt x="282187" y="23780"/>
+                    <a:pt x="297782" y="32850"/>
+                    <a:pt x="305938" y="47531"/>
+                  </a:cubicBezTo>
+                  <a:cubicBezTo>
+                    <a:pt x="318096" y="69416"/>
+                    <a:pt x="329689" y="118783"/>
+                    <a:pt x="329689" y="118783"/>
+                  </a:cubicBezTo>
+                  <a:cubicBezTo>
+                    <a:pt x="325730" y="162326"/>
+                    <a:pt x="331639" y="207933"/>
+                    <a:pt x="317813" y="249412"/>
+                  </a:cubicBezTo>
+                  <a:cubicBezTo>
+                    <a:pt x="313855" y="261287"/>
+                    <a:pt x="293383" y="255689"/>
+                    <a:pt x="282187" y="261287"/>
+                  </a:cubicBezTo>
+                  <a:cubicBezTo>
+                    <a:pt x="269421" y="267670"/>
+                    <a:pt x="259327" y="278655"/>
+                    <a:pt x="246561" y="285038"/>
+                  </a:cubicBezTo>
+                  <a:cubicBezTo>
+                    <a:pt x="229526" y="293556"/>
+                    <a:pt x="178652" y="304984"/>
+                    <a:pt x="163434" y="308788"/>
+                  </a:cubicBezTo>
+                  <a:cubicBezTo>
+                    <a:pt x="131767" y="304830"/>
+                    <a:pt x="98424" y="307819"/>
+                    <a:pt x="68432" y="296913"/>
+                  </a:cubicBezTo>
+                  <a:cubicBezTo>
+                    <a:pt x="52649" y="291174"/>
+                    <a:pt x="40962" y="275968"/>
+                    <a:pt x="32806" y="261287"/>
+                  </a:cubicBezTo>
+                  <a:cubicBezTo>
+                    <a:pt x="20648" y="239402"/>
+                    <a:pt x="16972" y="213786"/>
+                    <a:pt x="9055" y="190035"/>
+                  </a:cubicBezTo>
+                  <a:cubicBezTo>
+                    <a:pt x="-10330" y="131879"/>
+                    <a:pt x="5096" y="89095"/>
+                    <a:pt x="20930" y="59407"/>
+                  </a:cubicBezTo>
+                  <a:close/>
+                </a:path>
+              </a:pathLst>
+            </a:custGeom>
+            <a:solidFill>
+              <a:schemeClr val="accent1">
+                <a:lumMod val="50000"/>
+              </a:schemeClr>
+            </a:solidFill>
+            <a:ln w="19050">
+              <a:solidFill>
+                <a:schemeClr val="tx1"/>
+              </a:solidFill>
+            </a:ln>
+          </p:spPr>
+          <p:style>
+            <a:lnRef idx="2">
+              <a:schemeClr val="accent1">
+                <a:shade val="50000"/>
+              </a:schemeClr>
+            </a:lnRef>
+            <a:fillRef idx="1">
+              <a:schemeClr val="accent1"/>
+            </a:fillRef>
+            <a:effectRef idx="0">
+              <a:schemeClr val="accent1"/>
+            </a:effectRef>
+            <a:fontRef idx="minor">
+              <a:schemeClr val="lt1"/>
+            </a:fontRef>
+          </p:style>
+          <p:txBody>
+            <a:bodyPr rtlCol="0" anchor="ctr"/>
+            <a:lstStyle/>
+            <a:p>
+              <a:pPr algn="ctr"/>
+              <a:r>
+                <a:rPr kumimoji="1" lang="en-US" altLang="zh-CN" dirty="0"/>
+                <a:t>F</a:t>
+              </a:r>
+              <a:endParaRPr kumimoji="1" lang="zh-CN" altLang="en-US" sz="2000" dirty="0"/>
+            </a:p>
+          </p:txBody>
+        </p:sp>
+        <p:sp>
+          <p:nvSpPr>
+            <p:cNvPr id="119" name="Freeform 118">
+              <a:extLst>
+                <a:ext uri="{FF2B5EF4-FFF2-40B4-BE49-F238E27FC236}">
+                  <a16:creationId xmlns:a16="http://schemas.microsoft.com/office/drawing/2014/main" id="{70DF751C-7DBC-CB48-B1AB-2E91081EEAA9}"/>
+                </a:ext>
+              </a:extLst>
+            </p:cNvPr>
+            <p:cNvSpPr/>
+            <p:nvPr/>
+          </p:nvSpPr>
+          <p:spPr>
+            <a:xfrm>
+              <a:off x="8975304" y="3476393"/>
+              <a:ext cx="329689" cy="109673"/>
+            </a:xfrm>
+            <a:custGeom>
+              <a:avLst/>
+              <a:gdLst>
+                <a:gd name="connsiteX0" fmla="*/ 0 w 387928"/>
+                <a:gd name="connsiteY0" fmla="*/ 83941 h 83941"/>
+                <a:gd name="connsiteX1" fmla="*/ 166255 w 387928"/>
+                <a:gd name="connsiteY1" fmla="*/ 814 h 83941"/>
+                <a:gd name="connsiteX2" fmla="*/ 387928 w 387928"/>
+                <a:gd name="connsiteY2" fmla="*/ 42377 h 83941"/>
+              </a:gdLst>
+              <a:ahLst/>
+              <a:cxnLst>
+                <a:cxn ang="0">
+                  <a:pos x="connsiteX0" y="connsiteY0"/>
+                </a:cxn>
+                <a:cxn ang="0">
+                  <a:pos x="connsiteX1" y="connsiteY1"/>
+                </a:cxn>
+                <a:cxn ang="0">
+                  <a:pos x="connsiteX2" y="connsiteY2"/>
+                </a:cxn>
+              </a:cxnLst>
+              <a:rect l="l" t="t" r="r" b="b"/>
+              <a:pathLst>
+                <a:path w="387928" h="83941">
+                  <a:moveTo>
+                    <a:pt x="0" y="83941"/>
+                  </a:moveTo>
+                  <a:cubicBezTo>
+                    <a:pt x="50800" y="45841"/>
+                    <a:pt x="101600" y="7741"/>
+                    <a:pt x="166255" y="814"/>
+                  </a:cubicBezTo>
+                  <a:cubicBezTo>
+                    <a:pt x="230910" y="-6113"/>
+                    <a:pt x="378692" y="33141"/>
+                    <a:pt x="387928" y="42377"/>
+                  </a:cubicBezTo>
+                </a:path>
+              </a:pathLst>
+            </a:custGeom>
+            <a:noFill/>
+            <a:ln>
+              <a:solidFill>
+                <a:schemeClr val="tx1"/>
+              </a:solidFill>
+            </a:ln>
+          </p:spPr>
+          <p:style>
+            <a:lnRef idx="2">
+              <a:schemeClr val="accent1">
+                <a:shade val="50000"/>
+              </a:schemeClr>
+            </a:lnRef>
+            <a:fillRef idx="1">
+              <a:schemeClr val="accent1"/>
+            </a:fillRef>
+            <a:effectRef idx="0">
+              <a:schemeClr val="accent1"/>
+            </a:effectRef>
+            <a:fontRef idx="minor">
+              <a:schemeClr val="lt1"/>
+            </a:fontRef>
+          </p:style>
+          <p:txBody>
+            <a:bodyPr rtlCol="0" anchor="ctr"/>
+            <a:lstStyle/>
+            <a:p>
+              <a:pPr algn="ctr"/>
+              <a:endParaRPr kumimoji="1" lang="zh-CN" altLang="en-US"/>
+            </a:p>
+          </p:txBody>
+        </p:sp>
+        <p:sp>
+          <p:nvSpPr>
+            <p:cNvPr id="126" name="Freeform 125">
+              <a:extLst>
+                <a:ext uri="{FF2B5EF4-FFF2-40B4-BE49-F238E27FC236}">
+                  <a16:creationId xmlns:a16="http://schemas.microsoft.com/office/drawing/2014/main" id="{15F3E2C7-2744-C04F-9CAA-EA2E8D331AF1}"/>
+                </a:ext>
+              </a:extLst>
+            </p:cNvPr>
+            <p:cNvSpPr/>
+            <p:nvPr/>
+          </p:nvSpPr>
+          <p:spPr>
+            <a:xfrm rot="10800000">
+              <a:off x="9442379" y="3792096"/>
+              <a:ext cx="336654" cy="45719"/>
+            </a:xfrm>
+            <a:custGeom>
+              <a:avLst/>
+              <a:gdLst>
+                <a:gd name="connsiteX0" fmla="*/ 0 w 387928"/>
+                <a:gd name="connsiteY0" fmla="*/ 83941 h 83941"/>
+                <a:gd name="connsiteX1" fmla="*/ 166255 w 387928"/>
+                <a:gd name="connsiteY1" fmla="*/ 814 h 83941"/>
+                <a:gd name="connsiteX2" fmla="*/ 387928 w 387928"/>
+                <a:gd name="connsiteY2" fmla="*/ 42377 h 83941"/>
+              </a:gdLst>
+              <a:ahLst/>
+              <a:cxnLst>
+                <a:cxn ang="0">
+                  <a:pos x="connsiteX0" y="connsiteY0"/>
+                </a:cxn>
+                <a:cxn ang="0">
+                  <a:pos x="connsiteX1" y="connsiteY1"/>
+                </a:cxn>
+                <a:cxn ang="0">
+                  <a:pos x="connsiteX2" y="connsiteY2"/>
+                </a:cxn>
+              </a:cxnLst>
+              <a:rect l="l" t="t" r="r" b="b"/>
+              <a:pathLst>
+                <a:path w="387928" h="83941">
+                  <a:moveTo>
+                    <a:pt x="0" y="83941"/>
+                  </a:moveTo>
+                  <a:cubicBezTo>
+                    <a:pt x="50800" y="45841"/>
+                    <a:pt x="101600" y="7741"/>
+                    <a:pt x="166255" y="814"/>
+                  </a:cubicBezTo>
+                  <a:cubicBezTo>
+                    <a:pt x="230910" y="-6113"/>
+                    <a:pt x="378692" y="33141"/>
+                    <a:pt x="387928" y="42377"/>
+                  </a:cubicBezTo>
+                </a:path>
+              </a:pathLst>
+            </a:custGeom>
+            <a:noFill/>
+            <a:ln>
+              <a:solidFill>
+                <a:schemeClr val="tx1"/>
+              </a:solidFill>
+            </a:ln>
+          </p:spPr>
+          <p:style>
+            <a:lnRef idx="2">
+              <a:schemeClr val="accent1">
+                <a:shade val="50000"/>
+              </a:schemeClr>
+            </a:lnRef>
+            <a:fillRef idx="1">
+              <a:schemeClr val="accent1"/>
+            </a:fillRef>
+            <a:effectRef idx="0">
+              <a:schemeClr val="accent1"/>
+            </a:effectRef>
+            <a:fontRef idx="minor">
+              <a:schemeClr val="lt1"/>
+            </a:fontRef>
+          </p:style>
+          <p:txBody>
+            <a:bodyPr rtlCol="0" anchor="ctr"/>
+            <a:lstStyle/>
+            <a:p>
+              <a:pPr algn="ctr"/>
+              <a:endParaRPr kumimoji="1" lang="zh-CN" altLang="en-US"/>
+            </a:p>
+          </p:txBody>
+        </p:sp>
+        <p:sp>
+          <p:nvSpPr>
+            <p:cNvPr id="127" name="Freeform 126">
+              <a:extLst>
+                <a:ext uri="{FF2B5EF4-FFF2-40B4-BE49-F238E27FC236}">
+                  <a16:creationId xmlns:a16="http://schemas.microsoft.com/office/drawing/2014/main" id="{94CA7327-020A-F24C-91A0-E22A413D135D}"/>
+                </a:ext>
+              </a:extLst>
+            </p:cNvPr>
+            <p:cNvSpPr/>
+            <p:nvPr/>
+          </p:nvSpPr>
+          <p:spPr>
+            <a:xfrm rot="432198">
+              <a:off x="9871220" y="3431406"/>
+              <a:ext cx="387928" cy="83941"/>
+            </a:xfrm>
+            <a:custGeom>
+              <a:avLst/>
+              <a:gdLst>
+                <a:gd name="connsiteX0" fmla="*/ 0 w 387928"/>
+                <a:gd name="connsiteY0" fmla="*/ 83941 h 83941"/>
+                <a:gd name="connsiteX1" fmla="*/ 166255 w 387928"/>
+                <a:gd name="connsiteY1" fmla="*/ 814 h 83941"/>
+                <a:gd name="connsiteX2" fmla="*/ 387928 w 387928"/>
+                <a:gd name="connsiteY2" fmla="*/ 42377 h 83941"/>
+              </a:gdLst>
+              <a:ahLst/>
+              <a:cxnLst>
+                <a:cxn ang="0">
+                  <a:pos x="connsiteX0" y="connsiteY0"/>
+                </a:cxn>
+                <a:cxn ang="0">
+                  <a:pos x="connsiteX1" y="connsiteY1"/>
+                </a:cxn>
+                <a:cxn ang="0">
+                  <a:pos x="connsiteX2" y="connsiteY2"/>
+                </a:cxn>
+              </a:cxnLst>
+              <a:rect l="l" t="t" r="r" b="b"/>
+              <a:pathLst>
+                <a:path w="387928" h="83941">
+                  <a:moveTo>
+                    <a:pt x="0" y="83941"/>
+                  </a:moveTo>
+                  <a:cubicBezTo>
+                    <a:pt x="50800" y="45841"/>
+                    <a:pt x="101600" y="7741"/>
+                    <a:pt x="166255" y="814"/>
+                  </a:cubicBezTo>
+                  <a:cubicBezTo>
+                    <a:pt x="230910" y="-6113"/>
+                    <a:pt x="378692" y="33141"/>
+                    <a:pt x="387928" y="42377"/>
+                  </a:cubicBezTo>
+                </a:path>
+              </a:pathLst>
+            </a:custGeom>
+            <a:noFill/>
+            <a:ln>
+              <a:solidFill>
+                <a:schemeClr val="tx1"/>
+              </a:solidFill>
+            </a:ln>
+          </p:spPr>
+          <p:style>
+            <a:lnRef idx="2">
+              <a:schemeClr val="accent1">
+                <a:shade val="50000"/>
+              </a:schemeClr>
+            </a:lnRef>
+            <a:fillRef idx="1">
+              <a:schemeClr val="accent1"/>
+            </a:fillRef>
+            <a:effectRef idx="0">
+              <a:schemeClr val="accent1"/>
+            </a:effectRef>
+            <a:fontRef idx="minor">
+              <a:schemeClr val="lt1"/>
+            </a:fontRef>
+          </p:style>
+          <p:txBody>
+            <a:bodyPr rtlCol="0" anchor="ctr"/>
+            <a:lstStyle/>
+            <a:p>
+              <a:pPr algn="ctr"/>
+              <a:endParaRPr kumimoji="1" lang="zh-CN" altLang="en-US"/>
+            </a:p>
+          </p:txBody>
+        </p:sp>
+        <p:sp>
+          <p:nvSpPr>
+            <p:cNvPr id="128" name="Freeform 127">
+              <a:extLst>
+                <a:ext uri="{FF2B5EF4-FFF2-40B4-BE49-F238E27FC236}">
+                  <a16:creationId xmlns:a16="http://schemas.microsoft.com/office/drawing/2014/main" id="{FA2DCF1A-5F71-5B49-9D99-A72C211B86C6}"/>
+                </a:ext>
+              </a:extLst>
+            </p:cNvPr>
+            <p:cNvSpPr/>
+            <p:nvPr/>
+          </p:nvSpPr>
+          <p:spPr>
+            <a:xfrm rot="10800000">
+              <a:off x="10285727" y="3791884"/>
+              <a:ext cx="336654" cy="45719"/>
+            </a:xfrm>
+            <a:custGeom>
+              <a:avLst/>
+              <a:gdLst>
+                <a:gd name="connsiteX0" fmla="*/ 0 w 387928"/>
+                <a:gd name="connsiteY0" fmla="*/ 83941 h 83941"/>
+                <a:gd name="connsiteX1" fmla="*/ 166255 w 387928"/>
+                <a:gd name="connsiteY1" fmla="*/ 814 h 83941"/>
+                <a:gd name="connsiteX2" fmla="*/ 387928 w 387928"/>
+                <a:gd name="connsiteY2" fmla="*/ 42377 h 83941"/>
+              </a:gdLst>
+              <a:ahLst/>
+              <a:cxnLst>
+                <a:cxn ang="0">
+                  <a:pos x="connsiteX0" y="connsiteY0"/>
+                </a:cxn>
+                <a:cxn ang="0">
+                  <a:pos x="connsiteX1" y="connsiteY1"/>
+                </a:cxn>
+                <a:cxn ang="0">
+                  <a:pos x="connsiteX2" y="connsiteY2"/>
+                </a:cxn>
+              </a:cxnLst>
+              <a:rect l="l" t="t" r="r" b="b"/>
+              <a:pathLst>
+                <a:path w="387928" h="83941">
+                  <a:moveTo>
+                    <a:pt x="0" y="83941"/>
+                  </a:moveTo>
+                  <a:cubicBezTo>
+                    <a:pt x="50800" y="45841"/>
+                    <a:pt x="101600" y="7741"/>
+                    <a:pt x="166255" y="814"/>
+                  </a:cubicBezTo>
+                  <a:cubicBezTo>
+                    <a:pt x="230910" y="-6113"/>
+                    <a:pt x="378692" y="33141"/>
+                    <a:pt x="387928" y="42377"/>
+                  </a:cubicBezTo>
+                </a:path>
+              </a:pathLst>
+            </a:custGeom>
+            <a:noFill/>
+            <a:ln>
+              <a:solidFill>
+                <a:schemeClr val="tx1"/>
+              </a:solidFill>
+            </a:ln>
+          </p:spPr>
+          <p:style>
+            <a:lnRef idx="2">
+              <a:schemeClr val="accent1">
+                <a:shade val="50000"/>
+              </a:schemeClr>
+            </a:lnRef>
+            <a:fillRef idx="1">
+              <a:schemeClr val="accent1"/>
+            </a:fillRef>
+            <a:effectRef idx="0">
+              <a:schemeClr val="accent1"/>
+            </a:effectRef>
+            <a:fontRef idx="minor">
+              <a:schemeClr val="lt1"/>
+            </a:fontRef>
+          </p:style>
+          <p:txBody>
+            <a:bodyPr rtlCol="0" anchor="ctr"/>
+            <a:lstStyle/>
+            <a:p>
+              <a:pPr algn="ctr"/>
+              <a:endParaRPr kumimoji="1" lang="zh-CN" altLang="en-US"/>
+            </a:p>
+          </p:txBody>
+        </p:sp>
+      </p:grpSp>
+      <p:sp>
+        <p:nvSpPr>
+          <p:cNvPr id="129" name="Freeform 128">
+            <a:extLst>
+              <a:ext uri="{FF2B5EF4-FFF2-40B4-BE49-F238E27FC236}">
+                <a16:creationId xmlns:a16="http://schemas.microsoft.com/office/drawing/2014/main" id="{B1515E19-3718-7D46-8291-3045F4AAC3EE}"/>
+              </a:ext>
+            </a:extLst>
+          </p:cNvPr>
+          <p:cNvSpPr/>
+          <p:nvPr/>
+        </p:nvSpPr>
+        <p:spPr>
+          <a:xfrm rot="20361174" flipV="1">
+            <a:off x="8250201" y="4521727"/>
+            <a:ext cx="389769" cy="45719"/>
+          </a:xfrm>
+          <a:custGeom>
+            <a:avLst/>
+            <a:gdLst>
+              <a:gd name="connsiteX0" fmla="*/ 0 w 387928"/>
+              <a:gd name="connsiteY0" fmla="*/ 83941 h 83941"/>
+              <a:gd name="connsiteX1" fmla="*/ 166255 w 387928"/>
+              <a:gd name="connsiteY1" fmla="*/ 814 h 83941"/>
+              <a:gd name="connsiteX2" fmla="*/ 387928 w 387928"/>
+              <a:gd name="connsiteY2" fmla="*/ 42377 h 83941"/>
+            </a:gdLst>
+            <a:ahLst/>
+            <a:cxnLst>
+              <a:cxn ang="0">
+                <a:pos x="connsiteX0" y="connsiteY0"/>
+              </a:cxn>
+              <a:cxn ang="0">
+                <a:pos x="connsiteX1" y="connsiteY1"/>
+              </a:cxn>
+              <a:cxn ang="0">
+                <a:pos x="connsiteX2" y="connsiteY2"/>
+              </a:cxn>
+            </a:cxnLst>
+            <a:rect l="l" t="t" r="r" b="b"/>
+            <a:pathLst>
+              <a:path w="387928" h="83941">
+                <a:moveTo>
+                  <a:pt x="0" y="83941"/>
+                </a:moveTo>
+                <a:cubicBezTo>
+                  <a:pt x="50800" y="45841"/>
+                  <a:pt x="101600" y="7741"/>
+                  <a:pt x="166255" y="814"/>
+                </a:cubicBezTo>
+                <a:cubicBezTo>
+                  <a:pt x="230910" y="-6113"/>
+                  <a:pt x="378692" y="33141"/>
+                  <a:pt x="387928" y="42377"/>
+                </a:cubicBezTo>
+              </a:path>
+            </a:pathLst>
+          </a:custGeom>
+          <a:noFill/>
+          <a:ln>
+            <a:solidFill>
+              <a:schemeClr val="tx1"/>
+            </a:solidFill>
+          </a:ln>
+        </p:spPr>
+        <p:style>
+          <a:lnRef idx="2">
+            <a:schemeClr val="accent1">
+              <a:shade val="50000"/>
+            </a:schemeClr>
+          </a:lnRef>
+          <a:fillRef idx="1">
+            <a:schemeClr val="accent1"/>
+          </a:fillRef>
+          <a:effectRef idx="0">
+            <a:schemeClr val="accent1"/>
+          </a:effectRef>
+          <a:fontRef idx="minor">
+            <a:schemeClr val="lt1"/>
+          </a:fontRef>
+        </p:style>
+        <p:txBody>
+          <a:bodyPr rtlCol="0" anchor="ctr"/>
+          <a:lstStyle/>
+          <a:p>
+            <a:pPr algn="ctr"/>
+            <a:endParaRPr kumimoji="1" lang="zh-CN" altLang="en-US"/>
+          </a:p>
+        </p:txBody>
+      </p:sp>
+      <p:sp>
+        <p:nvSpPr>
+          <p:cNvPr id="130" name="Freeform 129">
+            <a:extLst>
+              <a:ext uri="{FF2B5EF4-FFF2-40B4-BE49-F238E27FC236}">
+                <a16:creationId xmlns:a16="http://schemas.microsoft.com/office/drawing/2014/main" id="{0279E90D-F14F-3D4B-AAA8-0240AA44FAEF}"/>
+              </a:ext>
+            </a:extLst>
+          </p:cNvPr>
+          <p:cNvSpPr/>
+          <p:nvPr/>
+        </p:nvSpPr>
+        <p:spPr>
+          <a:xfrm rot="20361174" flipV="1">
+            <a:off x="7778563" y="4583421"/>
+            <a:ext cx="182513" cy="45719"/>
+          </a:xfrm>
+          <a:custGeom>
+            <a:avLst/>
+            <a:gdLst>
+              <a:gd name="connsiteX0" fmla="*/ 0 w 387928"/>
+              <a:gd name="connsiteY0" fmla="*/ 83941 h 83941"/>
+              <a:gd name="connsiteX1" fmla="*/ 166255 w 387928"/>
+              <a:gd name="connsiteY1" fmla="*/ 814 h 83941"/>
+              <a:gd name="connsiteX2" fmla="*/ 387928 w 387928"/>
+              <a:gd name="connsiteY2" fmla="*/ 42377 h 83941"/>
+            </a:gdLst>
+            <a:ahLst/>
+            <a:cxnLst>
+              <a:cxn ang="0">
+                <a:pos x="connsiteX0" y="connsiteY0"/>
+              </a:cxn>
+              <a:cxn ang="0">
+                <a:pos x="connsiteX1" y="connsiteY1"/>
+              </a:cxn>
+              <a:cxn ang="0">
+                <a:pos x="connsiteX2" y="connsiteY2"/>
+              </a:cxn>
+            </a:cxnLst>
+            <a:rect l="l" t="t" r="r" b="b"/>
+            <a:pathLst>
+              <a:path w="387928" h="83941">
+                <a:moveTo>
+                  <a:pt x="0" y="83941"/>
+                </a:moveTo>
+                <a:cubicBezTo>
+                  <a:pt x="50800" y="45841"/>
+                  <a:pt x="101600" y="7741"/>
+                  <a:pt x="166255" y="814"/>
+                </a:cubicBezTo>
+                <a:cubicBezTo>
+                  <a:pt x="230910" y="-6113"/>
+                  <a:pt x="378692" y="33141"/>
+                  <a:pt x="387928" y="42377"/>
+                </a:cubicBezTo>
+              </a:path>
+            </a:pathLst>
+          </a:custGeom>
+          <a:noFill/>
+          <a:ln>
+            <a:solidFill>
+              <a:schemeClr val="tx1"/>
+            </a:solidFill>
+          </a:ln>
+        </p:spPr>
+        <p:style>
+          <a:lnRef idx="2">
+            <a:schemeClr val="accent1">
+              <a:shade val="50000"/>
+            </a:schemeClr>
+          </a:lnRef>
+          <a:fillRef idx="1">
+            <a:schemeClr val="accent1"/>
+          </a:fillRef>
+          <a:effectRef idx="0">
+            <a:schemeClr val="accent1"/>
+          </a:effectRef>
+          <a:fontRef idx="minor">
+            <a:schemeClr val="lt1"/>
+          </a:fontRef>
+        </p:style>
+        <p:txBody>
+          <a:bodyPr rtlCol="0" anchor="ctr"/>
+          <a:lstStyle/>
+          <a:p>
+            <a:pPr algn="ctr"/>
+            <a:endParaRPr kumimoji="1" lang="zh-CN" altLang="en-US"/>
+          </a:p>
+        </p:txBody>
+      </p:sp>
+      <p:sp>
+        <p:nvSpPr>
+          <p:cNvPr id="131" name="Freeform 130">
+            <a:extLst>
+              <a:ext uri="{FF2B5EF4-FFF2-40B4-BE49-F238E27FC236}">
+                <a16:creationId xmlns:a16="http://schemas.microsoft.com/office/drawing/2014/main" id="{5E5A0974-9BFD-4849-BD33-82FF5E8557ED}"/>
+              </a:ext>
+            </a:extLst>
+          </p:cNvPr>
+          <p:cNvSpPr/>
+          <p:nvPr/>
+        </p:nvSpPr>
+        <p:spPr>
+          <a:xfrm rot="9967244" flipV="1">
+            <a:off x="7393245" y="4297934"/>
+            <a:ext cx="189718" cy="75674"/>
+          </a:xfrm>
+          <a:custGeom>
+            <a:avLst/>
+            <a:gdLst>
+              <a:gd name="connsiteX0" fmla="*/ 0 w 387928"/>
+              <a:gd name="connsiteY0" fmla="*/ 83941 h 83941"/>
+              <a:gd name="connsiteX1" fmla="*/ 166255 w 387928"/>
+              <a:gd name="connsiteY1" fmla="*/ 814 h 83941"/>
+              <a:gd name="connsiteX2" fmla="*/ 387928 w 387928"/>
+              <a:gd name="connsiteY2" fmla="*/ 42377 h 83941"/>
+            </a:gdLst>
+            <a:ahLst/>
+            <a:cxnLst>
+              <a:cxn ang="0">
+                <a:pos x="connsiteX0" y="connsiteY0"/>
+              </a:cxn>
+              <a:cxn ang="0">
+                <a:pos x="connsiteX1" y="connsiteY1"/>
+              </a:cxn>
+              <a:cxn ang="0">
+                <a:pos x="connsiteX2" y="connsiteY2"/>
+              </a:cxn>
+            </a:cxnLst>
+            <a:rect l="l" t="t" r="r" b="b"/>
+            <a:pathLst>
+              <a:path w="387928" h="83941">
+                <a:moveTo>
+                  <a:pt x="0" y="83941"/>
+                </a:moveTo>
+                <a:cubicBezTo>
+                  <a:pt x="50800" y="45841"/>
+                  <a:pt x="101600" y="7741"/>
+                  <a:pt x="166255" y="814"/>
+                </a:cubicBezTo>
+                <a:cubicBezTo>
+                  <a:pt x="230910" y="-6113"/>
+                  <a:pt x="378692" y="33141"/>
+                  <a:pt x="387928" y="42377"/>
+                </a:cubicBezTo>
+              </a:path>
+            </a:pathLst>
+          </a:custGeom>
+          <a:noFill/>
+          <a:ln>
+            <a:solidFill>
+              <a:schemeClr val="tx1"/>
+            </a:solidFill>
+          </a:ln>
+        </p:spPr>
+        <p:style>
+          <a:lnRef idx="2">
+            <a:schemeClr val="accent1">
+              <a:shade val="50000"/>
+            </a:schemeClr>
+          </a:lnRef>
+          <a:fillRef idx="1">
+            <a:schemeClr val="accent1"/>
+          </a:fillRef>
+          <a:effectRef idx="0">
+            <a:schemeClr val="accent1"/>
+          </a:effectRef>
+          <a:fontRef idx="minor">
+            <a:schemeClr val="lt1"/>
+          </a:fontRef>
+        </p:style>
+        <p:txBody>
+          <a:bodyPr rtlCol="0" anchor="ctr"/>
+          <a:lstStyle/>
+          <a:p>
+            <a:pPr algn="ctr"/>
+            <a:endParaRPr kumimoji="1" lang="zh-CN" altLang="en-US"/>
+          </a:p>
+        </p:txBody>
+      </p:sp>
+      <p:sp>
+        <p:nvSpPr>
+          <p:cNvPr id="132" name="Freeform 131">
+            <a:extLst>
+              <a:ext uri="{FF2B5EF4-FFF2-40B4-BE49-F238E27FC236}">
+                <a16:creationId xmlns:a16="http://schemas.microsoft.com/office/drawing/2014/main" id="{57FDE7CF-26EF-D041-9020-611BE55EF96D}"/>
+              </a:ext>
+            </a:extLst>
+          </p:cNvPr>
+          <p:cNvSpPr/>
+          <p:nvPr/>
+        </p:nvSpPr>
+        <p:spPr>
+          <a:xfrm rot="20361174" flipV="1">
+            <a:off x="6966106" y="4583421"/>
+            <a:ext cx="182513" cy="45719"/>
+          </a:xfrm>
+          <a:custGeom>
+            <a:avLst/>
+            <a:gdLst>
+              <a:gd name="connsiteX0" fmla="*/ 0 w 387928"/>
+              <a:gd name="connsiteY0" fmla="*/ 83941 h 83941"/>
+              <a:gd name="connsiteX1" fmla="*/ 166255 w 387928"/>
+              <a:gd name="connsiteY1" fmla="*/ 814 h 83941"/>
+              <a:gd name="connsiteX2" fmla="*/ 387928 w 387928"/>
+              <a:gd name="connsiteY2" fmla="*/ 42377 h 83941"/>
+            </a:gdLst>
+            <a:ahLst/>
+            <a:cxnLst>
+              <a:cxn ang="0">
+                <a:pos x="connsiteX0" y="connsiteY0"/>
+              </a:cxn>
+              <a:cxn ang="0">
+                <a:pos x="connsiteX1" y="connsiteY1"/>
+              </a:cxn>
+              <a:cxn ang="0">
+                <a:pos x="connsiteX2" y="connsiteY2"/>
+              </a:cxn>
+            </a:cxnLst>
+            <a:rect l="l" t="t" r="r" b="b"/>
+            <a:pathLst>
+              <a:path w="387928" h="83941">
+                <a:moveTo>
+                  <a:pt x="0" y="83941"/>
+                </a:moveTo>
+                <a:cubicBezTo>
+                  <a:pt x="50800" y="45841"/>
+                  <a:pt x="101600" y="7741"/>
+                  <a:pt x="166255" y="814"/>
+                </a:cubicBezTo>
+                <a:cubicBezTo>
+                  <a:pt x="230910" y="-6113"/>
+                  <a:pt x="378692" y="33141"/>
+                  <a:pt x="387928" y="42377"/>
+                </a:cubicBezTo>
+              </a:path>
+            </a:pathLst>
+          </a:custGeom>
+          <a:noFill/>
+          <a:ln>
+            <a:solidFill>
+              <a:schemeClr val="tx1"/>
+            </a:solidFill>
+          </a:ln>
+        </p:spPr>
+        <p:style>
+          <a:lnRef idx="2">
+            <a:schemeClr val="accent1">
+              <a:shade val="50000"/>
+            </a:schemeClr>
+          </a:lnRef>
+          <a:fillRef idx="1">
+            <a:schemeClr val="accent1"/>
+          </a:fillRef>
+          <a:effectRef idx="0">
+            <a:schemeClr val="accent1"/>
+          </a:effectRef>
+          <a:fontRef idx="minor">
+            <a:schemeClr val="lt1"/>
+          </a:fontRef>
+        </p:style>
+        <p:txBody>
+          <a:bodyPr rtlCol="0" anchor="ctr"/>
+          <a:lstStyle/>
+          <a:p>
+            <a:pPr algn="ctr"/>
+            <a:endParaRPr kumimoji="1" lang="zh-CN" altLang="en-US"/>
+          </a:p>
+        </p:txBody>
+      </p:sp>
+      <p:sp>
+        <p:nvSpPr>
+          <p:cNvPr id="134" name="TextBox 133">
+            <a:extLst>
+              <a:ext uri="{FF2B5EF4-FFF2-40B4-BE49-F238E27FC236}">
+                <a16:creationId xmlns:a16="http://schemas.microsoft.com/office/drawing/2014/main" id="{6ABD7915-0CFB-2B40-A032-00F56C3B775D}"/>
+              </a:ext>
+            </a:extLst>
+          </p:cNvPr>
+          <p:cNvSpPr txBox="1"/>
+          <p:nvPr/>
+        </p:nvSpPr>
+        <p:spPr>
+          <a:xfrm>
+            <a:off x="4205437" y="4804459"/>
+            <a:ext cx="4935882" cy="307777"/>
+          </a:xfrm>
+          <a:prstGeom prst="rect">
+            <a:avLst/>
+          </a:prstGeom>
+          <a:noFill/>
+        </p:spPr>
+        <p:txBody>
+          <a:bodyPr wrap="square" rtlCol="0">
+            <a:spAutoFit/>
+          </a:bodyPr>
+          <a:lstStyle/>
+          <a:p>
+            <a:pPr algn="ctr"/>
+            <a:r>
+              <a:rPr kumimoji="1" lang="en-US" altLang="zh-CN" sz="1400" b="1" dirty="0"/>
+              <a:t>Fig. 2 </a:t>
+            </a:r>
+            <a:r>
+              <a:rPr lang="en-US" sz="1400" b="0" i="0" u="none" strike="noStrike" dirty="0">
+                <a:solidFill>
+                  <a:srgbClr val="111111"/>
+                </a:solidFill>
+                <a:effectLst/>
+                <a:latin typeface="system-ui"/>
+              </a:rPr>
+              <a:t>Schematic diagram</a:t>
+            </a:r>
+            <a:r>
+              <a:rPr lang="zh-CN" altLang="en-US" sz="1400" b="0" i="0" u="none" strike="noStrike" dirty="0">
+                <a:solidFill>
+                  <a:srgbClr val="111111"/>
+                </a:solidFill>
+                <a:effectLst/>
+                <a:latin typeface="system-ui"/>
+              </a:rPr>
+              <a:t> </a:t>
+            </a:r>
+            <a:r>
+              <a:rPr lang="en-US" altLang="zh-CN" sz="1400" b="0" i="0" u="none" strike="noStrike" dirty="0">
+                <a:solidFill>
+                  <a:srgbClr val="111111"/>
+                </a:solidFill>
+                <a:effectLst/>
+                <a:latin typeface="system-ui"/>
+              </a:rPr>
+              <a:t>of ZFN.</a:t>
+            </a:r>
+            <a:endParaRPr kumimoji="1" lang="en-US" altLang="zh-CN" sz="1400" dirty="0"/>
+          </a:p>
+        </p:txBody>
+      </p:sp>
+      <p:sp>
+        <p:nvSpPr>
+          <p:cNvPr id="1024" name="Lightning Bolt 1023">
+            <a:extLst>
+              <a:ext uri="{FF2B5EF4-FFF2-40B4-BE49-F238E27FC236}">
+                <a16:creationId xmlns:a16="http://schemas.microsoft.com/office/drawing/2014/main" id="{038DC9A1-1DE9-084C-9250-EF79E80B2E0E}"/>
+              </a:ext>
+            </a:extLst>
+          </p:cNvPr>
+          <p:cNvSpPr/>
+          <p:nvPr/>
+        </p:nvSpPr>
+        <p:spPr>
+          <a:xfrm flipH="1">
+            <a:off x="8781963" y="3241008"/>
+            <a:ext cx="445533" cy="810767"/>
+          </a:xfrm>
+          <a:prstGeom prst="lightningBolt">
+            <a:avLst/>
+          </a:prstGeom>
+          <a:solidFill>
+            <a:schemeClr val="accent4">
+              <a:lumMod val="60000"/>
+              <a:lumOff val="40000"/>
+            </a:schemeClr>
+          </a:solidFill>
+          <a:ln w="19050">
+            <a:solidFill>
+              <a:schemeClr val="tx1"/>
+            </a:solidFill>
+          </a:ln>
+        </p:spPr>
+        <p:style>
+          <a:lnRef idx="2">
+            <a:schemeClr val="accent1">
+              <a:shade val="50000"/>
+            </a:schemeClr>
+          </a:lnRef>
+          <a:fillRef idx="1">
+            <a:schemeClr val="accent1"/>
+          </a:fillRef>
+          <a:effectRef idx="0">
+            <a:schemeClr val="accent1"/>
+          </a:effectRef>
+          <a:fontRef idx="minor">
+            <a:schemeClr val="lt1"/>
+          </a:fontRef>
+        </p:style>
+        <p:txBody>
+          <a:bodyPr rtlCol="0" anchor="ctr"/>
+          <a:lstStyle/>
+          <a:p>
+            <a:pPr algn="ctr"/>
+            <a:endParaRPr kumimoji="1" lang="zh-CN" altLang="en-US"/>
           </a:p>
         </p:txBody>
       </p:sp>
@@ -9700,7 +15629,7 @@
         <p:spPr>
           <a:xfrm>
             <a:off x="325821" y="464150"/>
-            <a:ext cx="830677" cy="584775"/>
+            <a:ext cx="2925609" cy="584775"/>
           </a:xfrm>
           <a:prstGeom prst="rect">
             <a:avLst/>
@@ -9714,8 +15643,8 @@
           <a:lstStyle/>
           <a:p>
             <a:r>
-              <a:rPr kumimoji="1" lang="en-US" altLang="zh-CN" sz="3200" dirty="0"/>
-              <a:t>ZFN</a:t>
+              <a:rPr kumimoji="1" lang="en-CN" altLang="zh-CN" sz="3200" dirty="0"/>
+              <a:t>Problems of ZFN</a:t>
             </a:r>
           </a:p>
         </p:txBody>
@@ -9888,10 +15817,10 @@
       </p:grpSp>
       <p:sp>
         <p:nvSpPr>
-          <p:cNvPr id="11" name="TextBox 10">
-            <a:extLst>
-              <a:ext uri="{FF2B5EF4-FFF2-40B4-BE49-F238E27FC236}">
-                <a16:creationId xmlns:a16="http://schemas.microsoft.com/office/drawing/2014/main" id="{805CDEA0-63AA-8942-8FB1-8E48524D0D9B}"/>
+          <p:cNvPr id="29" name="TextBox 28">
+            <a:extLst>
+              <a:ext uri="{FF2B5EF4-FFF2-40B4-BE49-F238E27FC236}">
+                <a16:creationId xmlns:a16="http://schemas.microsoft.com/office/drawing/2014/main" id="{F4100F9F-2017-C845-942C-6B0D281529BE}"/>
               </a:ext>
             </a:extLst>
           </p:cNvPr>
@@ -9901,7 +15830,7 @@
         <p:spPr>
           <a:xfrm>
             <a:off x="325821" y="1048925"/>
-            <a:ext cx="5628411" cy="464871"/>
+            <a:ext cx="8189529" cy="4892108"/>
           </a:xfrm>
           <a:prstGeom prst="rect">
             <a:avLst/>
@@ -9914,25 +15843,361 @@
           </a:bodyPr>
           <a:lstStyle/>
           <a:p>
-            <a:pPr marL="285750" indent="-285750">
+            <a:pPr marL="285750" marR="0" lvl="0" indent="-285750" algn="l" defTabSz="914400" rtl="0" eaLnBrk="1" fontAlgn="auto" latinLnBrk="0" hangingPunct="1">
               <a:lnSpc>
                 <a:spcPct val="150000"/>
               </a:lnSpc>
+              <a:spcBef>
+                <a:spcPts val="0"/>
+              </a:spcBef>
+              <a:spcAft>
+                <a:spcPts val="0"/>
+              </a:spcAft>
+              <a:buClrTx/>
+              <a:buSzTx/>
               <a:buFont typeface="Arial" panose="020B0604020202020204" pitchFamily="34" charset="0"/>
               <a:buChar char="•"/>
+              <a:tabLst/>
+              <a:defRPr/>
             </a:pPr>
             <a:r>
-              <a:rPr kumimoji="1" lang="en-CN" altLang="zh-CN" i="1" dirty="0"/>
-              <a:t>Pros&amp;Cons</a:t>
-            </a:r>
-            <a:endParaRPr kumimoji="1" lang="en-US" altLang="zh-CN" i="1" dirty="0"/>
+              <a:rPr kumimoji="1" lang="en-CN" altLang="zh-CN" sz="2000" dirty="0">
+                <a:solidFill>
+                  <a:prstClr val="black"/>
+                </a:solidFill>
+                <a:latin typeface="Calibri" panose="020F0502020204030204"/>
+                <a:ea typeface="等线" panose="02010600030101010101" pitchFamily="2" charset="-122"/>
+              </a:rPr>
+              <a:t>7 amino acids map to 3 bp (a triplet) of DNA</a:t>
+            </a:r>
+          </a:p>
+          <a:p>
+            <a:pPr marL="800100" lvl="1" indent="-342900">
+              <a:lnSpc>
+                <a:spcPct val="150000"/>
+              </a:lnSpc>
+              <a:buFont typeface="Wingdings" pitchFamily="2" charset="2"/>
+              <a:buChar char="ü"/>
+              <a:defRPr/>
+            </a:pPr>
+            <a:r>
+              <a:rPr kumimoji="1" lang="en-CN" altLang="zh-CN" dirty="0">
+                <a:solidFill>
+                  <a:prstClr val="black"/>
+                </a:solidFill>
+                <a:latin typeface="Calibri" panose="020F0502020204030204"/>
+                <a:ea typeface="等线" panose="02010600030101010101" pitchFamily="2" charset="-122"/>
+              </a:rPr>
+              <a:t># of possible triplets: 4</a:t>
+            </a:r>
+            <a:r>
+              <a:rPr kumimoji="1" lang="en-CN" altLang="zh-CN" baseline="30000" dirty="0">
+                <a:solidFill>
+                  <a:prstClr val="black"/>
+                </a:solidFill>
+                <a:latin typeface="Calibri" panose="020F0502020204030204"/>
+                <a:ea typeface="等线" panose="02010600030101010101" pitchFamily="2" charset="-122"/>
+              </a:rPr>
+              <a:t>3</a:t>
+            </a:r>
+            <a:r>
+              <a:rPr kumimoji="1" lang="en-CN" altLang="zh-CN" dirty="0">
+                <a:solidFill>
+                  <a:prstClr val="black"/>
+                </a:solidFill>
+                <a:latin typeface="Calibri" panose="020F0502020204030204"/>
+                <a:ea typeface="等线" panose="02010600030101010101" pitchFamily="2" charset="-122"/>
+              </a:rPr>
+              <a:t> = 64</a:t>
+            </a:r>
+          </a:p>
+          <a:p>
+            <a:pPr marL="800100" lvl="1" indent="-342900">
+              <a:lnSpc>
+                <a:spcPct val="150000"/>
+              </a:lnSpc>
+              <a:buFont typeface="Wingdings" pitchFamily="2" charset="2"/>
+              <a:buChar char="ü"/>
+              <a:defRPr/>
+            </a:pPr>
+            <a:r>
+              <a:rPr kumimoji="1" lang="en-CN" altLang="zh-CN" dirty="0">
+                <a:solidFill>
+                  <a:prstClr val="black"/>
+                </a:solidFill>
+                <a:latin typeface="Calibri" panose="020F0502020204030204"/>
+                <a:ea typeface="等线" panose="02010600030101010101" pitchFamily="2" charset="-122"/>
+              </a:rPr>
+              <a:t># of possible arangements of amino acids: 20</a:t>
+            </a:r>
+            <a:r>
+              <a:rPr kumimoji="1" lang="en-CN" altLang="zh-CN" baseline="30000" dirty="0">
+                <a:solidFill>
+                  <a:prstClr val="black"/>
+                </a:solidFill>
+                <a:latin typeface="Calibri" panose="020F0502020204030204"/>
+                <a:ea typeface="等线" panose="02010600030101010101" pitchFamily="2" charset="-122"/>
+              </a:rPr>
+              <a:t>7</a:t>
+            </a:r>
+            <a:r>
+              <a:rPr kumimoji="1" lang="en-CN" altLang="zh-CN" dirty="0">
+                <a:solidFill>
+                  <a:prstClr val="black"/>
+                </a:solidFill>
+                <a:latin typeface="Calibri" panose="020F0502020204030204"/>
+                <a:ea typeface="等线" panose="02010600030101010101" pitchFamily="2" charset="-122"/>
+              </a:rPr>
+              <a:t> = …</a:t>
+            </a:r>
+          </a:p>
+          <a:p>
+            <a:pPr marL="285750" marR="0" lvl="0" indent="-285750" algn="l" defTabSz="914400" rtl="0" eaLnBrk="1" fontAlgn="auto" latinLnBrk="0" hangingPunct="1">
+              <a:lnSpc>
+                <a:spcPct val="150000"/>
+              </a:lnSpc>
+              <a:spcBef>
+                <a:spcPts val="0"/>
+              </a:spcBef>
+              <a:spcAft>
+                <a:spcPts val="0"/>
+              </a:spcAft>
+              <a:buClrTx/>
+              <a:buSzTx/>
+              <a:buFont typeface="Arial" panose="020B0604020202020204" pitchFamily="34" charset="0"/>
+              <a:buChar char="•"/>
+              <a:tabLst/>
+              <a:defRPr/>
+            </a:pPr>
+            <a:r>
+              <a:rPr kumimoji="1" lang="en-CN" altLang="zh-CN" sz="2000" dirty="0">
+                <a:solidFill>
+                  <a:prstClr val="black"/>
+                </a:solidFill>
+                <a:latin typeface="Calibri" panose="020F0502020204030204"/>
+                <a:ea typeface="等线" panose="02010600030101010101" pitchFamily="2" charset="-122"/>
+              </a:rPr>
+              <a:t>Problem</a:t>
+            </a:r>
+            <a:r>
+              <a:rPr kumimoji="1" lang="zh-CN" altLang="en-US" sz="2000" dirty="0">
+                <a:solidFill>
+                  <a:prstClr val="black"/>
+                </a:solidFill>
+                <a:latin typeface="Calibri" panose="020F0502020204030204"/>
+                <a:ea typeface="等线" panose="02010600030101010101" pitchFamily="2" charset="-122"/>
+              </a:rPr>
+              <a:t> </a:t>
+            </a:r>
+            <a:r>
+              <a:rPr kumimoji="1" lang="en-US" altLang="zh-CN" sz="2000" dirty="0">
+                <a:solidFill>
+                  <a:prstClr val="black"/>
+                </a:solidFill>
+                <a:latin typeface="Calibri" panose="020F0502020204030204"/>
+                <a:ea typeface="等线" panose="02010600030101010101" pitchFamily="2" charset="-122"/>
+              </a:rPr>
+              <a:t>1</a:t>
+            </a:r>
+            <a:r>
+              <a:rPr kumimoji="1" lang="en-CN" altLang="zh-CN" sz="2000" dirty="0">
+                <a:solidFill>
+                  <a:prstClr val="black"/>
+                </a:solidFill>
+                <a:latin typeface="Calibri" panose="020F0502020204030204"/>
+                <a:ea typeface="等线" panose="02010600030101010101" pitchFamily="2" charset="-122"/>
+              </a:rPr>
+              <a:t>: high complexity</a:t>
+            </a:r>
+            <a:endParaRPr kumimoji="1" lang="en-CN" altLang="zh-CN" sz="2000" b="0" i="0" u="none" strike="noStrike" kern="1200" cap="none" spc="0" normalizeH="0" baseline="0" noProof="0" dirty="0">
+              <a:ln>
+                <a:noFill/>
+              </a:ln>
+              <a:solidFill>
+                <a:prstClr val="black"/>
+              </a:solidFill>
+              <a:effectLst/>
+              <a:uLnTx/>
+              <a:uFillTx/>
+              <a:latin typeface="Calibri" panose="020F0502020204030204"/>
+              <a:ea typeface="等线" panose="02010600030101010101" pitchFamily="2" charset="-122"/>
+              <a:cs typeface="+mn-cs"/>
+            </a:endParaRPr>
+          </a:p>
+          <a:p>
+            <a:pPr marL="800100" lvl="1" indent="-342900">
+              <a:lnSpc>
+                <a:spcPct val="150000"/>
+              </a:lnSpc>
+              <a:buFont typeface="Wingdings" pitchFamily="2" charset="2"/>
+              <a:buChar char="ü"/>
+              <a:defRPr/>
+            </a:pPr>
+            <a:r>
+              <a:rPr kumimoji="1" lang="en-CN" altLang="zh-CN" dirty="0">
+                <a:solidFill>
+                  <a:prstClr val="black"/>
+                </a:solidFill>
+                <a:latin typeface="Calibri" panose="020F0502020204030204"/>
+                <a:ea typeface="等线" panose="02010600030101010101" pitchFamily="2" charset="-122"/>
+              </a:rPr>
+              <a:t>It could be very hard to select 64 correct arangements from 20</a:t>
+            </a:r>
+            <a:r>
+              <a:rPr kumimoji="1" lang="en-CN" altLang="zh-CN" baseline="30000" dirty="0">
+                <a:solidFill>
+                  <a:prstClr val="black"/>
+                </a:solidFill>
+                <a:latin typeface="Calibri" panose="020F0502020204030204"/>
+                <a:ea typeface="等线" panose="02010600030101010101" pitchFamily="2" charset="-122"/>
+              </a:rPr>
+              <a:t>7 </a:t>
+            </a:r>
+            <a:r>
+              <a:rPr kumimoji="1" lang="en-CN" altLang="zh-CN" dirty="0">
+                <a:solidFill>
+                  <a:prstClr val="black"/>
+                </a:solidFill>
+                <a:latin typeface="Calibri" panose="020F0502020204030204"/>
+                <a:ea typeface="等线" panose="02010600030101010101" pitchFamily="2" charset="-122"/>
+              </a:rPr>
+              <a:t>options.</a:t>
+            </a:r>
+          </a:p>
+          <a:p>
+            <a:pPr marL="800100" lvl="1" indent="-342900">
+              <a:lnSpc>
+                <a:spcPct val="150000"/>
+              </a:lnSpc>
+              <a:buFont typeface="Wingdings" pitchFamily="2" charset="2"/>
+              <a:buChar char="ü"/>
+              <a:defRPr/>
+            </a:pPr>
+            <a:r>
+              <a:rPr kumimoji="1" lang="en-CN" altLang="zh-CN" dirty="0">
+                <a:solidFill>
+                  <a:prstClr val="black"/>
+                </a:solidFill>
+                <a:latin typeface="Calibri" panose="020F0502020204030204"/>
+                <a:ea typeface="等线" panose="02010600030101010101" pitchFamily="2" charset="-122"/>
+              </a:rPr>
+              <a:t>In fact, </a:t>
+            </a:r>
+            <a:r>
+              <a:rPr kumimoji="1" lang="en-US" altLang="zh-CN" dirty="0">
+                <a:solidFill>
+                  <a:prstClr val="black"/>
+                </a:solidFill>
+                <a:latin typeface="Calibri" panose="020F0502020204030204"/>
+                <a:ea typeface="等线" panose="02010600030101010101" pitchFamily="2" charset="-122"/>
+              </a:rPr>
+              <a:t>it remains challenging to create zinc-finger domains that can effectively recognize all DNA triplets.</a:t>
+            </a:r>
+          </a:p>
+          <a:p>
+            <a:pPr marL="285750" marR="0" lvl="0" indent="-285750" algn="l" defTabSz="914400" rtl="0" eaLnBrk="1" fontAlgn="auto" latinLnBrk="0" hangingPunct="1">
+              <a:lnSpc>
+                <a:spcPct val="150000"/>
+              </a:lnSpc>
+              <a:spcBef>
+                <a:spcPts val="0"/>
+              </a:spcBef>
+              <a:spcAft>
+                <a:spcPts val="0"/>
+              </a:spcAft>
+              <a:buClrTx/>
+              <a:buSzTx/>
+              <a:buFont typeface="Arial" panose="020B0604020202020204" pitchFamily="34" charset="0"/>
+              <a:buChar char="•"/>
+              <a:tabLst/>
+              <a:defRPr/>
+            </a:pPr>
+            <a:r>
+              <a:rPr kumimoji="1" lang="en-CN" altLang="zh-CN" sz="2000" dirty="0">
+                <a:solidFill>
+                  <a:prstClr val="black"/>
+                </a:solidFill>
+                <a:latin typeface="Calibri" panose="020F0502020204030204"/>
+                <a:ea typeface="等线" panose="02010600030101010101" pitchFamily="2" charset="-122"/>
+              </a:rPr>
+              <a:t>Problem 2: lack of target flexibility</a:t>
+            </a:r>
+          </a:p>
+          <a:p>
+            <a:pPr marL="800100" lvl="1" indent="-342900">
+              <a:lnSpc>
+                <a:spcPct val="150000"/>
+              </a:lnSpc>
+              <a:buFont typeface="Wingdings" pitchFamily="2" charset="2"/>
+              <a:buChar char="ü"/>
+              <a:defRPr/>
+            </a:pPr>
+            <a:r>
+              <a:rPr kumimoji="1" lang="en-CN" altLang="zh-CN" dirty="0">
+                <a:solidFill>
+                  <a:prstClr val="black"/>
+                </a:solidFill>
+                <a:latin typeface="Calibri" panose="020F0502020204030204"/>
+                <a:ea typeface="等线" panose="02010600030101010101" pitchFamily="2" charset="-122"/>
+              </a:rPr>
+              <a:t>Must find a triplet that can be targeted near targeted sites</a:t>
+            </a:r>
+          </a:p>
+          <a:p>
+            <a:pPr marL="285750" marR="0" lvl="0" indent="-285750" algn="l" defTabSz="914400" rtl="0" eaLnBrk="1" fontAlgn="auto" latinLnBrk="0" hangingPunct="1">
+              <a:lnSpc>
+                <a:spcPct val="150000"/>
+              </a:lnSpc>
+              <a:spcBef>
+                <a:spcPts val="0"/>
+              </a:spcBef>
+              <a:spcAft>
+                <a:spcPts val="0"/>
+              </a:spcAft>
+              <a:buClrTx/>
+              <a:buSzTx/>
+              <a:buFont typeface="Arial" panose="020B0604020202020204" pitchFamily="34" charset="0"/>
+              <a:buChar char="•"/>
+              <a:tabLst/>
+              <a:defRPr/>
+            </a:pPr>
+            <a:r>
+              <a:rPr kumimoji="1" lang="en-CN" altLang="zh-CN" sz="2000" dirty="0">
+                <a:solidFill>
+                  <a:prstClr val="black"/>
+                </a:solidFill>
+                <a:latin typeface="Calibri" panose="020F0502020204030204"/>
+                <a:ea typeface="等线" panose="02010600030101010101" pitchFamily="2" charset="-122"/>
+              </a:rPr>
+              <a:t>Problem 3: expensive and difficult to build zinc-finger arrays</a:t>
+            </a:r>
+          </a:p>
+          <a:p>
+            <a:pPr marL="742950" lvl="1" indent="-285750">
+              <a:lnSpc>
+                <a:spcPct val="150000"/>
+              </a:lnSpc>
+              <a:buFont typeface="Wingdings" pitchFamily="2" charset="2"/>
+              <a:buChar char="ü"/>
+              <a:defRPr/>
+            </a:pPr>
+            <a:r>
+              <a:rPr kumimoji="1" lang="en-CN" altLang="zh-CN" dirty="0">
+                <a:solidFill>
+                  <a:prstClr val="black"/>
+                </a:solidFill>
+                <a:latin typeface="Calibri" panose="020F0502020204030204"/>
+                <a:ea typeface="等线" panose="02010600030101010101" pitchFamily="2" charset="-122"/>
+              </a:rPr>
+              <a:t>Sequence design, transfection, expression, purify, delivery…</a:t>
+            </a:r>
           </a:p>
         </p:txBody>
       </p:sp>
     </p:spTree>
     <p:extLst>
       <p:ext uri="{BB962C8B-B14F-4D97-AF65-F5344CB8AC3E}">
-        <p14:creationId xmlns:p14="http://schemas.microsoft.com/office/powerpoint/2010/main" val="431899994"/>
+        <p14:creationId xmlns:p14="http://schemas.microsoft.com/office/powerpoint/2010/main" val="3050045716"/>
       </p:ext>
     </p:extLst>
   </p:cSld>

--- a/遗传学(Genetics)/讨论课/Topic-3_遗传学技术/CRISPR-Cas.pptx
+++ b/遗传学(Genetics)/讨论课/Topic-3_遗传学技术/CRISPR-Cas.pptx
@@ -16400,7 +16400,7 @@
         </p:nvGrpSpPr>
         <p:grpSpPr>
           <a:xfrm>
-            <a:off x="167083" y="6404483"/>
+            <a:off x="0" y="6393849"/>
             <a:ext cx="12192000" cy="464151"/>
             <a:chOff x="0" y="6393850"/>
             <a:chExt cx="7962900" cy="464151"/>
@@ -23342,7 +23342,7 @@
         </p:nvSpPr>
         <p:spPr>
           <a:xfrm>
-            <a:off x="415515" y="1048925"/>
+            <a:off x="325821" y="1048925"/>
             <a:ext cx="5197877" cy="6097182"/>
           </a:xfrm>
           <a:prstGeom prst="rect">
